--- a/07_Final/slides/CAAS_final_Rev1.pptx
+++ b/07_Final/slides/CAAS_final_Rev1.pptx
@@ -3552,7 +3552,9 @@
           <a:lstStyle/>
           <a:p>
             <a:pPr algn="ctr"/>
-            <a:endParaRPr/>
+            <a:endParaRPr>
+              <a:latin typeface="Century Gothic" panose="020B0502020202020204" pitchFamily="34" charset="0"/>
+            </a:endParaRPr>
           </a:p>
         </p:txBody>
       </p:sp>
@@ -3565,7 +3567,7 @@
         <p:spPr>
           <a:xfrm>
             <a:off x="0" y="0"/>
-            <a:ext cx="4572000" cy="6858000"/>
+            <a:ext cx="12192000" cy="6858000"/>
           </a:xfrm>
           <a:prstGeom prst="rect">
             <a:avLst/>
@@ -3597,65 +3599,22 @@
           <a:lstStyle/>
           <a:p>
             <a:pPr algn="ctr"/>
-            <a:endParaRPr/>
-          </a:p>
-        </p:txBody>
-      </p:sp>
-      <p:sp>
-        <p:nvSpPr>
-          <p:cNvPr id="4" name="Rectangle 3"/>
-          <p:cNvSpPr/>
-          <p:nvPr/>
-        </p:nvSpPr>
-        <p:spPr>
-          <a:xfrm>
-            <a:off x="640080" y="2926080"/>
-            <a:ext cx="548640" cy="45720"/>
-          </a:xfrm>
-          <a:prstGeom prst="rect">
-            <a:avLst/>
-          </a:prstGeom>
-          <a:solidFill>
-            <a:srgbClr val="E8B900"/>
-          </a:solidFill>
-          <a:ln>
-            <a:noFill/>
-          </a:ln>
-          <a:effectLst/>
-        </p:spPr>
-        <p:style>
-          <a:lnRef idx="1">
-            <a:schemeClr val="accent1"/>
-          </a:lnRef>
-          <a:fillRef idx="3">
-            <a:schemeClr val="accent1"/>
-          </a:fillRef>
-          <a:effectRef idx="2">
-            <a:schemeClr val="accent1"/>
-          </a:effectRef>
-          <a:fontRef idx="minor">
-            <a:schemeClr val="lt1"/>
-          </a:fontRef>
-        </p:style>
-        <p:txBody>
-          <a:bodyPr rtlCol="0" anchor="ctr"/>
-          <a:lstStyle/>
-          <a:p>
-            <a:pPr algn="ctr"/>
-            <a:endParaRPr/>
-          </a:p>
-        </p:txBody>
-      </p:sp>
-      <p:sp>
-        <p:nvSpPr>
-          <p:cNvPr id="5" name="TextBox 4"/>
-          <p:cNvSpPr txBox="1"/>
-          <p:nvPr/>
-        </p:nvSpPr>
-        <p:spPr>
-          <a:xfrm>
-            <a:off x="640080" y="822960"/>
-            <a:ext cx="3657600" cy="365760"/>
+            <a:endParaRPr dirty="0">
+              <a:latin typeface="Century Gothic" panose="020B0502020202020204" pitchFamily="34" charset="0"/>
+            </a:endParaRPr>
+          </a:p>
+        </p:txBody>
+      </p:sp>
+      <p:sp>
+        <p:nvSpPr>
+          <p:cNvPr id="7" name="TextBox 6"/>
+          <p:cNvSpPr txBox="1"/>
+          <p:nvPr/>
+        </p:nvSpPr>
+        <p:spPr>
+          <a:xfrm>
+            <a:off x="580260" y="2252879"/>
+            <a:ext cx="10922379" cy="738664"/>
           </a:xfrm>
           <a:prstGeom prst="rect">
             <a:avLst/>
@@ -3670,27 +3629,72 @@
           <a:p>
             <a:pPr algn="l"/>
             <a:r>
-              <a:rPr sz="1100" b="1" i="0">
+              <a:rPr sz="4800" b="1" i="0" dirty="0" err="1">
                 <a:solidFill>
                   <a:srgbClr val="FFFFFF"/>
                 </a:solidFill>
-                <a:latin typeface="Calibri"/>
-              </a:rPr>
-              <a:t>CAPSTONE  ·  AT82.9002</a:t>
-            </a:r>
-          </a:p>
-        </p:txBody>
-      </p:sp>
-      <p:sp>
-        <p:nvSpPr>
-          <p:cNvPr id="6" name="TextBox 5"/>
-          <p:cNvSpPr txBox="1"/>
-          <p:nvPr/>
-        </p:nvSpPr>
-        <p:spPr>
-          <a:xfrm>
-            <a:off x="640080" y="1371600"/>
-            <a:ext cx="3840480" cy="1463040"/>
+                <a:latin typeface="Century Gothic" panose="020B0502020202020204" pitchFamily="34" charset="0"/>
+              </a:rPr>
+              <a:t>ChiangMai</a:t>
+            </a:r>
+            <a:r>
+              <a:rPr sz="4800" b="1" i="0" dirty="0">
+                <a:solidFill>
+                  <a:srgbClr val="FFFFFF"/>
+                </a:solidFill>
+                <a:latin typeface="Century Gothic" panose="020B0502020202020204" pitchFamily="34" charset="0"/>
+              </a:rPr>
+              <a:t> Air</a:t>
+            </a:r>
+            <a:r>
+              <a:rPr lang="en-US" sz="4800" b="1" i="0" dirty="0">
+                <a:solidFill>
+                  <a:srgbClr val="FFFFFF"/>
+                </a:solidFill>
+                <a:latin typeface="Century Gothic" panose="020B0502020202020204" pitchFamily="34" charset="0"/>
+              </a:rPr>
+              <a:t> </a:t>
+            </a:r>
+            <a:r>
+              <a:rPr sz="4800" b="1" i="0" dirty="0">
+                <a:solidFill>
+                  <a:srgbClr val="FFFFFF"/>
+                </a:solidFill>
+                <a:latin typeface="Century Gothic" panose="020B0502020202020204" pitchFamily="34" charset="0"/>
+              </a:rPr>
+              <a:t>Quality Alert</a:t>
+            </a:r>
+            <a:r>
+              <a:rPr lang="en-US" sz="4800" b="1" i="0" dirty="0">
+                <a:solidFill>
+                  <a:srgbClr val="FFFFFF"/>
+                </a:solidFill>
+                <a:latin typeface="Century Gothic" panose="020B0502020202020204" pitchFamily="34" charset="0"/>
+              </a:rPr>
+              <a:t> </a:t>
+            </a:r>
+            <a:r>
+              <a:rPr sz="4800" b="1" i="0" dirty="0">
+                <a:solidFill>
+                  <a:srgbClr val="FFFFFF"/>
+                </a:solidFill>
+                <a:latin typeface="Century Gothic" panose="020B0502020202020204" pitchFamily="34" charset="0"/>
+              </a:rPr>
+              <a:t>System</a:t>
+            </a:r>
+          </a:p>
+        </p:txBody>
+      </p:sp>
+      <p:sp>
+        <p:nvSpPr>
+          <p:cNvPr id="10" name="TextBox 9"/>
+          <p:cNvSpPr txBox="1"/>
+          <p:nvPr/>
+        </p:nvSpPr>
+        <p:spPr>
+          <a:xfrm>
+            <a:off x="609600" y="3646639"/>
+            <a:ext cx="6400800" cy="169277"/>
           </a:xfrm>
           <a:prstGeom prst="rect">
             <a:avLst/>
@@ -3705,27 +3709,27 @@
           <a:p>
             <a:pPr algn="l"/>
             <a:r>
-              <a:rPr sz="8800" b="1" i="0">
-                <a:solidFill>
-                  <a:srgbClr val="FFFFFF"/>
-                </a:solidFill>
-                <a:latin typeface="Calibri"/>
-              </a:rPr>
-              <a:t>CAAS</a:t>
-            </a:r>
-          </a:p>
-        </p:txBody>
-      </p:sp>
-      <p:sp>
-        <p:nvSpPr>
-          <p:cNvPr id="7" name="TextBox 6"/>
-          <p:cNvSpPr txBox="1"/>
-          <p:nvPr/>
-        </p:nvSpPr>
-        <p:spPr>
-          <a:xfrm>
-            <a:off x="640080" y="3108960"/>
-            <a:ext cx="3840480" cy="1097280"/>
+              <a:rPr sz="1100" b="1" i="0" dirty="0">
+                <a:solidFill>
+                  <a:schemeClr val="bg1"/>
+                </a:solidFill>
+                <a:latin typeface="Century Gothic" panose="020B0502020202020204" pitchFamily="34" charset="0"/>
+              </a:rPr>
+              <a:t>PRESENTED BY</a:t>
+            </a:r>
+          </a:p>
+        </p:txBody>
+      </p:sp>
+      <p:sp>
+        <p:nvSpPr>
+          <p:cNvPr id="11" name="TextBox 10"/>
+          <p:cNvSpPr txBox="1"/>
+          <p:nvPr/>
+        </p:nvSpPr>
+        <p:spPr>
+          <a:xfrm>
+            <a:off x="609600" y="3985678"/>
+            <a:ext cx="6400800" cy="215444"/>
           </a:xfrm>
           <a:prstGeom prst="rect">
             <a:avLst/>
@@ -3740,51 +3744,97 @@
           <a:p>
             <a:pPr algn="l"/>
             <a:r>
-              <a:rPr sz="2600" b="1" i="0">
-                <a:solidFill>
-                  <a:srgbClr val="FFFFFF"/>
-                </a:solidFill>
-                <a:latin typeface="Calibri"/>
-              </a:rPr>
-              <a:t>ChiangMai Air</a:t>
-            </a:r>
-          </a:p>
+              <a:rPr sz="1400" b="1" i="0" dirty="0">
+                <a:solidFill>
+                  <a:schemeClr val="bg1"/>
+                </a:solidFill>
+                <a:latin typeface="Century Gothic" panose="020B0502020202020204" pitchFamily="34" charset="0"/>
+              </a:rPr>
+              <a:t>Supanut Kompayak</a:t>
+            </a:r>
+          </a:p>
+        </p:txBody>
+      </p:sp>
+      <p:sp>
+        <p:nvSpPr>
+          <p:cNvPr id="12" name="TextBox 11"/>
+          <p:cNvSpPr txBox="1"/>
+          <p:nvPr/>
+        </p:nvSpPr>
+        <p:spPr>
+          <a:xfrm>
+            <a:off x="609600" y="4234682"/>
+            <a:ext cx="6400800" cy="138499"/>
+          </a:xfrm>
+          <a:prstGeom prst="rect">
+            <a:avLst/>
+          </a:prstGeom>
+          <a:noFill/>
+        </p:spPr>
+        <p:txBody>
+          <a:bodyPr wrap="square" lIns="0" tIns="0" rIns="0" bIns="0">
+            <a:spAutoFit/>
+          </a:bodyPr>
+          <a:lstStyle/>
           <a:p>
             <a:pPr algn="l"/>
             <a:r>
-              <a:rPr sz="2600" b="1" i="0">
-                <a:solidFill>
-                  <a:srgbClr val="FFFFFF"/>
-                </a:solidFill>
-                <a:latin typeface="Calibri"/>
-              </a:rPr>
-              <a:t>Quality Alert</a:t>
-            </a:r>
-          </a:p>
+              <a:rPr sz="900" b="0" i="0" dirty="0">
+                <a:solidFill>
+                  <a:schemeClr val="bg1"/>
+                </a:solidFill>
+                <a:latin typeface="Century Gothic" panose="020B0502020202020204" pitchFamily="34" charset="0"/>
+              </a:rPr>
+              <a:t>st126055</a:t>
+            </a:r>
+          </a:p>
+        </p:txBody>
+      </p:sp>
+      <p:sp>
+        <p:nvSpPr>
+          <p:cNvPr id="13" name="TextBox 12"/>
+          <p:cNvSpPr txBox="1"/>
+          <p:nvPr/>
+        </p:nvSpPr>
+        <p:spPr>
+          <a:xfrm>
+            <a:off x="609600" y="4476207"/>
+            <a:ext cx="6400800" cy="215444"/>
+          </a:xfrm>
+          <a:prstGeom prst="rect">
+            <a:avLst/>
+          </a:prstGeom>
+          <a:noFill/>
+        </p:spPr>
+        <p:txBody>
+          <a:bodyPr wrap="square" lIns="0" tIns="0" rIns="0" bIns="0">
+            <a:spAutoFit/>
+          </a:bodyPr>
+          <a:lstStyle/>
           <a:p>
             <a:pPr algn="l"/>
             <a:r>
-              <a:rPr sz="2600" b="1" i="0">
-                <a:solidFill>
-                  <a:srgbClr val="FFFFFF"/>
-                </a:solidFill>
-                <a:latin typeface="Calibri"/>
-              </a:rPr>
-              <a:t>System</a:t>
-            </a:r>
-          </a:p>
-        </p:txBody>
-      </p:sp>
-      <p:sp>
-        <p:nvSpPr>
-          <p:cNvPr id="8" name="TextBox 7"/>
-          <p:cNvSpPr txBox="1"/>
-          <p:nvPr/>
-        </p:nvSpPr>
-        <p:spPr>
-          <a:xfrm>
-            <a:off x="640080" y="4846320"/>
-            <a:ext cx="3657600" cy="365760"/>
+              <a:rPr sz="1400" b="1" i="0">
+                <a:solidFill>
+                  <a:schemeClr val="bg1"/>
+                </a:solidFill>
+                <a:latin typeface="Century Gothic" panose="020B0502020202020204" pitchFamily="34" charset="0"/>
+              </a:rPr>
+              <a:t>Shuvam Shrestha</a:t>
+            </a:r>
+          </a:p>
+        </p:txBody>
+      </p:sp>
+      <p:sp>
+        <p:nvSpPr>
+          <p:cNvPr id="14" name="TextBox 13"/>
+          <p:cNvSpPr txBox="1"/>
+          <p:nvPr/>
+        </p:nvSpPr>
+        <p:spPr>
+          <a:xfrm>
+            <a:off x="609600" y="4706541"/>
+            <a:ext cx="6400800" cy="138499"/>
           </a:xfrm>
           <a:prstGeom prst="rect">
             <a:avLst/>
@@ -3799,27 +3849,27 @@
           <a:p>
             <a:pPr algn="l"/>
             <a:r>
-              <a:rPr sz="1300" b="0" i="0">
-                <a:solidFill>
-                  <a:srgbClr val="FFFFFF"/>
-                </a:solidFill>
-                <a:latin typeface="Calibri"/>
-              </a:rPr>
-              <a:t>PM2.5 forecasting at t+1 / t+3 / t+7 days</a:t>
-            </a:r>
-          </a:p>
-        </p:txBody>
-      </p:sp>
-      <p:sp>
-        <p:nvSpPr>
-          <p:cNvPr id="9" name="TextBox 8"/>
-          <p:cNvSpPr txBox="1"/>
-          <p:nvPr/>
-        </p:nvSpPr>
-        <p:spPr>
-          <a:xfrm>
-            <a:off x="640080" y="6400800"/>
-            <a:ext cx="3657600" cy="274320"/>
+              <a:rPr sz="900" b="0" i="0" dirty="0">
+                <a:solidFill>
+                  <a:schemeClr val="bg1"/>
+                </a:solidFill>
+                <a:latin typeface="Century Gothic" panose="020B0502020202020204" pitchFamily="34" charset="0"/>
+              </a:rPr>
+              <a:t>st125975</a:t>
+            </a:r>
+          </a:p>
+        </p:txBody>
+      </p:sp>
+      <p:sp>
+        <p:nvSpPr>
+          <p:cNvPr id="17" name="TextBox 16"/>
+          <p:cNvSpPr txBox="1"/>
+          <p:nvPr/>
+        </p:nvSpPr>
+        <p:spPr>
+          <a:xfrm>
+            <a:off x="609600" y="1842035"/>
+            <a:ext cx="6400800" cy="246221"/>
           </a:xfrm>
           <a:prstGeom prst="rect">
             <a:avLst/>
@@ -3834,27 +3884,42 @@
           <a:p>
             <a:pPr algn="l"/>
             <a:r>
-              <a:rPr sz="1000" b="0" i="0">
-                <a:solidFill>
-                  <a:srgbClr val="FFFFFF"/>
-                </a:solidFill>
-                <a:latin typeface="Calibri"/>
-              </a:rPr>
-              <a:t>April 2026</a:t>
-            </a:r>
-          </a:p>
-        </p:txBody>
-      </p:sp>
-      <p:sp>
-        <p:nvSpPr>
-          <p:cNvPr id="10" name="TextBox 9"/>
-          <p:cNvSpPr txBox="1"/>
-          <p:nvPr/>
-        </p:nvSpPr>
-        <p:spPr>
-          <a:xfrm>
-            <a:off x="5303520" y="914400"/>
-            <a:ext cx="6400800" cy="365760"/>
+              <a:rPr sz="1600" b="1" i="0" dirty="0">
+                <a:solidFill>
+                  <a:schemeClr val="bg1"/>
+                </a:solidFill>
+                <a:latin typeface="Century Gothic" panose="020B0502020202020204" pitchFamily="34" charset="0"/>
+              </a:rPr>
+              <a:t>AT82.9002  Data Engineering and </a:t>
+            </a:r>
+            <a:r>
+              <a:rPr sz="1600" b="1" i="0" dirty="0" err="1">
+                <a:solidFill>
+                  <a:schemeClr val="bg1"/>
+                </a:solidFill>
+                <a:latin typeface="Century Gothic" panose="020B0502020202020204" pitchFamily="34" charset="0"/>
+              </a:rPr>
+              <a:t>MLOps</a:t>
+            </a:r>
+            <a:endParaRPr sz="1600" b="1" i="0" dirty="0">
+              <a:solidFill>
+                <a:schemeClr val="bg1"/>
+              </a:solidFill>
+              <a:latin typeface="Century Gothic" panose="020B0502020202020204" pitchFamily="34" charset="0"/>
+            </a:endParaRPr>
+          </a:p>
+        </p:txBody>
+      </p:sp>
+      <p:sp>
+        <p:nvSpPr>
+          <p:cNvPr id="18" name="TextBox 17"/>
+          <p:cNvSpPr txBox="1"/>
+          <p:nvPr/>
+        </p:nvSpPr>
+        <p:spPr>
+          <a:xfrm>
+            <a:off x="4981344" y="6581499"/>
+            <a:ext cx="6400800" cy="184666"/>
           </a:xfrm>
           <a:prstGeom prst="rect">
             <a:avLst/>
@@ -3869,27 +3934,27 @@
           <a:p>
             <a:pPr algn="l"/>
             <a:r>
-              <a:rPr sz="1100" b="1" i="0">
-                <a:solidFill>
-                  <a:srgbClr val="0F52BA"/>
-                </a:solidFill>
-                <a:latin typeface="Calibri"/>
-              </a:rPr>
-              <a:t>PRESENTED BY</a:t>
-            </a:r>
-          </a:p>
-        </p:txBody>
-      </p:sp>
-      <p:sp>
-        <p:nvSpPr>
-          <p:cNvPr id="11" name="TextBox 10"/>
-          <p:cNvSpPr txBox="1"/>
-          <p:nvPr/>
-        </p:nvSpPr>
-        <p:spPr>
-          <a:xfrm>
-            <a:off x="5303520" y="1371600"/>
-            <a:ext cx="6400800" cy="640080"/>
+              <a:rPr sz="1200" b="0" i="0" dirty="0">
+                <a:solidFill>
+                  <a:schemeClr val="bg1"/>
+                </a:solidFill>
+                <a:latin typeface="Century Gothic" panose="020B0502020202020204" pitchFamily="34" charset="0"/>
+              </a:rPr>
+              <a:t>Asian Institute of Technology  ·  2026</a:t>
+            </a:r>
+          </a:p>
+        </p:txBody>
+      </p:sp>
+      <p:sp>
+        <p:nvSpPr>
+          <p:cNvPr id="19" name="TextBox 18"/>
+          <p:cNvSpPr txBox="1"/>
+          <p:nvPr/>
+        </p:nvSpPr>
+        <p:spPr>
+          <a:xfrm>
+            <a:off x="580260" y="5091641"/>
+            <a:ext cx="6400800" cy="153888"/>
           </a:xfrm>
           <a:prstGeom prst="rect">
             <a:avLst/>
@@ -3904,27 +3969,27 @@
           <a:p>
             <a:pPr algn="l"/>
             <a:r>
-              <a:rPr sz="2600" b="1" i="0">
-                <a:solidFill>
-                  <a:srgbClr val="1A1A1A"/>
-                </a:solidFill>
-                <a:latin typeface="Calibri"/>
-              </a:rPr>
-              <a:t>Supanut Kompayak</a:t>
-            </a:r>
-          </a:p>
-        </p:txBody>
-      </p:sp>
-      <p:sp>
-        <p:nvSpPr>
-          <p:cNvPr id="12" name="TextBox 11"/>
-          <p:cNvSpPr txBox="1"/>
-          <p:nvPr/>
-        </p:nvSpPr>
-        <p:spPr>
-          <a:xfrm>
-            <a:off x="5303520" y="1874519"/>
-            <a:ext cx="6400800" cy="365760"/>
+              <a:rPr sz="1000" b="1" i="0" dirty="0">
+                <a:solidFill>
+                  <a:schemeClr val="bg1"/>
+                </a:solidFill>
+                <a:latin typeface="Century Gothic" panose="020B0502020202020204" pitchFamily="34" charset="0"/>
+              </a:rPr>
+              <a:t>ADVISORS</a:t>
+            </a:r>
+          </a:p>
+        </p:txBody>
+      </p:sp>
+      <p:sp>
+        <p:nvSpPr>
+          <p:cNvPr id="20" name="TextBox 19"/>
+          <p:cNvSpPr txBox="1"/>
+          <p:nvPr/>
+        </p:nvSpPr>
+        <p:spPr>
+          <a:xfrm>
+            <a:off x="1477568" y="5076252"/>
+            <a:ext cx="6400800" cy="184666"/>
           </a:xfrm>
           <a:prstGeom prst="rect">
             <a:avLst/>
@@ -3939,304 +4004,47 @@
           <a:p>
             <a:pPr algn="l"/>
             <a:r>
-              <a:rPr sz="1300" b="0" i="0">
-                <a:solidFill>
-                  <a:srgbClr val="6B6B6B"/>
-                </a:solidFill>
-                <a:latin typeface="Calibri"/>
-              </a:rPr>
-              <a:t>st126055</a:t>
-            </a:r>
-          </a:p>
-        </p:txBody>
-      </p:sp>
-      <p:sp>
-        <p:nvSpPr>
-          <p:cNvPr id="13" name="TextBox 12"/>
-          <p:cNvSpPr txBox="1"/>
-          <p:nvPr/>
-        </p:nvSpPr>
-        <p:spPr>
-          <a:xfrm>
-            <a:off x="5303520" y="2514600"/>
-            <a:ext cx="6400800" cy="640080"/>
-          </a:xfrm>
-          <a:prstGeom prst="rect">
-            <a:avLst/>
-          </a:prstGeom>
-          <a:noFill/>
-        </p:spPr>
-        <p:txBody>
-          <a:bodyPr wrap="square" lIns="0" tIns="0" rIns="0" bIns="0">
-            <a:spAutoFit/>
-          </a:bodyPr>
-          <a:lstStyle/>
-          <a:p>
-            <a:pPr algn="l"/>
-            <a:r>
-              <a:rPr sz="2600" b="1" i="0">
-                <a:solidFill>
-                  <a:srgbClr val="1A1A1A"/>
-                </a:solidFill>
-                <a:latin typeface="Calibri"/>
-              </a:rPr>
-              <a:t>Shuvam Shrestha</a:t>
-            </a:r>
-          </a:p>
-        </p:txBody>
-      </p:sp>
-      <p:sp>
-        <p:nvSpPr>
-          <p:cNvPr id="14" name="TextBox 13"/>
-          <p:cNvSpPr txBox="1"/>
-          <p:nvPr/>
-        </p:nvSpPr>
-        <p:spPr>
-          <a:xfrm>
-            <a:off x="5303520" y="3017520"/>
-            <a:ext cx="6400800" cy="365760"/>
-          </a:xfrm>
-          <a:prstGeom prst="rect">
-            <a:avLst/>
-          </a:prstGeom>
-          <a:noFill/>
-        </p:spPr>
-        <p:txBody>
-          <a:bodyPr wrap="square" lIns="0" tIns="0" rIns="0" bIns="0">
-            <a:spAutoFit/>
-          </a:bodyPr>
-          <a:lstStyle/>
-          <a:p>
-            <a:pPr algn="l"/>
-            <a:r>
-              <a:rPr sz="1300" b="0" i="0">
-                <a:solidFill>
-                  <a:srgbClr val="6B6B6B"/>
-                </a:solidFill>
-                <a:latin typeface="Calibri"/>
-              </a:rPr>
-              <a:t>st125975</a:t>
-            </a:r>
-          </a:p>
-        </p:txBody>
-      </p:sp>
-      <p:sp>
-        <p:nvSpPr>
-          <p:cNvPr id="15" name="Rectangle 14"/>
-          <p:cNvSpPr/>
-          <p:nvPr/>
-        </p:nvSpPr>
-        <p:spPr>
-          <a:xfrm>
-            <a:off x="5303520" y="3931920"/>
-            <a:ext cx="5943600" cy="36576"/>
-          </a:xfrm>
-          <a:prstGeom prst="rect">
-            <a:avLst/>
-          </a:prstGeom>
-          <a:solidFill>
-            <a:srgbClr val="D5D5D5"/>
-          </a:solidFill>
-          <a:ln>
-            <a:noFill/>
-          </a:ln>
-          <a:effectLst/>
-        </p:spPr>
-        <p:style>
-          <a:lnRef idx="1">
-            <a:schemeClr val="accent1"/>
-          </a:lnRef>
-          <a:fillRef idx="3">
-            <a:schemeClr val="accent1"/>
-          </a:fillRef>
-          <a:effectRef idx="2">
-            <a:schemeClr val="accent1"/>
-          </a:effectRef>
-          <a:fontRef idx="minor">
-            <a:schemeClr val="lt1"/>
-          </a:fontRef>
-        </p:style>
-        <p:txBody>
-          <a:bodyPr rtlCol="0" anchor="ctr"/>
-          <a:lstStyle/>
-          <a:p>
-            <a:pPr algn="ctr"/>
-            <a:endParaRPr/>
-          </a:p>
-        </p:txBody>
-      </p:sp>
-      <p:sp>
-        <p:nvSpPr>
-          <p:cNvPr id="16" name="TextBox 15"/>
-          <p:cNvSpPr txBox="1"/>
-          <p:nvPr/>
-        </p:nvSpPr>
-        <p:spPr>
-          <a:xfrm>
-            <a:off x="5303520" y="4206240"/>
-            <a:ext cx="6400800" cy="365760"/>
-          </a:xfrm>
-          <a:prstGeom prst="rect">
-            <a:avLst/>
-          </a:prstGeom>
-          <a:noFill/>
-        </p:spPr>
-        <p:txBody>
-          <a:bodyPr wrap="square" lIns="0" tIns="0" rIns="0" bIns="0">
-            <a:spAutoFit/>
-          </a:bodyPr>
-          <a:lstStyle/>
-          <a:p>
-            <a:pPr algn="l"/>
-            <a:r>
-              <a:rPr sz="1000" b="1" i="0">
-                <a:solidFill>
-                  <a:srgbClr val="0F52BA"/>
-                </a:solidFill>
-                <a:latin typeface="Calibri"/>
-              </a:rPr>
-              <a:t>COURSE</a:t>
-            </a:r>
-          </a:p>
-        </p:txBody>
-      </p:sp>
-      <p:sp>
-        <p:nvSpPr>
-          <p:cNvPr id="17" name="TextBox 16"/>
-          <p:cNvSpPr txBox="1"/>
-          <p:nvPr/>
-        </p:nvSpPr>
-        <p:spPr>
-          <a:xfrm>
-            <a:off x="5303520" y="4526280"/>
-            <a:ext cx="6400800" cy="411480"/>
-          </a:xfrm>
-          <a:prstGeom prst="rect">
-            <a:avLst/>
-          </a:prstGeom>
-          <a:noFill/>
-        </p:spPr>
-        <p:txBody>
-          <a:bodyPr wrap="square" lIns="0" tIns="0" rIns="0" bIns="0">
-            <a:spAutoFit/>
-          </a:bodyPr>
-          <a:lstStyle/>
-          <a:p>
-            <a:pPr algn="l"/>
-            <a:r>
-              <a:rPr sz="1600" b="1" i="0">
-                <a:solidFill>
-                  <a:srgbClr val="1A1A1A"/>
-                </a:solidFill>
-                <a:latin typeface="Calibri"/>
-              </a:rPr>
-              <a:t>AT82.9002  Data Engineering and MLOps</a:t>
-            </a:r>
-          </a:p>
-        </p:txBody>
-      </p:sp>
-      <p:sp>
-        <p:nvSpPr>
-          <p:cNvPr id="18" name="TextBox 17"/>
-          <p:cNvSpPr txBox="1"/>
-          <p:nvPr/>
-        </p:nvSpPr>
-        <p:spPr>
-          <a:xfrm>
-            <a:off x="5303520" y="4983480"/>
-            <a:ext cx="6400800" cy="365760"/>
-          </a:xfrm>
-          <a:prstGeom prst="rect">
-            <a:avLst/>
-          </a:prstGeom>
-          <a:noFill/>
-        </p:spPr>
-        <p:txBody>
-          <a:bodyPr wrap="square" lIns="0" tIns="0" rIns="0" bIns="0">
-            <a:spAutoFit/>
-          </a:bodyPr>
-          <a:lstStyle/>
-          <a:p>
-            <a:pPr algn="l"/>
-            <a:r>
-              <a:rPr sz="1200" b="0" i="0">
-                <a:solidFill>
-                  <a:srgbClr val="6B6B6B"/>
-                </a:solidFill>
-                <a:latin typeface="Calibri"/>
-              </a:rPr>
-              <a:t>Asian Institute of Technology  ·  2026 cohort</a:t>
-            </a:r>
-          </a:p>
-        </p:txBody>
-      </p:sp>
-      <p:sp>
-        <p:nvSpPr>
-          <p:cNvPr id="19" name="TextBox 18"/>
-          <p:cNvSpPr txBox="1"/>
-          <p:nvPr/>
-        </p:nvSpPr>
-        <p:spPr>
-          <a:xfrm>
-            <a:off x="5303520" y="6035040"/>
-            <a:ext cx="6400800" cy="365760"/>
-          </a:xfrm>
-          <a:prstGeom prst="rect">
-            <a:avLst/>
-          </a:prstGeom>
-          <a:noFill/>
-        </p:spPr>
-        <p:txBody>
-          <a:bodyPr wrap="square" lIns="0" tIns="0" rIns="0" bIns="0">
-            <a:spAutoFit/>
-          </a:bodyPr>
-          <a:lstStyle/>
-          <a:p>
-            <a:pPr algn="l"/>
-            <a:r>
-              <a:rPr sz="1000" b="1" i="0">
-                <a:solidFill>
-                  <a:srgbClr val="0F52BA"/>
-                </a:solidFill>
-                <a:latin typeface="Calibri"/>
-              </a:rPr>
-              <a:t>ADVISORS</a:t>
-            </a:r>
-          </a:p>
-        </p:txBody>
-      </p:sp>
-      <p:sp>
-        <p:nvSpPr>
-          <p:cNvPr id="20" name="TextBox 19"/>
-          <p:cNvSpPr txBox="1"/>
-          <p:nvPr/>
-        </p:nvSpPr>
-        <p:spPr>
-          <a:xfrm>
-            <a:off x="5303520" y="6355080"/>
-            <a:ext cx="6400800" cy="365760"/>
-          </a:xfrm>
-          <a:prstGeom prst="rect">
-            <a:avLst/>
-          </a:prstGeom>
-          <a:noFill/>
-        </p:spPr>
-        <p:txBody>
-          <a:bodyPr wrap="square" lIns="0" tIns="0" rIns="0" bIns="0">
-            <a:spAutoFit/>
-          </a:bodyPr>
-          <a:lstStyle/>
-          <a:p>
-            <a:pPr algn="l"/>
-            <a:r>
-              <a:rPr sz="1200" b="0" i="0">
-                <a:solidFill>
-                  <a:srgbClr val="1A1A1A"/>
-                </a:solidFill>
-                <a:latin typeface="Calibri"/>
-              </a:rPr>
-              <a:t>Prof. Chaklam Silpasuwanchai  ·  Prof. Chantri Polprasert</a:t>
-            </a:r>
+              <a:rPr sz="1200" b="0" i="0" dirty="0">
+                <a:solidFill>
+                  <a:schemeClr val="bg1"/>
+                </a:solidFill>
+                <a:latin typeface="Century Gothic" panose="020B0502020202020204" pitchFamily="34" charset="0"/>
+              </a:rPr>
+              <a:t>Prof. </a:t>
+            </a:r>
+            <a:r>
+              <a:rPr sz="1200" b="0" i="0" dirty="0" err="1">
+                <a:solidFill>
+                  <a:schemeClr val="bg1"/>
+                </a:solidFill>
+                <a:latin typeface="Century Gothic" panose="020B0502020202020204" pitchFamily="34" charset="0"/>
+              </a:rPr>
+              <a:t>Chantri</a:t>
+            </a:r>
+            <a:r>
+              <a:rPr sz="1200" b="0" i="0" dirty="0">
+                <a:solidFill>
+                  <a:schemeClr val="bg1"/>
+                </a:solidFill>
+                <a:latin typeface="Century Gothic" panose="020B0502020202020204" pitchFamily="34" charset="0"/>
+              </a:rPr>
+              <a:t> </a:t>
+            </a:r>
+            <a:r>
+              <a:rPr sz="1200" b="0" i="0" dirty="0" err="1">
+                <a:solidFill>
+                  <a:schemeClr val="bg1"/>
+                </a:solidFill>
+                <a:latin typeface="Century Gothic" panose="020B0502020202020204" pitchFamily="34" charset="0"/>
+              </a:rPr>
+              <a:t>Polprasert</a:t>
+            </a:r>
+            <a:endParaRPr sz="1200" b="0" i="0" dirty="0">
+              <a:solidFill>
+                <a:schemeClr val="bg1"/>
+              </a:solidFill>
+              <a:latin typeface="Century Gothic" panose="020B0502020202020204" pitchFamily="34" charset="0"/>
+            </a:endParaRPr>
           </a:p>
         </p:txBody>
       </p:sp>
@@ -4306,7 +4114,9 @@
           <a:lstStyle/>
           <a:p>
             <a:pPr algn="ctr"/>
-            <a:endParaRPr/>
+            <a:endParaRPr>
+              <a:latin typeface="Century Gothic" panose="020B0502020202020204" pitchFamily="34" charset="0"/>
+            </a:endParaRPr>
           </a:p>
         </p:txBody>
       </p:sp>
@@ -4351,7 +4161,9 @@
           <a:lstStyle/>
           <a:p>
             <a:pPr algn="ctr"/>
-            <a:endParaRPr/>
+            <a:endParaRPr>
+              <a:latin typeface="Century Gothic" panose="020B0502020202020204" pitchFamily="34" charset="0"/>
+            </a:endParaRPr>
           </a:p>
         </p:txBody>
       </p:sp>
@@ -4364,7 +4176,7 @@
         <p:spPr>
           <a:xfrm>
             <a:off x="457200" y="274320"/>
-            <a:ext cx="9144000" cy="274320"/>
+            <a:ext cx="9144000" cy="153888"/>
           </a:xfrm>
           <a:prstGeom prst="rect">
             <a:avLst/>
@@ -4383,7 +4195,7 @@
                 <a:solidFill>
                   <a:srgbClr val="0F52BA"/>
                 </a:solidFill>
-                <a:latin typeface="Calibri"/>
+                <a:latin typeface="Century Gothic" panose="020B0502020202020204" pitchFamily="34" charset="0"/>
               </a:rPr>
               <a:t>MLOPS STACK</a:t>
             </a:r>
@@ -4399,7 +4211,7 @@
         <p:spPr>
           <a:xfrm>
             <a:off x="457200" y="640080"/>
-            <a:ext cx="11247120" cy="731520"/>
+            <a:ext cx="11247120" cy="800219"/>
           </a:xfrm>
           <a:prstGeom prst="rect">
             <a:avLst/>
@@ -4418,7 +4230,7 @@
                 <a:solidFill>
                   <a:srgbClr val="1A1A1A"/>
                 </a:solidFill>
-                <a:latin typeface="Calibri"/>
+                <a:latin typeface="Century Gothic" panose="020B0502020202020204" pitchFamily="34" charset="0"/>
               </a:rPr>
               <a:t>Daily pipeline + retrain loop — zero-touch when drift stays below policy</a:t>
             </a:r>
@@ -4458,7 +4270,7 @@
         <p:spPr>
           <a:xfrm>
             <a:off x="8503920" y="1463040"/>
-            <a:ext cx="3200400" cy="320040"/>
+            <a:ext cx="3200400" cy="153888"/>
           </a:xfrm>
           <a:prstGeom prst="rect">
             <a:avLst/>
@@ -4477,7 +4289,7 @@
                 <a:solidFill>
                   <a:srgbClr val="0F52BA"/>
                 </a:solidFill>
-                <a:latin typeface="Calibri"/>
+                <a:latin typeface="Century Gothic" panose="020B0502020202020204" pitchFamily="34" charset="0"/>
               </a:rPr>
               <a:t>GITHUB ACTIONS</a:t>
             </a:r>
@@ -4527,7 +4339,9 @@
           <a:lstStyle/>
           <a:p>
             <a:pPr algn="ctr"/>
-            <a:endParaRPr/>
+            <a:endParaRPr>
+              <a:latin typeface="Century Gothic" panose="020B0502020202020204" pitchFamily="34" charset="0"/>
+            </a:endParaRPr>
           </a:p>
         </p:txBody>
       </p:sp>
@@ -4572,7 +4386,9 @@
           <a:lstStyle/>
           <a:p>
             <a:pPr algn="ctr"/>
-            <a:endParaRPr/>
+            <a:endParaRPr>
+              <a:latin typeface="Century Gothic" panose="020B0502020202020204" pitchFamily="34" charset="0"/>
+            </a:endParaRPr>
           </a:p>
         </p:txBody>
       </p:sp>
@@ -4585,7 +4401,7 @@
         <p:spPr>
           <a:xfrm>
             <a:off x="8778240" y="1938528"/>
-            <a:ext cx="2834640" cy="320040"/>
+            <a:ext cx="2834640" cy="169277"/>
           </a:xfrm>
           <a:prstGeom prst="rect">
             <a:avLst/>
@@ -4604,7 +4420,7 @@
                 <a:solidFill>
                   <a:srgbClr val="0F52BA"/>
                 </a:solidFill>
-                <a:latin typeface="Calibri"/>
+                <a:latin typeface="Century Gothic" panose="020B0502020202020204" pitchFamily="34" charset="0"/>
               </a:rPr>
               <a:t>test.yml</a:t>
             </a:r>
@@ -4620,7 +4436,7 @@
         <p:spPr>
           <a:xfrm>
             <a:off x="8778240" y="2240280"/>
-            <a:ext cx="2834640" cy="457200"/>
+            <a:ext cx="2834640" cy="153888"/>
           </a:xfrm>
           <a:prstGeom prst="rect">
             <a:avLst/>
@@ -4639,7 +4455,7 @@
                 <a:solidFill>
                   <a:srgbClr val="222E3C"/>
                 </a:solidFill>
-                <a:latin typeface="Calibri"/>
+                <a:latin typeface="Century Gothic" panose="020B0502020202020204" pitchFamily="34" charset="0"/>
               </a:rPr>
               <a:t>pytest · 45 tests · on every push</a:t>
             </a:r>
@@ -4689,7 +4505,9 @@
           <a:lstStyle/>
           <a:p>
             <a:pPr algn="ctr"/>
-            <a:endParaRPr/>
+            <a:endParaRPr>
+              <a:latin typeface="Century Gothic" panose="020B0502020202020204" pitchFamily="34" charset="0"/>
+            </a:endParaRPr>
           </a:p>
         </p:txBody>
       </p:sp>
@@ -4734,7 +4552,9 @@
           <a:lstStyle/>
           <a:p>
             <a:pPr algn="ctr"/>
-            <a:endParaRPr/>
+            <a:endParaRPr>
+              <a:latin typeface="Century Gothic" panose="020B0502020202020204" pitchFamily="34" charset="0"/>
+            </a:endParaRPr>
           </a:p>
         </p:txBody>
       </p:sp>
@@ -4747,7 +4567,7 @@
         <p:spPr>
           <a:xfrm>
             <a:off x="8778240" y="2871216"/>
-            <a:ext cx="2834640" cy="320040"/>
+            <a:ext cx="2834640" cy="169277"/>
           </a:xfrm>
           <a:prstGeom prst="rect">
             <a:avLst/>
@@ -4766,7 +4586,7 @@
                 <a:solidFill>
                   <a:srgbClr val="0F52BA"/>
                 </a:solidFill>
-                <a:latin typeface="Calibri"/>
+                <a:latin typeface="Century Gothic" panose="020B0502020202020204" pitchFamily="34" charset="0"/>
               </a:rPr>
               <a:t>daily_pipeline.yml</a:t>
             </a:r>
@@ -4782,7 +4602,7 @@
         <p:spPr>
           <a:xfrm>
             <a:off x="8778240" y="3172968"/>
-            <a:ext cx="2834640" cy="457200"/>
+            <a:ext cx="2834640" cy="153888"/>
           </a:xfrm>
           <a:prstGeom prst="rect">
             <a:avLst/>
@@ -4801,7 +4621,7 @@
                 <a:solidFill>
                   <a:srgbClr val="222E3C"/>
                 </a:solidFill>
-                <a:latin typeface="Calibri"/>
+                <a:latin typeface="Century Gothic" panose="020B0502020202020204" pitchFamily="34" charset="0"/>
               </a:rPr>
               <a:t>every 3 h — ingest → predict → upload</a:t>
             </a:r>
@@ -4851,7 +4671,9 @@
           <a:lstStyle/>
           <a:p>
             <a:pPr algn="ctr"/>
-            <a:endParaRPr/>
+            <a:endParaRPr>
+              <a:latin typeface="Century Gothic" panose="020B0502020202020204" pitchFamily="34" charset="0"/>
+            </a:endParaRPr>
           </a:p>
         </p:txBody>
       </p:sp>
@@ -4896,7 +4718,9 @@
           <a:lstStyle/>
           <a:p>
             <a:pPr algn="ctr"/>
-            <a:endParaRPr/>
+            <a:endParaRPr>
+              <a:latin typeface="Century Gothic" panose="020B0502020202020204" pitchFamily="34" charset="0"/>
+            </a:endParaRPr>
           </a:p>
         </p:txBody>
       </p:sp>
@@ -4909,7 +4733,7 @@
         <p:spPr>
           <a:xfrm>
             <a:off x="8778240" y="3803904"/>
-            <a:ext cx="2834640" cy="320040"/>
+            <a:ext cx="2834640" cy="169277"/>
           </a:xfrm>
           <a:prstGeom prst="rect">
             <a:avLst/>
@@ -4928,7 +4752,7 @@
                 <a:solidFill>
                   <a:srgbClr val="0F52BA"/>
                 </a:solidFill>
-                <a:latin typeface="Calibri"/>
+                <a:latin typeface="Century Gothic" panose="020B0502020202020204" pitchFamily="34" charset="0"/>
               </a:rPr>
               <a:t>drift_check.yml</a:t>
             </a:r>
@@ -4944,7 +4768,7 @@
         <p:spPr>
           <a:xfrm>
             <a:off x="8778240" y="4105656"/>
-            <a:ext cx="2834640" cy="457200"/>
+            <a:ext cx="2834640" cy="153888"/>
           </a:xfrm>
           <a:prstGeom prst="rect">
             <a:avLst/>
@@ -4963,7 +4787,7 @@
                 <a:solidFill>
                   <a:srgbClr val="222E3C"/>
                 </a:solidFill>
-                <a:latin typeface="Calibri"/>
+                <a:latin typeface="Century Gothic" panose="020B0502020202020204" pitchFamily="34" charset="0"/>
               </a:rPr>
               <a:t>PSI + KS on rolling 30-day window</a:t>
             </a:r>
@@ -5013,7 +4837,9 @@
           <a:lstStyle/>
           <a:p>
             <a:pPr algn="ctr"/>
-            <a:endParaRPr/>
+            <a:endParaRPr>
+              <a:latin typeface="Century Gothic" panose="020B0502020202020204" pitchFamily="34" charset="0"/>
+            </a:endParaRPr>
           </a:p>
         </p:txBody>
       </p:sp>
@@ -5058,7 +4884,9 @@
           <a:lstStyle/>
           <a:p>
             <a:pPr algn="ctr"/>
-            <a:endParaRPr/>
+            <a:endParaRPr>
+              <a:latin typeface="Century Gothic" panose="020B0502020202020204" pitchFamily="34" charset="0"/>
+            </a:endParaRPr>
           </a:p>
         </p:txBody>
       </p:sp>
@@ -5071,7 +4899,7 @@
         <p:spPr>
           <a:xfrm>
             <a:off x="8778240" y="4736592"/>
-            <a:ext cx="2834640" cy="320040"/>
+            <a:ext cx="2834640" cy="169277"/>
           </a:xfrm>
           <a:prstGeom prst="rect">
             <a:avLst/>
@@ -5090,7 +4918,7 @@
                 <a:solidFill>
                   <a:srgbClr val="0F52BA"/>
                 </a:solidFill>
-                <a:latin typeface="Calibri"/>
+                <a:latin typeface="Century Gothic" panose="020B0502020202020204" pitchFamily="34" charset="0"/>
               </a:rPr>
               <a:t>retrain.yml</a:t>
             </a:r>
@@ -5106,7 +4934,7 @@
         <p:spPr>
           <a:xfrm>
             <a:off x="8778240" y="5038344"/>
-            <a:ext cx="2834640" cy="457200"/>
+            <a:ext cx="2834640" cy="153888"/>
           </a:xfrm>
           <a:prstGeom prst="rect">
             <a:avLst/>
@@ -5125,7 +4953,7 @@
                 <a:solidFill>
                   <a:srgbClr val="222E3C"/>
                 </a:solidFill>
-                <a:latin typeface="Calibri"/>
+                <a:latin typeface="Century Gothic" panose="020B0502020202020204" pitchFamily="34" charset="0"/>
               </a:rPr>
               <a:t>triggered when core_drift ≥ 2</a:t>
             </a:r>
@@ -5173,7 +5001,9 @@
           <a:lstStyle/>
           <a:p>
             <a:pPr algn="ctr"/>
-            <a:endParaRPr/>
+            <a:endParaRPr>
+              <a:latin typeface="Century Gothic" panose="020B0502020202020204" pitchFamily="34" charset="0"/>
+            </a:endParaRPr>
           </a:p>
         </p:txBody>
       </p:sp>
@@ -5186,7 +5016,7 @@
         <p:spPr>
           <a:xfrm>
             <a:off x="8686800" y="5760720"/>
-            <a:ext cx="2926080" cy="457200"/>
+            <a:ext cx="2926080" cy="307777"/>
           </a:xfrm>
           <a:prstGeom prst="rect">
             <a:avLst/>
@@ -5205,7 +5035,7 @@
                 <a:solidFill>
                   <a:srgbClr val="FFFFFF"/>
                 </a:solidFill>
-                <a:latin typeface="Calibri"/>
+                <a:latin typeface="Century Gothic" panose="020B0502020202020204" pitchFamily="34" charset="0"/>
               </a:rPr>
               <a:t>🛑  validate_candidate.py blocks promotion</a:t>
             </a:r>
@@ -5217,7 +5047,7 @@
                 <a:solidFill>
                   <a:srgbClr val="FFFFFF"/>
                 </a:solidFill>
-                <a:latin typeface="Calibri"/>
+                <a:latin typeface="Century Gothic" panose="020B0502020202020204" pitchFamily="34" charset="0"/>
               </a:rPr>
               <a:t>if challenger fails ≥5 % MAE gate</a:t>
             </a:r>
@@ -5233,7 +5063,7 @@
         <p:spPr>
           <a:xfrm>
             <a:off x="457200" y="6510528"/>
-            <a:ext cx="11247120" cy="274320"/>
+            <a:ext cx="11247120" cy="138499"/>
           </a:xfrm>
           <a:prstGeom prst="rect">
             <a:avLst/>
@@ -5252,7 +5082,7 @@
                 <a:solidFill>
                   <a:srgbClr val="6B6B6B"/>
                 </a:solidFill>
-                <a:latin typeface="Calibri"/>
+                <a:latin typeface="Century Gothic" panose="020B0502020202020204" pitchFamily="34" charset="0"/>
               </a:rPr>
               <a:t>Workflows: .github/workflows/  ·  MLflow tracking: mlruns/</a:t>
             </a:r>
@@ -5268,7 +5098,7 @@
         <p:spPr>
           <a:xfrm>
             <a:off x="11475720" y="6510528"/>
-            <a:ext cx="640080" cy="274320"/>
+            <a:ext cx="640080" cy="138499"/>
           </a:xfrm>
           <a:prstGeom prst="rect">
             <a:avLst/>
@@ -5287,7 +5117,7 @@
                 <a:solidFill>
                   <a:srgbClr val="6B6B6B"/>
                 </a:solidFill>
-                <a:latin typeface="Calibri"/>
+                <a:latin typeface="Century Gothic" panose="020B0502020202020204" pitchFamily="34" charset="0"/>
               </a:rPr>
               <a:t>10 / 14</a:t>
             </a:r>
@@ -5360,7 +5190,9 @@
           <a:lstStyle/>
           <a:p>
             <a:pPr algn="ctr"/>
-            <a:endParaRPr/>
+            <a:endParaRPr>
+              <a:latin typeface="Century Gothic" panose="020B0502020202020204" pitchFamily="34" charset="0"/>
+            </a:endParaRPr>
           </a:p>
         </p:txBody>
       </p:sp>
@@ -5405,7 +5237,9 @@
           <a:lstStyle/>
           <a:p>
             <a:pPr algn="ctr"/>
-            <a:endParaRPr/>
+            <a:endParaRPr>
+              <a:latin typeface="Century Gothic" panose="020B0502020202020204" pitchFamily="34" charset="0"/>
+            </a:endParaRPr>
           </a:p>
         </p:txBody>
       </p:sp>
@@ -5418,7 +5252,7 @@
         <p:spPr>
           <a:xfrm>
             <a:off x="457200" y="274320"/>
-            <a:ext cx="9144000" cy="274320"/>
+            <a:ext cx="9144000" cy="153888"/>
           </a:xfrm>
           <a:prstGeom prst="rect">
             <a:avLst/>
@@ -5437,7 +5271,7 @@
                 <a:solidFill>
                   <a:srgbClr val="0F52BA"/>
                 </a:solidFill>
-                <a:latin typeface="Calibri"/>
+                <a:latin typeface="Century Gothic" panose="020B0502020202020204" pitchFamily="34" charset="0"/>
               </a:rPr>
               <a:t>MONITORING &amp; DRIFT</a:t>
             </a:r>
@@ -5453,7 +5287,7 @@
         <p:spPr>
           <a:xfrm>
             <a:off x="457200" y="640080"/>
-            <a:ext cx="11247120" cy="731520"/>
+            <a:ext cx="11247120" cy="800219"/>
           </a:xfrm>
           <a:prstGeom prst="rect">
             <a:avLst/>
@@ -5472,7 +5306,7 @@
                 <a:solidFill>
                   <a:srgbClr val="1A1A1A"/>
                 </a:solidFill>
-                <a:latin typeface="Calibri"/>
+                <a:latin typeface="Century Gothic" panose="020B0502020202020204" pitchFamily="34" charset="0"/>
               </a:rPr>
               <a:t>Seasonal-aware drift monitor — today's run flagged 2 core + 2 soft drifts</a:t>
             </a:r>
@@ -5544,7 +5378,9 @@
           <a:lstStyle/>
           <a:p>
             <a:pPr algn="ctr"/>
-            <a:endParaRPr/>
+            <a:endParaRPr>
+              <a:latin typeface="Century Gothic" panose="020B0502020202020204" pitchFamily="34" charset="0"/>
+            </a:endParaRPr>
           </a:p>
         </p:txBody>
       </p:sp>
@@ -5557,7 +5393,7 @@
         <p:spPr>
           <a:xfrm>
             <a:off x="7498080" y="1554480"/>
-            <a:ext cx="4389120" cy="320040"/>
+            <a:ext cx="4389120" cy="153888"/>
           </a:xfrm>
           <a:prstGeom prst="rect">
             <a:avLst/>
@@ -5576,7 +5412,7 @@
                 <a:solidFill>
                   <a:srgbClr val="FFFFFF"/>
                 </a:solidFill>
-                <a:latin typeface="Calibri"/>
+                <a:latin typeface="Century Gothic" panose="020B0502020202020204" pitchFamily="34" charset="0"/>
               </a:rPr>
               <a:t>LATEST RUN · 2026-04-21 17:45 +07</a:t>
             </a:r>
@@ -5592,7 +5428,7 @@
         <p:spPr>
           <a:xfrm>
             <a:off x="7498080" y="1828800"/>
-            <a:ext cx="4389120" cy="548640"/>
+            <a:ext cx="4389120" cy="338554"/>
           </a:xfrm>
           <a:prstGeom prst="rect">
             <a:avLst/>
@@ -5611,7 +5447,7 @@
                 <a:solidFill>
                   <a:srgbClr val="FFFFFF"/>
                 </a:solidFill>
-                <a:latin typeface="Calibri"/>
+                <a:latin typeface="Century Gothic" panose="020B0502020202020204" pitchFamily="34" charset="0"/>
               </a:rPr>
               <a:t>retrain_needed = True</a:t>
             </a:r>
@@ -5661,7 +5497,9 @@
           <a:lstStyle/>
           <a:p>
             <a:pPr algn="ctr"/>
-            <a:endParaRPr/>
+            <a:endParaRPr>
+              <a:latin typeface="Century Gothic" panose="020B0502020202020204" pitchFamily="34" charset="0"/>
+            </a:endParaRPr>
           </a:p>
         </p:txBody>
       </p:sp>
@@ -5674,7 +5512,7 @@
         <p:spPr>
           <a:xfrm>
             <a:off x="7406640" y="2606040"/>
-            <a:ext cx="1402080" cy="274320"/>
+            <a:ext cx="1402080" cy="138499"/>
           </a:xfrm>
           <a:prstGeom prst="rect">
             <a:avLst/>
@@ -5693,7 +5531,7 @@
                 <a:solidFill>
                   <a:srgbClr val="6B6B6B"/>
                 </a:solidFill>
-                <a:latin typeface="Calibri"/>
+                <a:latin typeface="Century Gothic" panose="020B0502020202020204" pitchFamily="34" charset="0"/>
               </a:rPr>
               <a:t>CORE DRIFTS</a:t>
             </a:r>
@@ -5709,7 +5547,7 @@
         <p:spPr>
           <a:xfrm>
             <a:off x="7406640" y="2834640"/>
-            <a:ext cx="1219200" cy="731520"/>
+            <a:ext cx="1219200" cy="553998"/>
           </a:xfrm>
           <a:prstGeom prst="rect">
             <a:avLst/>
@@ -5728,7 +5566,7 @@
                 <a:solidFill>
                   <a:srgbClr val="C0392B"/>
                 </a:solidFill>
-                <a:latin typeface="Calibri"/>
+                <a:latin typeface="Century Gothic" panose="020B0502020202020204" pitchFamily="34" charset="0"/>
               </a:rPr>
               <a:t>2</a:t>
             </a:r>
@@ -5778,7 +5616,9 @@
           <a:lstStyle/>
           <a:p>
             <a:pPr algn="ctr"/>
-            <a:endParaRPr/>
+            <a:endParaRPr>
+              <a:latin typeface="Century Gothic" panose="020B0502020202020204" pitchFamily="34" charset="0"/>
+            </a:endParaRPr>
           </a:p>
         </p:txBody>
       </p:sp>
@@ -5791,7 +5631,7 @@
         <p:spPr>
           <a:xfrm>
             <a:off x="8900160" y="2606040"/>
-            <a:ext cx="1402080" cy="274320"/>
+            <a:ext cx="1402080" cy="138499"/>
           </a:xfrm>
           <a:prstGeom prst="rect">
             <a:avLst/>
@@ -5810,7 +5650,7 @@
                 <a:solidFill>
                   <a:srgbClr val="6B6B6B"/>
                 </a:solidFill>
-                <a:latin typeface="Calibri"/>
+                <a:latin typeface="Century Gothic" panose="020B0502020202020204" pitchFamily="34" charset="0"/>
               </a:rPr>
               <a:t>SOFT DRIFTS</a:t>
             </a:r>
@@ -5826,7 +5666,7 @@
         <p:spPr>
           <a:xfrm>
             <a:off x="8900160" y="2834640"/>
-            <a:ext cx="1219200" cy="731520"/>
+            <a:ext cx="1219200" cy="553998"/>
           </a:xfrm>
           <a:prstGeom prst="rect">
             <a:avLst/>
@@ -5845,7 +5685,7 @@
                 <a:solidFill>
                   <a:srgbClr val="E67E22"/>
                 </a:solidFill>
-                <a:latin typeface="Calibri"/>
+                <a:latin typeface="Century Gothic" panose="020B0502020202020204" pitchFamily="34" charset="0"/>
               </a:rPr>
               <a:t>2</a:t>
             </a:r>
@@ -5895,7 +5735,9 @@
           <a:lstStyle/>
           <a:p>
             <a:pPr algn="ctr"/>
-            <a:endParaRPr/>
+            <a:endParaRPr>
+              <a:latin typeface="Century Gothic" panose="020B0502020202020204" pitchFamily="34" charset="0"/>
+            </a:endParaRPr>
           </a:p>
         </p:txBody>
       </p:sp>
@@ -5908,7 +5750,7 @@
         <p:spPr>
           <a:xfrm>
             <a:off x="10393680" y="2606040"/>
-            <a:ext cx="1402080" cy="274320"/>
+            <a:ext cx="1402080" cy="138499"/>
           </a:xfrm>
           <a:prstGeom prst="rect">
             <a:avLst/>
@@ -5927,7 +5769,7 @@
                 <a:solidFill>
                   <a:srgbClr val="6B6B6B"/>
                 </a:solidFill>
-                <a:latin typeface="Calibri"/>
+                <a:latin typeface="Century Gothic" panose="020B0502020202020204" pitchFamily="34" charset="0"/>
               </a:rPr>
               <a:t>MAE FLAG</a:t>
             </a:r>
@@ -5943,7 +5785,7 @@
         <p:spPr>
           <a:xfrm>
             <a:off x="10393680" y="2834640"/>
-            <a:ext cx="1219200" cy="731520"/>
+            <a:ext cx="1219200" cy="553998"/>
           </a:xfrm>
           <a:prstGeom prst="rect">
             <a:avLst/>
@@ -5962,7 +5804,7 @@
                 <a:solidFill>
                   <a:srgbClr val="2E8B57"/>
                 </a:solidFill>
-                <a:latin typeface="Calibri"/>
+                <a:latin typeface="Century Gothic" panose="020B0502020202020204" pitchFamily="34" charset="0"/>
               </a:rPr>
               <a:t>0</a:t>
             </a:r>
@@ -5978,7 +5820,7 @@
         <p:spPr>
           <a:xfrm>
             <a:off x="7315200" y="3749039"/>
-            <a:ext cx="4389120" cy="320040"/>
+            <a:ext cx="4389120" cy="153888"/>
           </a:xfrm>
           <a:prstGeom prst="rect">
             <a:avLst/>
@@ -5997,7 +5839,7 @@
                 <a:solidFill>
                   <a:srgbClr val="0F52BA"/>
                 </a:solidFill>
-                <a:latin typeface="Calibri"/>
+                <a:latin typeface="Century Gothic" panose="020B0502020202020204" pitchFamily="34" charset="0"/>
               </a:rPr>
               <a:t>DRIFTED FEATURES</a:t>
             </a:r>
@@ -6013,7 +5855,7 @@
         <p:spPr>
           <a:xfrm>
             <a:off x="7315200" y="4114800"/>
-            <a:ext cx="4389120" cy="1097280"/>
+            <a:ext cx="4389120" cy="415498"/>
           </a:xfrm>
           <a:prstGeom prst="rect">
             <a:avLst/>
@@ -6036,7 +5878,7 @@
                 <a:solidFill>
                   <a:srgbClr val="0F52BA"/>
                 </a:solidFill>
-                <a:latin typeface="Calibri"/>
+                <a:latin typeface="Century Gothic" panose="020B0502020202020204" pitchFamily="34" charset="0"/>
               </a:rPr>
               <a:t>•  </a:t>
             </a:r>
@@ -6045,7 +5887,7 @@
                 <a:solidFill>
                   <a:srgbClr val="222E3C"/>
                 </a:solidFill>
-                <a:latin typeface="Calibri"/>
+                <a:latin typeface="Century Gothic" panose="020B0502020202020204" pitchFamily="34" charset="0"/>
               </a:rPr>
               <a:t>pm25_lag1, pm25_roll7_mean  (core)</a:t>
             </a:r>
@@ -6061,7 +5903,7 @@
                 <a:solidFill>
                   <a:srgbClr val="0F52BA"/>
                 </a:solidFill>
-                <a:latin typeface="Calibri"/>
+                <a:latin typeface="Century Gothic" panose="020B0502020202020204" pitchFamily="34" charset="0"/>
               </a:rPr>
               <a:t>•  </a:t>
             </a:r>
@@ -6070,7 +5912,7 @@
                 <a:solidFill>
                   <a:srgbClr val="222E3C"/>
                 </a:solidFill>
-                <a:latin typeface="Calibri"/>
+                <a:latin typeface="Century Gothic" panose="020B0502020202020204" pitchFamily="34" charset="0"/>
               </a:rPr>
               <a:t>hotspot_50km, wind_speed  (soft)</a:t>
             </a:r>
@@ -6120,7 +5962,9 @@
           <a:lstStyle/>
           <a:p>
             <a:pPr algn="ctr"/>
-            <a:endParaRPr/>
+            <a:endParaRPr>
+              <a:latin typeface="Century Gothic" panose="020B0502020202020204" pitchFamily="34" charset="0"/>
+            </a:endParaRPr>
           </a:p>
         </p:txBody>
       </p:sp>
@@ -6133,7 +5977,7 @@
         <p:spPr>
           <a:xfrm>
             <a:off x="7498080" y="5394960"/>
-            <a:ext cx="4389120" cy="274320"/>
+            <a:ext cx="4389120" cy="153888"/>
           </a:xfrm>
           <a:prstGeom prst="rect">
             <a:avLst/>
@@ -6152,7 +5996,7 @@
                 <a:solidFill>
                   <a:srgbClr val="0F52BA"/>
                 </a:solidFill>
-                <a:latin typeface="Calibri"/>
+                <a:latin typeface="Century Gothic" panose="020B0502020202020204" pitchFamily="34" charset="0"/>
               </a:rPr>
               <a:t>RETRAIN POLICY</a:t>
             </a:r>
@@ -6168,7 +6012,7 @@
         <p:spPr>
           <a:xfrm>
             <a:off x="7498080" y="5669280"/>
-            <a:ext cx="4023360" cy="777240"/>
+            <a:ext cx="4023360" cy="307777"/>
           </a:xfrm>
           <a:prstGeom prst="rect">
             <a:avLst/>
@@ -6187,7 +6031,7 @@
                 <a:solidFill>
                   <a:srgbClr val="222E3C"/>
                 </a:solidFill>
-                <a:latin typeface="Calibri"/>
+                <a:latin typeface="Century Gothic" panose="020B0502020202020204" pitchFamily="34" charset="0"/>
               </a:rPr>
               <a:t>Trigger when core≥2  OR  (core≥1 AND soft≥2).  is_haze_season is a non-trigger feature — seasonal variation is expected, not drift.</a:t>
             </a:r>
@@ -6203,7 +6047,7 @@
         <p:spPr>
           <a:xfrm>
             <a:off x="457200" y="6510528"/>
-            <a:ext cx="11247120" cy="274320"/>
+            <a:ext cx="11247120" cy="138499"/>
           </a:xfrm>
           <a:prstGeom prst="rect">
             <a:avLst/>
@@ -6222,7 +6066,7 @@
                 <a:solidFill>
                   <a:srgbClr val="6B6B6B"/>
                 </a:solidFill>
-                <a:latin typeface="Calibri"/>
+                <a:latin typeface="Century Gothic" panose="020B0502020202020204" pitchFamily="34" charset="0"/>
               </a:rPr>
               <a:t>Policy: 05_Reference/monitoring_drift_policy_update_2026-04-03.md</a:t>
             </a:r>
@@ -6238,7 +6082,7 @@
         <p:spPr>
           <a:xfrm>
             <a:off x="11475720" y="6510528"/>
-            <a:ext cx="640080" cy="274320"/>
+            <a:ext cx="640080" cy="138499"/>
           </a:xfrm>
           <a:prstGeom prst="rect">
             <a:avLst/>
@@ -6257,7 +6101,7 @@
                 <a:solidFill>
                   <a:srgbClr val="6B6B6B"/>
                 </a:solidFill>
-                <a:latin typeface="Calibri"/>
+                <a:latin typeface="Century Gothic" panose="020B0502020202020204" pitchFamily="34" charset="0"/>
               </a:rPr>
               <a:t>11 / 14</a:t>
             </a:r>
@@ -6330,7 +6174,9 @@
           <a:lstStyle/>
           <a:p>
             <a:pPr algn="ctr"/>
-            <a:endParaRPr/>
+            <a:endParaRPr>
+              <a:latin typeface="Century Gothic" panose="020B0502020202020204" pitchFamily="34" charset="0"/>
+            </a:endParaRPr>
           </a:p>
         </p:txBody>
       </p:sp>
@@ -6375,7 +6221,9 @@
           <a:lstStyle/>
           <a:p>
             <a:pPr algn="ctr"/>
-            <a:endParaRPr/>
+            <a:endParaRPr>
+              <a:latin typeface="Century Gothic" panose="020B0502020202020204" pitchFamily="34" charset="0"/>
+            </a:endParaRPr>
           </a:p>
         </p:txBody>
       </p:sp>
@@ -6388,7 +6236,7 @@
         <p:spPr>
           <a:xfrm>
             <a:off x="457200" y="274320"/>
-            <a:ext cx="9144000" cy="274320"/>
+            <a:ext cx="9144000" cy="153888"/>
           </a:xfrm>
           <a:prstGeom prst="rect">
             <a:avLst/>
@@ -6407,7 +6255,7 @@
                 <a:solidFill>
                   <a:srgbClr val="0F52BA"/>
                 </a:solidFill>
-                <a:latin typeface="Calibri"/>
+                <a:latin typeface="Century Gothic" panose="020B0502020202020204" pitchFamily="34" charset="0"/>
               </a:rPr>
               <a:t>LIVE DEMO</a:t>
             </a:r>
@@ -6423,7 +6271,7 @@
         <p:spPr>
           <a:xfrm>
             <a:off x="457200" y="640080"/>
-            <a:ext cx="11247120" cy="731520"/>
+            <a:ext cx="11247120" cy="369332"/>
           </a:xfrm>
           <a:prstGeom prst="rect">
             <a:avLst/>
@@ -6442,7 +6290,7 @@
                 <a:solidFill>
                   <a:srgbClr val="1A1A1A"/>
                 </a:solidFill>
-                <a:latin typeface="Calibri"/>
+                <a:latin typeface="Century Gothic" panose="020B0502020202020204" pitchFamily="34" charset="0"/>
               </a:rPr>
               <a:t>From commit to forecast — every stage is observable</a:t>
             </a:r>
@@ -6492,7 +6340,9 @@
           <a:lstStyle/>
           <a:p>
             <a:pPr algn="ctr"/>
-            <a:endParaRPr/>
+            <a:endParaRPr>
+              <a:latin typeface="Century Gothic" panose="020B0502020202020204" pitchFamily="34" charset="0"/>
+            </a:endParaRPr>
           </a:p>
         </p:txBody>
       </p:sp>
@@ -6529,7 +6379,7 @@
         <p:spPr>
           <a:xfrm>
             <a:off x="594360" y="1536192"/>
-            <a:ext cx="5509260" cy="274320"/>
+            <a:ext cx="5509260" cy="169277"/>
           </a:xfrm>
           <a:prstGeom prst="rect">
             <a:avLst/>
@@ -6548,7 +6398,7 @@
                 <a:solidFill>
                   <a:srgbClr val="0F52BA"/>
                 </a:solidFill>
-                <a:latin typeface="Calibri"/>
+                <a:latin typeface="Century Gothic" panose="020B0502020202020204" pitchFamily="34" charset="0"/>
               </a:rPr>
               <a:t>01  STREAMLIT</a:t>
             </a:r>
@@ -6598,7 +6448,9 @@
           <a:lstStyle/>
           <a:p>
             <a:pPr algn="ctr"/>
-            <a:endParaRPr/>
+            <a:endParaRPr>
+              <a:latin typeface="Century Gothic" panose="020B0502020202020204" pitchFamily="34" charset="0"/>
+            </a:endParaRPr>
           </a:p>
         </p:txBody>
       </p:sp>
@@ -6645,7 +6497,9 @@
           <a:lstStyle/>
           <a:p>
             <a:pPr algn="ctr"/>
-            <a:endParaRPr/>
+            <a:endParaRPr>
+              <a:latin typeface="Century Gothic" panose="020B0502020202020204" pitchFamily="34" charset="0"/>
+            </a:endParaRPr>
           </a:p>
         </p:txBody>
       </p:sp>
@@ -6658,7 +6512,7 @@
         <p:spPr>
           <a:xfrm>
             <a:off x="6423660" y="1984248"/>
-            <a:ext cx="5052060" cy="1485900"/>
+            <a:ext cx="5052060" cy="1077218"/>
           </a:xfrm>
           <a:prstGeom prst="rect">
             <a:avLst/>
@@ -6677,7 +6531,7 @@
                 <a:solidFill>
                   <a:srgbClr val="FFFFFF"/>
                 </a:solidFill>
-                <a:latin typeface="Menlo"/>
+                <a:latin typeface="Century Gothic" panose="020B0502020202020204" pitchFamily="34" charset="0"/>
               </a:rPr>
               <a:t>$ curl -X POST 13.250.17.6:8000/predict</a:t>
             </a:r>
@@ -6689,7 +6543,7 @@
                 <a:solidFill>
                   <a:srgbClr val="FFFFFF"/>
                 </a:solidFill>
-                <a:latin typeface="Menlo"/>
+                <a:latin typeface="Century Gothic" panose="020B0502020202020204" pitchFamily="34" charset="0"/>
               </a:rPr>
               <a:t>      -d '{"date":"2026-04-22"}'</a:t>
             </a:r>
@@ -6700,7 +6554,7 @@
               <a:solidFill>
                 <a:srgbClr val="FFFFFF"/>
               </a:solidFill>
-              <a:latin typeface="Menlo"/>
+              <a:latin typeface="Century Gothic" panose="020B0502020202020204" pitchFamily="34" charset="0"/>
             </a:endParaRPr>
           </a:p>
           <a:p>
@@ -6710,7 +6564,7 @@
                 <a:solidFill>
                   <a:srgbClr val="FFFFFF"/>
                 </a:solidFill>
-                <a:latin typeface="Menlo"/>
+                <a:latin typeface="Century Gothic" panose="020B0502020202020204" pitchFamily="34" charset="0"/>
               </a:rPr>
               <a:t>{ "t+1": 42.1,   "alert_t1": false,</a:t>
             </a:r>
@@ -6722,7 +6576,7 @@
                 <a:solidFill>
                   <a:srgbClr val="FFFFFF"/>
                 </a:solidFill>
-                <a:latin typeface="Menlo"/>
+                <a:latin typeface="Century Gothic" panose="020B0502020202020204" pitchFamily="34" charset="0"/>
               </a:rPr>
               <a:t>  "t+3": 58.4,   "alert_t3": true,</a:t>
             </a:r>
@@ -6734,7 +6588,7 @@
                 <a:solidFill>
                   <a:srgbClr val="FFFFFF"/>
                 </a:solidFill>
-                <a:latin typeface="Menlo"/>
+                <a:latin typeface="Century Gothic" panose="020B0502020202020204" pitchFamily="34" charset="0"/>
               </a:rPr>
               <a:t>  "t+7": 71.2,   "alert_t7": true,</a:t>
             </a:r>
@@ -6746,7 +6600,7 @@
                 <a:solidFill>
                   <a:srgbClr val="FFFFFF"/>
                 </a:solidFill>
-                <a:latin typeface="Menlo"/>
+                <a:latin typeface="Century Gothic" panose="020B0502020202020204" pitchFamily="34" charset="0"/>
               </a:rPr>
               <a:t>  "model": "lightgbm", "version": "v3" }</a:t>
             </a:r>
@@ -6762,7 +6616,7 @@
         <p:spPr>
           <a:xfrm>
             <a:off x="6332220" y="1536192"/>
-            <a:ext cx="5509260" cy="274320"/>
+            <a:ext cx="5509260" cy="169277"/>
           </a:xfrm>
           <a:prstGeom prst="rect">
             <a:avLst/>
@@ -6781,7 +6635,7 @@
                 <a:solidFill>
                   <a:srgbClr val="0F52BA"/>
                 </a:solidFill>
-                <a:latin typeface="Calibri"/>
+                <a:latin typeface="Century Gothic" panose="020B0502020202020204" pitchFamily="34" charset="0"/>
               </a:rPr>
               <a:t>02  FASTAPI</a:t>
             </a:r>
@@ -6831,7 +6685,9 @@
           <a:lstStyle/>
           <a:p>
             <a:pPr algn="ctr"/>
-            <a:endParaRPr/>
+            <a:endParaRPr>
+              <a:latin typeface="Century Gothic" panose="020B0502020202020204" pitchFamily="34" charset="0"/>
+            </a:endParaRPr>
           </a:p>
         </p:txBody>
       </p:sp>
@@ -6868,7 +6724,7 @@
         <p:spPr>
           <a:xfrm>
             <a:off x="594360" y="4027932"/>
-            <a:ext cx="5509260" cy="274320"/>
+            <a:ext cx="5509260" cy="169277"/>
           </a:xfrm>
           <a:prstGeom prst="rect">
             <a:avLst/>
@@ -6887,7 +6743,7 @@
                 <a:solidFill>
                   <a:srgbClr val="0F52BA"/>
                 </a:solidFill>
-                <a:latin typeface="Calibri"/>
+                <a:latin typeface="Century Gothic" panose="020B0502020202020204" pitchFamily="34" charset="0"/>
               </a:rPr>
               <a:t>03  MLFLOW</a:t>
             </a:r>
@@ -6937,7 +6793,9 @@
           <a:lstStyle/>
           <a:p>
             <a:pPr algn="ctr"/>
-            <a:endParaRPr/>
+            <a:endParaRPr>
+              <a:latin typeface="Century Gothic" panose="020B0502020202020204" pitchFamily="34" charset="0"/>
+            </a:endParaRPr>
           </a:p>
         </p:txBody>
       </p:sp>
@@ -6950,7 +6808,7 @@
         <p:spPr>
           <a:xfrm>
             <a:off x="6469380" y="4549140"/>
-            <a:ext cx="5052060" cy="365760"/>
+            <a:ext cx="5052060" cy="169277"/>
           </a:xfrm>
           <a:prstGeom prst="rect">
             <a:avLst/>
@@ -6969,7 +6827,7 @@
                 <a:solidFill>
                   <a:srgbClr val="1A1A1A"/>
                 </a:solidFill>
-                <a:latin typeface="Menlo"/>
+                <a:latin typeface="Century Gothic" panose="020B0502020202020204" pitchFamily="34" charset="0"/>
               </a:rPr>
               <a:t>test.yml              · pytest 45/45  ✓</a:t>
             </a:r>
@@ -6985,7 +6843,7 @@
         <p:spPr>
           <a:xfrm>
             <a:off x="6469380" y="5006340"/>
-            <a:ext cx="5052060" cy="365760"/>
+            <a:ext cx="5052060" cy="169277"/>
           </a:xfrm>
           <a:prstGeom prst="rect">
             <a:avLst/>
@@ -7004,7 +6862,7 @@
                 <a:solidFill>
                   <a:srgbClr val="1A1A1A"/>
                 </a:solidFill>
-                <a:latin typeface="Menlo"/>
+                <a:latin typeface="Century Gothic" panose="020B0502020202020204" pitchFamily="34" charset="0"/>
               </a:rPr>
               <a:t>daily_pipeline.yml    · ingest + predict + upload  ✓</a:t>
             </a:r>
@@ -7020,7 +6878,7 @@
         <p:spPr>
           <a:xfrm>
             <a:off x="6469380" y="5463540"/>
-            <a:ext cx="5052060" cy="365760"/>
+            <a:ext cx="5052060" cy="169277"/>
           </a:xfrm>
           <a:prstGeom prst="rect">
             <a:avLst/>
@@ -7039,7 +6897,7 @@
                 <a:solidFill>
                   <a:srgbClr val="1A1A1A"/>
                 </a:solidFill>
-                <a:latin typeface="Menlo"/>
+                <a:latin typeface="Century Gothic" panose="020B0502020202020204" pitchFamily="34" charset="0"/>
               </a:rPr>
               <a:t>drift_check.yml       · PSI / KS  ✓</a:t>
             </a:r>
@@ -7055,7 +6913,7 @@
         <p:spPr>
           <a:xfrm>
             <a:off x="6469380" y="5920740"/>
-            <a:ext cx="5052060" cy="365760"/>
+            <a:ext cx="5052060" cy="169277"/>
           </a:xfrm>
           <a:prstGeom prst="rect">
             <a:avLst/>
@@ -7074,7 +6932,7 @@
                 <a:solidFill>
                   <a:srgbClr val="1A1A1A"/>
                 </a:solidFill>
-                <a:latin typeface="Menlo"/>
+                <a:latin typeface="Century Gothic" panose="020B0502020202020204" pitchFamily="34" charset="0"/>
               </a:rPr>
               <a:t>retrain.yml           · challenger → promote  ✓</a:t>
             </a:r>
@@ -7090,7 +6948,7 @@
         <p:spPr>
           <a:xfrm>
             <a:off x="6332220" y="4027932"/>
-            <a:ext cx="5509260" cy="274320"/>
+            <a:ext cx="5509260" cy="169277"/>
           </a:xfrm>
           <a:prstGeom prst="rect">
             <a:avLst/>
@@ -7109,7 +6967,7 @@
                 <a:solidFill>
                   <a:srgbClr val="0F52BA"/>
                 </a:solidFill>
-                <a:latin typeface="Calibri"/>
+                <a:latin typeface="Century Gothic" panose="020B0502020202020204" pitchFamily="34" charset="0"/>
               </a:rPr>
               <a:t>04  ACTIONS</a:t>
             </a:r>
@@ -7125,7 +6983,7 @@
         <p:spPr>
           <a:xfrm>
             <a:off x="457200" y="6510528"/>
-            <a:ext cx="11247120" cy="274320"/>
+            <a:ext cx="11247120" cy="138499"/>
           </a:xfrm>
           <a:prstGeom prst="rect">
             <a:avLst/>
@@ -7144,7 +7002,7 @@
                 <a:solidFill>
                   <a:srgbClr val="6B6B6B"/>
                 </a:solidFill>
-                <a:latin typeface="Calibri"/>
+                <a:latin typeface="Century Gothic" panose="020B0502020202020204" pitchFamily="34" charset="0"/>
               </a:rPr>
               <a:t>Demo flow: Streamlit · FastAPI · MLflow · GitHub Actions  (~3 min)</a:t>
             </a:r>
@@ -7160,7 +7018,7 @@
         <p:spPr>
           <a:xfrm>
             <a:off x="11475720" y="6510528"/>
-            <a:ext cx="640080" cy="274320"/>
+            <a:ext cx="640080" cy="138499"/>
           </a:xfrm>
           <a:prstGeom prst="rect">
             <a:avLst/>
@@ -7179,7 +7037,7 @@
                 <a:solidFill>
                   <a:srgbClr val="6B6B6B"/>
                 </a:solidFill>
-                <a:latin typeface="Calibri"/>
+                <a:latin typeface="Century Gothic" panose="020B0502020202020204" pitchFamily="34" charset="0"/>
               </a:rPr>
               <a:t>12 / 14</a:t>
             </a:r>
@@ -7252,7 +7110,9 @@
           <a:lstStyle/>
           <a:p>
             <a:pPr algn="ctr"/>
-            <a:endParaRPr/>
+            <a:endParaRPr>
+              <a:latin typeface="Century Gothic" panose="020B0502020202020204" pitchFamily="34" charset="0"/>
+            </a:endParaRPr>
           </a:p>
         </p:txBody>
       </p:sp>
@@ -7297,7 +7157,9 @@
           <a:lstStyle/>
           <a:p>
             <a:pPr algn="ctr"/>
-            <a:endParaRPr/>
+            <a:endParaRPr>
+              <a:latin typeface="Century Gothic" panose="020B0502020202020204" pitchFamily="34" charset="0"/>
+            </a:endParaRPr>
           </a:p>
         </p:txBody>
       </p:sp>
@@ -7310,7 +7172,7 @@
         <p:spPr>
           <a:xfrm>
             <a:off x="457200" y="274320"/>
-            <a:ext cx="9144000" cy="274320"/>
+            <a:ext cx="9144000" cy="153888"/>
           </a:xfrm>
           <a:prstGeom prst="rect">
             <a:avLst/>
@@ -7329,7 +7191,7 @@
                 <a:solidFill>
                   <a:srgbClr val="0F52BA"/>
                 </a:solidFill>
-                <a:latin typeface="Calibri"/>
+                <a:latin typeface="Century Gothic" panose="020B0502020202020204" pitchFamily="34" charset="0"/>
               </a:rPr>
               <a:t>COST &amp; SCALABILITY</a:t>
             </a:r>
@@ -7345,7 +7207,7 @@
         <p:spPr>
           <a:xfrm>
             <a:off x="457200" y="640080"/>
-            <a:ext cx="11247120" cy="731520"/>
+            <a:ext cx="11247120" cy="400110"/>
           </a:xfrm>
           <a:prstGeom prst="rect">
             <a:avLst/>
@@ -7364,7 +7226,7 @@
                 <a:solidFill>
                   <a:srgbClr val="1A1A1A"/>
                 </a:solidFill>
-                <a:latin typeface="Calibri"/>
+                <a:latin typeface="Century Gothic" panose="020B0502020202020204" pitchFamily="34" charset="0"/>
               </a:rPr>
               <a:t>End-to-end MLOps stack for about $0.55 per day</a:t>
             </a:r>
@@ -7380,7 +7242,7 @@
         <p:spPr>
           <a:xfrm>
             <a:off x="457200" y="1463040"/>
-            <a:ext cx="5943600" cy="320040"/>
+            <a:ext cx="5943600" cy="153888"/>
           </a:xfrm>
           <a:prstGeom prst="rect">
             <a:avLst/>
@@ -7399,7 +7261,7 @@
                 <a:solidFill>
                   <a:srgbClr val="0F52BA"/>
                 </a:solidFill>
-                <a:latin typeface="Calibri"/>
+                <a:latin typeface="Century Gothic" panose="020B0502020202020204" pitchFamily="34" charset="0"/>
               </a:rPr>
               <a:t>DAILY COST BREAKDOWN (AWS ap-southeast-1)</a:t>
             </a:r>
@@ -7447,7 +7309,9 @@
           <a:lstStyle/>
           <a:p>
             <a:pPr algn="ctr"/>
-            <a:endParaRPr/>
+            <a:endParaRPr>
+              <a:latin typeface="Century Gothic" panose="020B0502020202020204" pitchFamily="34" charset="0"/>
+            </a:endParaRPr>
           </a:p>
         </p:txBody>
       </p:sp>
@@ -7460,7 +7324,7 @@
         <p:spPr>
           <a:xfrm>
             <a:off x="640080" y="1901952"/>
-            <a:ext cx="2926080" cy="274320"/>
+            <a:ext cx="2926080" cy="153888"/>
           </a:xfrm>
           <a:prstGeom prst="rect">
             <a:avLst/>
@@ -7479,7 +7343,7 @@
                 <a:solidFill>
                   <a:srgbClr val="FFFFFF"/>
                 </a:solidFill>
-                <a:latin typeface="Calibri"/>
+                <a:latin typeface="Century Gothic" panose="020B0502020202020204" pitchFamily="34" charset="0"/>
               </a:rPr>
               <a:t>COMPONENT</a:t>
             </a:r>
@@ -7495,7 +7359,7 @@
         <p:spPr>
           <a:xfrm>
             <a:off x="3657600" y="1901952"/>
-            <a:ext cx="1097280" cy="274320"/>
+            <a:ext cx="1097280" cy="153888"/>
           </a:xfrm>
           <a:prstGeom prst="rect">
             <a:avLst/>
@@ -7514,7 +7378,7 @@
                 <a:solidFill>
                   <a:srgbClr val="FFFFFF"/>
                 </a:solidFill>
-                <a:latin typeface="Calibri"/>
+                <a:latin typeface="Century Gothic" panose="020B0502020202020204" pitchFamily="34" charset="0"/>
               </a:rPr>
               <a:t>USD / DAY</a:t>
             </a:r>
@@ -7530,7 +7394,7 @@
         <p:spPr>
           <a:xfrm>
             <a:off x="4846320" y="1901952"/>
-            <a:ext cx="1371600" cy="274320"/>
+            <a:ext cx="1371600" cy="153888"/>
           </a:xfrm>
           <a:prstGeom prst="rect">
             <a:avLst/>
@@ -7549,7 +7413,7 @@
                 <a:solidFill>
                   <a:srgbClr val="FFFFFF"/>
                 </a:solidFill>
-                <a:latin typeface="Calibri"/>
+                <a:latin typeface="Century Gothic" panose="020B0502020202020204" pitchFamily="34" charset="0"/>
               </a:rPr>
               <a:t>NOTES</a:t>
             </a:r>
@@ -7599,7 +7463,9 @@
           <a:lstStyle/>
           <a:p>
             <a:pPr algn="ctr"/>
-            <a:endParaRPr/>
+            <a:endParaRPr>
+              <a:latin typeface="Century Gothic" panose="020B0502020202020204" pitchFamily="34" charset="0"/>
+            </a:endParaRPr>
           </a:p>
         </p:txBody>
       </p:sp>
@@ -7612,7 +7478,7 @@
         <p:spPr>
           <a:xfrm>
             <a:off x="640080" y="2359152"/>
-            <a:ext cx="2926080" cy="320040"/>
+            <a:ext cx="2926080" cy="169277"/>
           </a:xfrm>
           <a:prstGeom prst="rect">
             <a:avLst/>
@@ -7631,7 +7497,7 @@
                 <a:solidFill>
                   <a:srgbClr val="222E3C"/>
                 </a:solidFill>
-                <a:latin typeface="Calibri"/>
+                <a:latin typeface="Century Gothic" panose="020B0502020202020204" pitchFamily="34" charset="0"/>
               </a:rPr>
               <a:t>EC2 t3.micro (24 h)</a:t>
             </a:r>
@@ -7647,7 +7513,7 @@
         <p:spPr>
           <a:xfrm>
             <a:off x="3657600" y="2359152"/>
-            <a:ext cx="1097280" cy="320040"/>
+            <a:ext cx="1097280" cy="169277"/>
           </a:xfrm>
           <a:prstGeom prst="rect">
             <a:avLst/>
@@ -7666,7 +7532,7 @@
                 <a:solidFill>
                   <a:srgbClr val="0F52BA"/>
                 </a:solidFill>
-                <a:latin typeface="Calibri"/>
+                <a:latin typeface="Century Gothic" panose="020B0502020202020204" pitchFamily="34" charset="0"/>
               </a:rPr>
               <a:t>$0.24</a:t>
             </a:r>
@@ -7701,7 +7567,7 @@
                 <a:solidFill>
                   <a:srgbClr val="6B6B6B"/>
                 </a:solidFill>
-                <a:latin typeface="Calibri"/>
+                <a:latin typeface="Century Gothic" panose="020B0502020202020204" pitchFamily="34" charset="0"/>
               </a:rPr>
               <a:t>Host FastAPI + Streamlit + MLflow</a:t>
             </a:r>
@@ -7751,7 +7617,9 @@
           <a:lstStyle/>
           <a:p>
             <a:pPr algn="ctr"/>
-            <a:endParaRPr/>
+            <a:endParaRPr>
+              <a:latin typeface="Century Gothic" panose="020B0502020202020204" pitchFamily="34" charset="0"/>
+            </a:endParaRPr>
           </a:p>
         </p:txBody>
       </p:sp>
@@ -7764,7 +7632,7 @@
         <p:spPr>
           <a:xfrm>
             <a:off x="640080" y="2862072"/>
-            <a:ext cx="2926080" cy="320040"/>
+            <a:ext cx="2926080" cy="169277"/>
           </a:xfrm>
           <a:prstGeom prst="rect">
             <a:avLst/>
@@ -7783,7 +7651,7 @@
                 <a:solidFill>
                   <a:srgbClr val="222E3C"/>
                 </a:solidFill>
-                <a:latin typeface="Calibri"/>
+                <a:latin typeface="Century Gothic" panose="020B0502020202020204" pitchFamily="34" charset="0"/>
               </a:rPr>
               <a:t>S3 storage (~1 GB)</a:t>
             </a:r>
@@ -7799,7 +7667,7 @@
         <p:spPr>
           <a:xfrm>
             <a:off x="3657600" y="2862072"/>
-            <a:ext cx="1097280" cy="320040"/>
+            <a:ext cx="1097280" cy="169277"/>
           </a:xfrm>
           <a:prstGeom prst="rect">
             <a:avLst/>
@@ -7818,7 +7686,7 @@
                 <a:solidFill>
                   <a:srgbClr val="0F52BA"/>
                 </a:solidFill>
-                <a:latin typeface="Calibri"/>
+                <a:latin typeface="Century Gothic" panose="020B0502020202020204" pitchFamily="34" charset="0"/>
               </a:rPr>
               <a:t>$0.03</a:t>
             </a:r>
@@ -7853,7 +7721,7 @@
                 <a:solidFill>
                   <a:srgbClr val="6B6B6B"/>
                 </a:solidFill>
-                <a:latin typeface="Calibri"/>
+                <a:latin typeface="Century Gothic" panose="020B0502020202020204" pitchFamily="34" charset="0"/>
               </a:rPr>
               <a:t>raw/processed/models tiers</a:t>
             </a:r>
@@ -7903,7 +7771,9 @@
           <a:lstStyle/>
           <a:p>
             <a:pPr algn="ctr"/>
-            <a:endParaRPr/>
+            <a:endParaRPr>
+              <a:latin typeface="Century Gothic" panose="020B0502020202020204" pitchFamily="34" charset="0"/>
+            </a:endParaRPr>
           </a:p>
         </p:txBody>
       </p:sp>
@@ -7916,7 +7786,7 @@
         <p:spPr>
           <a:xfrm>
             <a:off x="640080" y="3364992"/>
-            <a:ext cx="2926080" cy="320040"/>
+            <a:ext cx="2926080" cy="169277"/>
           </a:xfrm>
           <a:prstGeom prst="rect">
             <a:avLst/>
@@ -7935,7 +7805,7 @@
                 <a:solidFill>
                   <a:srgbClr val="222E3C"/>
                 </a:solidFill>
-                <a:latin typeface="Calibri"/>
+                <a:latin typeface="Century Gothic" panose="020B0502020202020204" pitchFamily="34" charset="0"/>
               </a:rPr>
               <a:t>S3 requests + egress</a:t>
             </a:r>
@@ -7951,7 +7821,7 @@
         <p:spPr>
           <a:xfrm>
             <a:off x="3657600" y="3364992"/>
-            <a:ext cx="1097280" cy="320040"/>
+            <a:ext cx="1097280" cy="169277"/>
           </a:xfrm>
           <a:prstGeom prst="rect">
             <a:avLst/>
@@ -7970,7 +7840,7 @@
                 <a:solidFill>
                   <a:srgbClr val="0F52BA"/>
                 </a:solidFill>
-                <a:latin typeface="Calibri"/>
+                <a:latin typeface="Century Gothic" panose="020B0502020202020204" pitchFamily="34" charset="0"/>
               </a:rPr>
               <a:t>$0.05</a:t>
             </a:r>
@@ -7986,7 +7856,7 @@
         <p:spPr>
           <a:xfrm>
             <a:off x="4846320" y="3364992"/>
-            <a:ext cx="1463040" cy="320040"/>
+            <a:ext cx="1463040" cy="153888"/>
           </a:xfrm>
           <a:prstGeom prst="rect">
             <a:avLst/>
@@ -8005,7 +7875,7 @@
                 <a:solidFill>
                   <a:srgbClr val="6B6B6B"/>
                 </a:solidFill>
-                <a:latin typeface="Calibri"/>
+                <a:latin typeface="Century Gothic" panose="020B0502020202020204" pitchFamily="34" charset="0"/>
               </a:rPr>
               <a:t>Daily inference pulls</a:t>
             </a:r>
@@ -8055,7 +7925,9 @@
           <a:lstStyle/>
           <a:p>
             <a:pPr algn="ctr"/>
-            <a:endParaRPr/>
+            <a:endParaRPr>
+              <a:latin typeface="Century Gothic" panose="020B0502020202020204" pitchFamily="34" charset="0"/>
+            </a:endParaRPr>
           </a:p>
         </p:txBody>
       </p:sp>
@@ -8068,7 +7940,7 @@
         <p:spPr>
           <a:xfrm>
             <a:off x="640080" y="3867912"/>
-            <a:ext cx="2926080" cy="320040"/>
+            <a:ext cx="2926080" cy="169277"/>
           </a:xfrm>
           <a:prstGeom prst="rect">
             <a:avLst/>
@@ -8087,7 +7959,7 @@
                 <a:solidFill>
                   <a:srgbClr val="222E3C"/>
                 </a:solidFill>
-                <a:latin typeface="Calibri"/>
+                <a:latin typeface="Century Gothic" panose="020B0502020202020204" pitchFamily="34" charset="0"/>
               </a:rPr>
               <a:t>GitHub Actions minutes</a:t>
             </a:r>
@@ -8103,7 +7975,7 @@
         <p:spPr>
           <a:xfrm>
             <a:off x="3657600" y="3867912"/>
-            <a:ext cx="1097280" cy="320040"/>
+            <a:ext cx="1097280" cy="169277"/>
           </a:xfrm>
           <a:prstGeom prst="rect">
             <a:avLst/>
@@ -8122,7 +7994,7 @@
                 <a:solidFill>
                   <a:srgbClr val="0F52BA"/>
                 </a:solidFill>
-                <a:latin typeface="Calibri"/>
+                <a:latin typeface="Century Gothic" panose="020B0502020202020204" pitchFamily="34" charset="0"/>
               </a:rPr>
               <a:t>$0.18</a:t>
             </a:r>
@@ -8157,7 +8029,7 @@
                 <a:solidFill>
                   <a:srgbClr val="6B6B6B"/>
                 </a:solidFill>
-                <a:latin typeface="Calibri"/>
+                <a:latin typeface="Century Gothic" panose="020B0502020202020204" pitchFamily="34" charset="0"/>
               </a:rPr>
               <a:t>4 workflows, mostly cached</a:t>
             </a:r>
@@ -8207,7 +8079,9 @@
           <a:lstStyle/>
           <a:p>
             <a:pPr algn="ctr"/>
-            <a:endParaRPr/>
+            <a:endParaRPr>
+              <a:latin typeface="Century Gothic" panose="020B0502020202020204" pitchFamily="34" charset="0"/>
+            </a:endParaRPr>
           </a:p>
         </p:txBody>
       </p:sp>
@@ -8220,7 +8094,7 @@
         <p:spPr>
           <a:xfrm>
             <a:off x="640080" y="4370832"/>
-            <a:ext cx="2926080" cy="320040"/>
+            <a:ext cx="2926080" cy="169277"/>
           </a:xfrm>
           <a:prstGeom prst="rect">
             <a:avLst/>
@@ -8239,7 +8113,7 @@
                 <a:solidFill>
                   <a:srgbClr val="222E3C"/>
                 </a:solidFill>
-                <a:latin typeface="Calibri"/>
+                <a:latin typeface="Century Gothic" panose="020B0502020202020204" pitchFamily="34" charset="0"/>
               </a:rPr>
               <a:t>NASA FIRMS + Open-Meteo</a:t>
             </a:r>
@@ -8255,7 +8129,7 @@
         <p:spPr>
           <a:xfrm>
             <a:off x="3657600" y="4370832"/>
-            <a:ext cx="1097280" cy="320040"/>
+            <a:ext cx="1097280" cy="169277"/>
           </a:xfrm>
           <a:prstGeom prst="rect">
             <a:avLst/>
@@ -8274,7 +8148,7 @@
                 <a:solidFill>
                   <a:srgbClr val="0F52BA"/>
                 </a:solidFill>
-                <a:latin typeface="Calibri"/>
+                <a:latin typeface="Century Gothic" panose="020B0502020202020204" pitchFamily="34" charset="0"/>
               </a:rPr>
               <a:t>$0.00</a:t>
             </a:r>
@@ -8309,7 +8183,7 @@
                 <a:solidFill>
                   <a:srgbClr val="6B6B6B"/>
                 </a:solidFill>
-                <a:latin typeface="Calibri"/>
+                <a:latin typeface="Century Gothic" panose="020B0502020202020204" pitchFamily="34" charset="0"/>
               </a:rPr>
               <a:t>Free tiers, MAP_KEY only</a:t>
             </a:r>
@@ -8357,7 +8231,9 @@
           <a:lstStyle/>
           <a:p>
             <a:pPr algn="ctr"/>
-            <a:endParaRPr/>
+            <a:endParaRPr>
+              <a:latin typeface="Century Gothic" panose="020B0502020202020204" pitchFamily="34" charset="0"/>
+            </a:endParaRPr>
           </a:p>
         </p:txBody>
       </p:sp>
@@ -8370,7 +8246,7 @@
         <p:spPr>
           <a:xfrm>
             <a:off x="640080" y="4919472"/>
-            <a:ext cx="2926080" cy="365760"/>
+            <a:ext cx="2926080" cy="200055"/>
           </a:xfrm>
           <a:prstGeom prst="rect">
             <a:avLst/>
@@ -8389,7 +8265,7 @@
                 <a:solidFill>
                   <a:srgbClr val="FFFFFF"/>
                 </a:solidFill>
-                <a:latin typeface="Calibri"/>
+                <a:latin typeface="Century Gothic" panose="020B0502020202020204" pitchFamily="34" charset="0"/>
               </a:rPr>
               <a:t>TOTAL</a:t>
             </a:r>
@@ -8405,7 +8281,7 @@
         <p:spPr>
           <a:xfrm>
             <a:off x="3657600" y="4892040"/>
-            <a:ext cx="1097280" cy="411480"/>
+            <a:ext cx="1097280" cy="276999"/>
           </a:xfrm>
           <a:prstGeom prst="rect">
             <a:avLst/>
@@ -8424,7 +8300,7 @@
                 <a:solidFill>
                   <a:srgbClr val="FFFFFF"/>
                 </a:solidFill>
-                <a:latin typeface="Calibri"/>
+                <a:latin typeface="Century Gothic" panose="020B0502020202020204" pitchFamily="34" charset="0"/>
               </a:rPr>
               <a:t>$0.55</a:t>
             </a:r>
@@ -8440,7 +8316,7 @@
         <p:spPr>
           <a:xfrm>
             <a:off x="4846320" y="4937760"/>
-            <a:ext cx="1463040" cy="320040"/>
+            <a:ext cx="1463040" cy="169277"/>
           </a:xfrm>
           <a:prstGeom prst="rect">
             <a:avLst/>
@@ -8459,7 +8335,7 @@
                 <a:solidFill>
                   <a:srgbClr val="FFFFFF"/>
                 </a:solidFill>
-                <a:latin typeface="Calibri"/>
+                <a:latin typeface="Century Gothic" panose="020B0502020202020204" pitchFamily="34" charset="0"/>
               </a:rPr>
               <a:t>~$16.50 / month</a:t>
             </a:r>
@@ -8475,7 +8351,7 @@
         <p:spPr>
           <a:xfrm>
             <a:off x="6675120" y="1463040"/>
-            <a:ext cx="5029200" cy="320040"/>
+            <a:ext cx="5029200" cy="153888"/>
           </a:xfrm>
           <a:prstGeom prst="rect">
             <a:avLst/>
@@ -8494,7 +8370,7 @@
                 <a:solidFill>
                   <a:srgbClr val="0F52BA"/>
                 </a:solidFill>
-                <a:latin typeface="Calibri"/>
+                <a:latin typeface="Century Gothic" panose="020B0502020202020204" pitchFamily="34" charset="0"/>
               </a:rPr>
               <a:t>SCALABILITY PATH</a:t>
             </a:r>
@@ -8544,7 +8420,9 @@
           <a:lstStyle/>
           <a:p>
             <a:pPr algn="ctr"/>
-            <a:endParaRPr/>
+            <a:endParaRPr>
+              <a:latin typeface="Century Gothic" panose="020B0502020202020204" pitchFamily="34" charset="0"/>
+            </a:endParaRPr>
           </a:p>
         </p:txBody>
       </p:sp>
@@ -8589,7 +8467,9 @@
           <a:lstStyle/>
           <a:p>
             <a:pPr algn="ctr"/>
-            <a:endParaRPr/>
+            <a:endParaRPr>
+              <a:latin typeface="Century Gothic" panose="020B0502020202020204" pitchFamily="34" charset="0"/>
+            </a:endParaRPr>
           </a:p>
         </p:txBody>
       </p:sp>
@@ -8602,7 +8482,7 @@
         <p:spPr>
           <a:xfrm>
             <a:off x="6949440" y="1920240"/>
-            <a:ext cx="4663440" cy="320040"/>
+            <a:ext cx="4663440" cy="169277"/>
           </a:xfrm>
           <a:prstGeom prst="rect">
             <a:avLst/>
@@ -8621,7 +8501,7 @@
                 <a:solidFill>
                   <a:srgbClr val="0F52BA"/>
                 </a:solidFill>
-                <a:latin typeface="Calibri"/>
+                <a:latin typeface="Century Gothic" panose="020B0502020202020204" pitchFamily="34" charset="0"/>
               </a:rPr>
               <a:t>SPOT INSTANCE</a:t>
             </a:r>
@@ -8637,7 +8517,7 @@
         <p:spPr>
           <a:xfrm>
             <a:off x="6949440" y="2212848"/>
-            <a:ext cx="4663440" cy="411480"/>
+            <a:ext cx="4663440" cy="153888"/>
           </a:xfrm>
           <a:prstGeom prst="rect">
             <a:avLst/>
@@ -8656,7 +8536,7 @@
                 <a:solidFill>
                   <a:srgbClr val="222E3C"/>
                 </a:solidFill>
-                <a:latin typeface="Calibri"/>
+                <a:latin typeface="Century Gothic" panose="020B0502020202020204" pitchFamily="34" charset="0"/>
               </a:rPr>
               <a:t>EC2 spot can cut compute by ~70 % for retrain only</a:t>
             </a:r>
@@ -8706,7 +8586,9 @@
           <a:lstStyle/>
           <a:p>
             <a:pPr algn="ctr"/>
-            <a:endParaRPr/>
+            <a:endParaRPr>
+              <a:latin typeface="Century Gothic" panose="020B0502020202020204" pitchFamily="34" charset="0"/>
+            </a:endParaRPr>
           </a:p>
         </p:txBody>
       </p:sp>
@@ -8751,7 +8633,9 @@
           <a:lstStyle/>
           <a:p>
             <a:pPr algn="ctr"/>
-            <a:endParaRPr/>
+            <a:endParaRPr>
+              <a:latin typeface="Century Gothic" panose="020B0502020202020204" pitchFamily="34" charset="0"/>
+            </a:endParaRPr>
           </a:p>
         </p:txBody>
       </p:sp>
@@ -8764,7 +8648,7 @@
         <p:spPr>
           <a:xfrm>
             <a:off x="6949440" y="2834640"/>
-            <a:ext cx="4663440" cy="320040"/>
+            <a:ext cx="4663440" cy="169277"/>
           </a:xfrm>
           <a:prstGeom prst="rect">
             <a:avLst/>
@@ -8783,7 +8667,7 @@
                 <a:solidFill>
                   <a:srgbClr val="0F52BA"/>
                 </a:solidFill>
-                <a:latin typeface="Calibri"/>
+                <a:latin typeface="Century Gothic" panose="020B0502020202020204" pitchFamily="34" charset="0"/>
               </a:rPr>
               <a:t>LAMBDA INFERENCE</a:t>
             </a:r>
@@ -8799,7 +8683,7 @@
         <p:spPr>
           <a:xfrm>
             <a:off x="6949440" y="3127248"/>
-            <a:ext cx="4663440" cy="411480"/>
+            <a:ext cx="4663440" cy="153888"/>
           </a:xfrm>
           <a:prstGeom prst="rect">
             <a:avLst/>
@@ -8818,7 +8702,7 @@
                 <a:solidFill>
                   <a:srgbClr val="222E3C"/>
                 </a:solidFill>
-                <a:latin typeface="Calibri"/>
+                <a:latin typeface="Century Gothic" panose="020B0502020202020204" pitchFamily="34" charset="0"/>
               </a:rPr>
               <a:t>Move /predict to Lambda when QPS &gt; 10 k/day</a:t>
             </a:r>
@@ -8868,7 +8752,9 @@
           <a:lstStyle/>
           <a:p>
             <a:pPr algn="ctr"/>
-            <a:endParaRPr/>
+            <a:endParaRPr>
+              <a:latin typeface="Century Gothic" panose="020B0502020202020204" pitchFamily="34" charset="0"/>
+            </a:endParaRPr>
           </a:p>
         </p:txBody>
       </p:sp>
@@ -8913,7 +8799,9 @@
           <a:lstStyle/>
           <a:p>
             <a:pPr algn="ctr"/>
-            <a:endParaRPr/>
+            <a:endParaRPr>
+              <a:latin typeface="Century Gothic" panose="020B0502020202020204" pitchFamily="34" charset="0"/>
+            </a:endParaRPr>
           </a:p>
         </p:txBody>
       </p:sp>
@@ -8926,7 +8814,7 @@
         <p:spPr>
           <a:xfrm>
             <a:off x="6949440" y="3749040"/>
-            <a:ext cx="4663440" cy="320040"/>
+            <a:ext cx="4663440" cy="169277"/>
           </a:xfrm>
           <a:prstGeom prst="rect">
             <a:avLst/>
@@ -8945,7 +8833,7 @@
                 <a:solidFill>
                   <a:srgbClr val="0F52BA"/>
                 </a:solidFill>
-                <a:latin typeface="Calibri"/>
+                <a:latin typeface="Century Gothic" panose="020B0502020202020204" pitchFamily="34" charset="0"/>
               </a:rPr>
               <a:t>SCHEDULED SHUTDOWN</a:t>
             </a:r>
@@ -8961,7 +8849,7 @@
         <p:spPr>
           <a:xfrm>
             <a:off x="6949440" y="4041648"/>
-            <a:ext cx="4663440" cy="411480"/>
+            <a:ext cx="4663440" cy="153888"/>
           </a:xfrm>
           <a:prstGeom prst="rect">
             <a:avLst/>
@@ -8980,7 +8868,7 @@
                 <a:solidFill>
                   <a:srgbClr val="222E3C"/>
                 </a:solidFill>
-                <a:latin typeface="Calibri"/>
+                <a:latin typeface="Century Gothic" panose="020B0502020202020204" pitchFamily="34" charset="0"/>
               </a:rPr>
               <a:t>Only run MLflow UI on demand (dev credentials)</a:t>
             </a:r>
@@ -9030,7 +8918,9 @@
           <a:lstStyle/>
           <a:p>
             <a:pPr algn="ctr"/>
-            <a:endParaRPr/>
+            <a:endParaRPr>
+              <a:latin typeface="Century Gothic" panose="020B0502020202020204" pitchFamily="34" charset="0"/>
+            </a:endParaRPr>
           </a:p>
         </p:txBody>
       </p:sp>
@@ -9075,7 +8965,9 @@
           <a:lstStyle/>
           <a:p>
             <a:pPr algn="ctr"/>
-            <a:endParaRPr/>
+            <a:endParaRPr>
+              <a:latin typeface="Century Gothic" panose="020B0502020202020204" pitchFamily="34" charset="0"/>
+            </a:endParaRPr>
           </a:p>
         </p:txBody>
       </p:sp>
@@ -9088,7 +8980,7 @@
         <p:spPr>
           <a:xfrm>
             <a:off x="6949440" y="4663440"/>
-            <a:ext cx="4663440" cy="320040"/>
+            <a:ext cx="4663440" cy="169277"/>
           </a:xfrm>
           <a:prstGeom prst="rect">
             <a:avLst/>
@@ -9107,7 +8999,7 @@
                 <a:solidFill>
                   <a:srgbClr val="0F52BA"/>
                 </a:solidFill>
-                <a:latin typeface="Calibri"/>
+                <a:latin typeface="Century Gothic" panose="020B0502020202020204" pitchFamily="34" charset="0"/>
               </a:rPr>
               <a:t>MULTI-REGION</a:t>
             </a:r>
@@ -9123,7 +9015,7 @@
         <p:spPr>
           <a:xfrm>
             <a:off x="6949440" y="4956048"/>
-            <a:ext cx="4663440" cy="411480"/>
+            <a:ext cx="4663440" cy="153888"/>
           </a:xfrm>
           <a:prstGeom prst="rect">
             <a:avLst/>
@@ -9142,7 +9034,7 @@
                 <a:solidFill>
                   <a:srgbClr val="222E3C"/>
                 </a:solidFill>
-                <a:latin typeface="Calibri"/>
+                <a:latin typeface="Century Gothic" panose="020B0502020202020204" pitchFamily="34" charset="0"/>
               </a:rPr>
               <a:t>Replicate to BKK region for sub-50 ms p99 latency</a:t>
             </a:r>
@@ -9158,7 +9050,7 @@
         <p:spPr>
           <a:xfrm>
             <a:off x="457200" y="6510528"/>
-            <a:ext cx="11247120" cy="274320"/>
+            <a:ext cx="11247120" cy="138499"/>
           </a:xfrm>
           <a:prstGeom prst="rect">
             <a:avLst/>
@@ -9177,7 +9069,7 @@
                 <a:solidFill>
                   <a:srgbClr val="6B6B6B"/>
                 </a:solidFill>
-                <a:latin typeface="Calibri"/>
+                <a:latin typeface="Century Gothic" panose="020B0502020202020204" pitchFamily="34" charset="0"/>
               </a:rPr>
               <a:t>Pricing: AWS ap-southeast-1, on-demand, April 2026</a:t>
             </a:r>
@@ -9193,7 +9085,7 @@
         <p:spPr>
           <a:xfrm>
             <a:off x="11475720" y="6510528"/>
-            <a:ext cx="640080" cy="274320"/>
+            <a:ext cx="640080" cy="138499"/>
           </a:xfrm>
           <a:prstGeom prst="rect">
             <a:avLst/>
@@ -9212,7 +9104,7 @@
                 <a:solidFill>
                   <a:srgbClr val="6B6B6B"/>
                 </a:solidFill>
-                <a:latin typeface="Calibri"/>
+                <a:latin typeface="Century Gothic" panose="020B0502020202020204" pitchFamily="34" charset="0"/>
               </a:rPr>
               <a:t>13 / 14</a:t>
             </a:r>
@@ -9285,7 +9177,9 @@
           <a:lstStyle/>
           <a:p>
             <a:pPr algn="ctr"/>
-            <a:endParaRPr/>
+            <a:endParaRPr>
+              <a:latin typeface="Century Gothic" panose="020B0502020202020204" pitchFamily="34" charset="0"/>
+            </a:endParaRPr>
           </a:p>
         </p:txBody>
       </p:sp>
@@ -9330,7 +9224,9 @@
           <a:lstStyle/>
           <a:p>
             <a:pPr algn="ctr"/>
-            <a:endParaRPr/>
+            <a:endParaRPr>
+              <a:latin typeface="Century Gothic" panose="020B0502020202020204" pitchFamily="34" charset="0"/>
+            </a:endParaRPr>
           </a:p>
         </p:txBody>
       </p:sp>
@@ -9343,7 +9239,7 @@
         <p:spPr>
           <a:xfrm>
             <a:off x="457200" y="274320"/>
-            <a:ext cx="9144000" cy="274320"/>
+            <a:ext cx="9144000" cy="153888"/>
           </a:xfrm>
           <a:prstGeom prst="rect">
             <a:avLst/>
@@ -9362,7 +9258,7 @@
                 <a:solidFill>
                   <a:srgbClr val="0F52BA"/>
                 </a:solidFill>
-                <a:latin typeface="Calibri"/>
+                <a:latin typeface="Century Gothic" panose="020B0502020202020204" pitchFamily="34" charset="0"/>
               </a:rPr>
               <a:t>CONCLUSION</a:t>
             </a:r>
@@ -9378,7 +9274,7 @@
         <p:spPr>
           <a:xfrm>
             <a:off x="457200" y="640080"/>
-            <a:ext cx="11247120" cy="731520"/>
+            <a:ext cx="11247120" cy="800219"/>
           </a:xfrm>
           <a:prstGeom prst="rect">
             <a:avLst/>
@@ -9397,7 +9293,7 @@
                 <a:solidFill>
                   <a:srgbClr val="1A1A1A"/>
                 </a:solidFill>
-                <a:latin typeface="Calibri"/>
+                <a:latin typeface="Century Gothic" panose="020B0502020202020204" pitchFamily="34" charset="0"/>
               </a:rPr>
               <a:t>Integration over novelty — a production-shaped PM2.5 forecaster for Chiang Mai</a:t>
             </a:r>
@@ -9447,7 +9343,9 @@
           <a:lstStyle/>
           <a:p>
             <a:pPr algn="ctr"/>
-            <a:endParaRPr/>
+            <a:endParaRPr>
+              <a:latin typeface="Century Gothic" panose="020B0502020202020204" pitchFamily="34" charset="0"/>
+            </a:endParaRPr>
           </a:p>
         </p:txBody>
       </p:sp>
@@ -9492,7 +9390,9 @@
           <a:lstStyle/>
           <a:p>
             <a:pPr algn="ctr"/>
-            <a:endParaRPr/>
+            <a:endParaRPr>
+              <a:latin typeface="Century Gothic" panose="020B0502020202020204" pitchFamily="34" charset="0"/>
+            </a:endParaRPr>
           </a:p>
         </p:txBody>
       </p:sp>
@@ -9505,7 +9405,7 @@
         <p:spPr>
           <a:xfrm>
             <a:off x="685800" y="1828800"/>
-            <a:ext cx="3576218" cy="365760"/>
+            <a:ext cx="3576218" cy="169277"/>
           </a:xfrm>
           <a:prstGeom prst="rect">
             <a:avLst/>
@@ -9524,7 +9424,7 @@
                 <a:solidFill>
                   <a:srgbClr val="E8B900"/>
                 </a:solidFill>
-                <a:latin typeface="Calibri"/>
+                <a:latin typeface="Century Gothic" panose="020B0502020202020204" pitchFamily="34" charset="0"/>
               </a:rPr>
               <a:t>01</a:t>
             </a:r>
@@ -9540,7 +9440,7 @@
         <p:spPr>
           <a:xfrm>
             <a:off x="685800" y="2148840"/>
-            <a:ext cx="3119018" cy="548640"/>
+            <a:ext cx="3119018" cy="276999"/>
           </a:xfrm>
           <a:prstGeom prst="rect">
             <a:avLst/>
@@ -9559,7 +9459,7 @@
                 <a:solidFill>
                   <a:srgbClr val="1A1A1A"/>
                 </a:solidFill>
-                <a:latin typeface="Calibri"/>
+                <a:latin typeface="Century Gothic" panose="020B0502020202020204" pitchFamily="34" charset="0"/>
               </a:rPr>
               <a:t>Forecast delivered</a:t>
             </a:r>
@@ -9575,7 +9475,7 @@
         <p:spPr>
           <a:xfrm>
             <a:off x="685800" y="2743200"/>
-            <a:ext cx="3119018" cy="1371600"/>
+            <a:ext cx="3119018" cy="507831"/>
           </a:xfrm>
           <a:prstGeom prst="rect">
             <a:avLst/>
@@ -9594,7 +9494,7 @@
                 <a:solidFill>
                   <a:srgbClr val="222E3C"/>
                 </a:solidFill>
-                <a:latin typeface="Calibri"/>
+                <a:latin typeface="Century Gothic" panose="020B0502020202020204" pitchFamily="34" charset="0"/>
               </a:rPr>
               <a:t>LightGBM champion: MAE 5.12 / 6.77 / 8.25 µg/m³ at t+1 / t+3 / t+7 on 2-year chronological test set.</a:t>
             </a:r>
@@ -9644,7 +9544,9 @@
           <a:lstStyle/>
           <a:p>
             <a:pPr algn="ctr"/>
-            <a:endParaRPr/>
+            <a:endParaRPr>
+              <a:latin typeface="Century Gothic" panose="020B0502020202020204" pitchFamily="34" charset="0"/>
+            </a:endParaRPr>
           </a:p>
         </p:txBody>
       </p:sp>
@@ -9689,7 +9591,9 @@
           <a:lstStyle/>
           <a:p>
             <a:pPr algn="ctr"/>
-            <a:endParaRPr/>
+            <a:endParaRPr>
+              <a:latin typeface="Century Gothic" panose="020B0502020202020204" pitchFamily="34" charset="0"/>
+            </a:endParaRPr>
           </a:p>
         </p:txBody>
       </p:sp>
@@ -9702,7 +9606,7 @@
         <p:spPr>
           <a:xfrm>
             <a:off x="4536338" y="1828800"/>
-            <a:ext cx="3576218" cy="365760"/>
+            <a:ext cx="3576218" cy="169277"/>
           </a:xfrm>
           <a:prstGeom prst="rect">
             <a:avLst/>
@@ -9721,7 +9625,7 @@
                 <a:solidFill>
                   <a:srgbClr val="E8B900"/>
                 </a:solidFill>
-                <a:latin typeface="Calibri"/>
+                <a:latin typeface="Century Gothic" panose="020B0502020202020204" pitchFamily="34" charset="0"/>
               </a:rPr>
               <a:t>02</a:t>
             </a:r>
@@ -9737,7 +9641,7 @@
         <p:spPr>
           <a:xfrm>
             <a:off x="4536338" y="2148840"/>
-            <a:ext cx="3119018" cy="548640"/>
+            <a:ext cx="3119018" cy="276999"/>
           </a:xfrm>
           <a:prstGeom prst="rect">
             <a:avLst/>
@@ -9756,7 +9660,7 @@
                 <a:solidFill>
                   <a:srgbClr val="1A1A1A"/>
                 </a:solidFill>
-                <a:latin typeface="Calibri"/>
+                <a:latin typeface="Century Gothic" panose="020B0502020202020204" pitchFamily="34" charset="0"/>
               </a:rPr>
               <a:t>Alert system deployed</a:t>
             </a:r>
@@ -9772,7 +9676,7 @@
         <p:spPr>
           <a:xfrm>
             <a:off x="4536338" y="2743200"/>
-            <a:ext cx="3119018" cy="1371600"/>
+            <a:ext cx="3119018" cy="507831"/>
           </a:xfrm>
           <a:prstGeom prst="rect">
             <a:avLst/>
@@ -9791,7 +9695,7 @@
                 <a:solidFill>
                   <a:srgbClr val="222E3C"/>
                 </a:solidFill>
-                <a:latin typeface="Calibri"/>
+                <a:latin typeface="Century Gothic" panose="020B0502020202020204" pitchFamily="34" charset="0"/>
               </a:rPr>
               <a:t>Scenario-C tuned thresholds give F1 0.88 (t+1) — operationally usable. FIRMS fire features contribute 4–7 % of MAE.</a:t>
             </a:r>
@@ -9841,7 +9745,9 @@
           <a:lstStyle/>
           <a:p>
             <a:pPr algn="ctr"/>
-            <a:endParaRPr/>
+            <a:endParaRPr>
+              <a:latin typeface="Century Gothic" panose="020B0502020202020204" pitchFamily="34" charset="0"/>
+            </a:endParaRPr>
           </a:p>
         </p:txBody>
       </p:sp>
@@ -9886,7 +9792,9 @@
           <a:lstStyle/>
           <a:p>
             <a:pPr algn="ctr"/>
-            <a:endParaRPr/>
+            <a:endParaRPr>
+              <a:latin typeface="Century Gothic" panose="020B0502020202020204" pitchFamily="34" charset="0"/>
+            </a:endParaRPr>
           </a:p>
         </p:txBody>
       </p:sp>
@@ -9899,7 +9807,7 @@
         <p:spPr>
           <a:xfrm>
             <a:off x="8386876" y="1828800"/>
-            <a:ext cx="3576218" cy="365760"/>
+            <a:ext cx="3576218" cy="169277"/>
           </a:xfrm>
           <a:prstGeom prst="rect">
             <a:avLst/>
@@ -9918,7 +9826,7 @@
                 <a:solidFill>
                   <a:srgbClr val="E8B900"/>
                 </a:solidFill>
-                <a:latin typeface="Calibri"/>
+                <a:latin typeface="Century Gothic" panose="020B0502020202020204" pitchFamily="34" charset="0"/>
               </a:rPr>
               <a:t>03</a:t>
             </a:r>
@@ -9934,7 +9842,7 @@
         <p:spPr>
           <a:xfrm>
             <a:off x="8386876" y="2148840"/>
-            <a:ext cx="3119018" cy="548640"/>
+            <a:ext cx="3119018" cy="276999"/>
           </a:xfrm>
           <a:prstGeom prst="rect">
             <a:avLst/>
@@ -9953,7 +9861,7 @@
                 <a:solidFill>
                   <a:srgbClr val="1A1A1A"/>
                 </a:solidFill>
-                <a:latin typeface="Calibri"/>
+                <a:latin typeface="Century Gothic" panose="020B0502020202020204" pitchFamily="34" charset="0"/>
               </a:rPr>
               <a:t>MLOps end-to-end</a:t>
             </a:r>
@@ -9969,7 +9877,7 @@
         <p:spPr>
           <a:xfrm>
             <a:off x="8386876" y="2743200"/>
-            <a:ext cx="3119018" cy="1371600"/>
+            <a:ext cx="3119018" cy="507831"/>
           </a:xfrm>
           <a:prstGeom prst="rect">
             <a:avLst/>
@@ -9988,7 +9896,7 @@
                 <a:solidFill>
                   <a:srgbClr val="222E3C"/>
                 </a:solidFill>
-                <a:latin typeface="Calibri"/>
+                <a:latin typeface="Century Gothic" panose="020B0502020202020204" pitchFamily="34" charset="0"/>
               </a:rPr>
               <a:t>Daily pipeline + PSI/KS drift + champion/challenger promotion — all in CI for ~$0.55 / day.</a:t>
             </a:r>
@@ -10004,7 +9912,7 @@
         <p:spPr>
           <a:xfrm>
             <a:off x="457200" y="4572000"/>
-            <a:ext cx="11247120" cy="320040"/>
+            <a:ext cx="11247120" cy="153888"/>
           </a:xfrm>
           <a:prstGeom prst="rect">
             <a:avLst/>
@@ -10023,7 +9931,7 @@
                 <a:solidFill>
                   <a:srgbClr val="0F52BA"/>
                 </a:solidFill>
-                <a:latin typeface="Calibri"/>
+                <a:latin typeface="Century Gothic" panose="020B0502020202020204" pitchFamily="34" charset="0"/>
               </a:rPr>
               <a:t>FUTURE WORK</a:t>
             </a:r>
@@ -10039,7 +9947,7 @@
         <p:spPr>
           <a:xfrm>
             <a:off x="457200" y="4892040"/>
-            <a:ext cx="11247120" cy="1097280"/>
+            <a:ext cx="11247120" cy="707886"/>
           </a:xfrm>
           <a:prstGeom prst="rect">
             <a:avLst/>
@@ -10062,7 +9970,7 @@
                 <a:solidFill>
                   <a:srgbClr val="0F52BA"/>
                 </a:solidFill>
-                <a:latin typeface="Calibri"/>
+                <a:latin typeface="Century Gothic" panose="020B0502020202020204" pitchFamily="34" charset="0"/>
               </a:rPr>
               <a:t>•  </a:t>
             </a:r>
@@ -10071,7 +9979,7 @@
                 <a:solidFill>
                   <a:srgbClr val="222E3C"/>
                 </a:solidFill>
-                <a:latin typeface="Calibri"/>
+                <a:latin typeface="Century Gothic" panose="020B0502020202020204" pitchFamily="34" charset="0"/>
               </a:rPr>
               <a:t>Sub-daily ingest — swap PCD Excel for hourly stations (lower t+1 MAE further)</a:t>
             </a:r>
@@ -10087,7 +9995,7 @@
                 <a:solidFill>
                   <a:srgbClr val="0F52BA"/>
                 </a:solidFill>
-                <a:latin typeface="Calibri"/>
+                <a:latin typeface="Century Gothic" panose="020B0502020202020204" pitchFamily="34" charset="0"/>
               </a:rPr>
               <a:t>•  </a:t>
             </a:r>
@@ -10096,7 +10004,7 @@
                 <a:solidFill>
                   <a:srgbClr val="222E3C"/>
                 </a:solidFill>
-                <a:latin typeface="Calibri"/>
+                <a:latin typeface="Century Gothic" panose="020B0502020202020204" pitchFamily="34" charset="0"/>
               </a:rPr>
               <a:t>Spatial extension — multi-station grid for provincial alert</a:t>
             </a:r>
@@ -10112,7 +10020,7 @@
                 <a:solidFill>
                   <a:srgbClr val="0F52BA"/>
                 </a:solidFill>
-                <a:latin typeface="Calibri"/>
+                <a:latin typeface="Century Gothic" panose="020B0502020202020204" pitchFamily="34" charset="0"/>
               </a:rPr>
               <a:t>•  </a:t>
             </a:r>
@@ -10121,7 +10029,7 @@
                 <a:solidFill>
                   <a:srgbClr val="222E3C"/>
                 </a:solidFill>
-                <a:latin typeface="Calibri"/>
+                <a:latin typeface="Century Gothic" panose="020B0502020202020204" pitchFamily="34" charset="0"/>
               </a:rPr>
               <a:t>Probabilistic forecasts — quantile regression to expose uncertainty to the alert layer</a:t>
             </a:r>
@@ -10130,86 +10038,6 @@
       </p:sp>
       <p:sp>
         <p:nvSpPr>
-          <p:cNvPr id="23" name="Rectangle 22"/>
-          <p:cNvSpPr/>
-          <p:nvPr/>
-        </p:nvSpPr>
-        <p:spPr>
-          <a:xfrm>
-            <a:off x="457200" y="6035040"/>
-            <a:ext cx="11247120" cy="502920"/>
-          </a:xfrm>
-          <a:prstGeom prst="rect">
-            <a:avLst/>
-          </a:prstGeom>
-          <a:solidFill>
-            <a:srgbClr val="0F52BA"/>
-          </a:solidFill>
-          <a:ln>
-            <a:noFill/>
-          </a:ln>
-          <a:effectLst/>
-        </p:spPr>
-        <p:style>
-          <a:lnRef idx="1">
-            <a:schemeClr val="accent1"/>
-          </a:lnRef>
-          <a:fillRef idx="3">
-            <a:schemeClr val="accent1"/>
-          </a:fillRef>
-          <a:effectRef idx="2">
-            <a:schemeClr val="accent1"/>
-          </a:effectRef>
-          <a:fontRef idx="minor">
-            <a:schemeClr val="lt1"/>
-          </a:fontRef>
-        </p:style>
-        <p:txBody>
-          <a:bodyPr rtlCol="0" anchor="ctr"/>
-          <a:lstStyle/>
-          <a:p>
-            <a:pPr algn="ctr"/>
-            <a:endParaRPr/>
-          </a:p>
-        </p:txBody>
-      </p:sp>
-      <p:sp>
-        <p:nvSpPr>
-          <p:cNvPr id="24" name="TextBox 23"/>
-          <p:cNvSpPr txBox="1"/>
-          <p:nvPr/>
-        </p:nvSpPr>
-        <p:spPr>
-          <a:xfrm>
-            <a:off x="640080" y="6126480"/>
-            <a:ext cx="10972800" cy="365760"/>
-          </a:xfrm>
-          <a:prstGeom prst="rect">
-            <a:avLst/>
-          </a:prstGeom>
-          <a:noFill/>
-        </p:spPr>
-        <p:txBody>
-          <a:bodyPr wrap="square" lIns="0" tIns="0" rIns="0" bIns="0">
-            <a:spAutoFit/>
-          </a:bodyPr>
-          <a:lstStyle/>
-          <a:p>
-            <a:pPr algn="ctr"/>
-            <a:r>
-              <a:rPr sz="1600" b="1" i="0">
-                <a:solidFill>
-                  <a:srgbClr val="FFFFFF"/>
-                </a:solidFill>
-                <a:latin typeface="Calibri"/>
-              </a:rPr>
-              <a:t>THANK YOU  ·  QUESTIONS?  ·  github.com/supanut-k/caas</a:t>
-            </a:r>
-          </a:p>
-        </p:txBody>
-      </p:sp>
-      <p:sp>
-        <p:nvSpPr>
           <p:cNvPr id="25" name="TextBox 24"/>
           <p:cNvSpPr txBox="1"/>
           <p:nvPr/>
@@ -10217,7 +10045,7 @@
         <p:spPr>
           <a:xfrm>
             <a:off x="11475720" y="6510528"/>
-            <a:ext cx="640080" cy="274320"/>
+            <a:ext cx="640080" cy="138499"/>
           </a:xfrm>
           <a:prstGeom prst="rect">
             <a:avLst/>
@@ -10236,7 +10064,7 @@
                 <a:solidFill>
                   <a:srgbClr val="6B6B6B"/>
                 </a:solidFill>
-                <a:latin typeface="Calibri"/>
+                <a:latin typeface="Century Gothic" panose="020B0502020202020204" pitchFamily="34" charset="0"/>
               </a:rPr>
               <a:t>14 / 14</a:t>
             </a:r>
@@ -10309,7 +10137,9 @@
           <a:lstStyle/>
           <a:p>
             <a:pPr algn="ctr"/>
-            <a:endParaRPr/>
+            <a:endParaRPr>
+              <a:latin typeface="Century Gothic" panose="020B0502020202020204" pitchFamily="34" charset="0"/>
+            </a:endParaRPr>
           </a:p>
         </p:txBody>
       </p:sp>
@@ -10354,7 +10184,9 @@
           <a:lstStyle/>
           <a:p>
             <a:pPr algn="ctr"/>
-            <a:endParaRPr/>
+            <a:endParaRPr>
+              <a:latin typeface="Century Gothic" panose="020B0502020202020204" pitchFamily="34" charset="0"/>
+            </a:endParaRPr>
           </a:p>
         </p:txBody>
       </p:sp>
@@ -10367,7 +10199,7 @@
         <p:spPr>
           <a:xfrm>
             <a:off x="457200" y="274320"/>
-            <a:ext cx="9144000" cy="274320"/>
+            <a:ext cx="9144000" cy="153888"/>
           </a:xfrm>
           <a:prstGeom prst="rect">
             <a:avLst/>
@@ -10386,7 +10218,7 @@
                 <a:solidFill>
                   <a:srgbClr val="0F52BA"/>
                 </a:solidFill>
-                <a:latin typeface="Calibri"/>
+                <a:latin typeface="Century Gothic" panose="020B0502020202020204" pitchFamily="34" charset="0"/>
               </a:rPr>
               <a:t>THE PROBLEM</a:t>
             </a:r>
@@ -10402,7 +10234,7 @@
         <p:spPr>
           <a:xfrm>
             <a:off x="457200" y="640080"/>
-            <a:ext cx="11247120" cy="731520"/>
+            <a:ext cx="11247120" cy="400110"/>
           </a:xfrm>
           <a:prstGeom prst="rect">
             <a:avLst/>
@@ -10421,7 +10253,7 @@
                 <a:solidFill>
                   <a:srgbClr val="1A1A1A"/>
                 </a:solidFill>
-                <a:latin typeface="Calibri"/>
+                <a:latin typeface="Century Gothic" panose="020B0502020202020204" pitchFamily="34" charset="0"/>
               </a:rPr>
               <a:t>Chiang Mai's PM2.5 crisis — an annual public-health emergency</a:t>
             </a:r>
@@ -10456,7 +10288,7 @@
                 <a:solidFill>
                   <a:srgbClr val="6B6B6B"/>
                 </a:solidFill>
-                <a:latin typeface="Calibri"/>
+                <a:latin typeface="Century Gothic" panose="020B0502020202020204" pitchFamily="34" charset="0"/>
               </a:rPr>
               <a:t>Every dry season (Feb–Apr), Chiang Mai's air exceeds WHO safe limits by order of magnitude.</a:t>
             </a:r>
@@ -10472,7 +10304,7 @@
         <p:spPr>
           <a:xfrm>
             <a:off x="457200" y="2103120"/>
-            <a:ext cx="5029200" cy="411480"/>
+            <a:ext cx="5029200" cy="169277"/>
           </a:xfrm>
           <a:prstGeom prst="rect">
             <a:avLst/>
@@ -10491,7 +10323,7 @@
                 <a:solidFill>
                   <a:srgbClr val="0F52BA"/>
                 </a:solidFill>
-                <a:latin typeface="Calibri"/>
+                <a:latin typeface="Century Gothic" panose="020B0502020202020204" pitchFamily="34" charset="0"/>
               </a:rPr>
               <a:t>PEAK POLLUTION (2024 dry season)</a:t>
             </a:r>
@@ -10507,7 +10339,7 @@
         <p:spPr>
           <a:xfrm>
             <a:off x="457200" y="2514600"/>
-            <a:ext cx="5029200" cy="1828800"/>
+            <a:ext cx="5029200" cy="1231106"/>
           </a:xfrm>
           <a:prstGeom prst="rect">
             <a:avLst/>
@@ -10522,11 +10354,11 @@
           <a:p>
             <a:pPr algn="l"/>
             <a:r>
-              <a:rPr sz="8800" b="1" i="0">
+              <a:rPr sz="8000" b="1" i="0" dirty="0">
                 <a:solidFill>
                   <a:srgbClr val="0F52BA"/>
                 </a:solidFill>
-                <a:latin typeface="Calibri"/>
+                <a:latin typeface="Century Gothic" panose="020B0502020202020204" pitchFamily="34" charset="0"/>
               </a:rPr>
               <a:t>241 µg/m³</a:t>
             </a:r>
@@ -10542,7 +10374,7 @@
         <p:spPr>
           <a:xfrm>
             <a:off x="457200" y="4434840"/>
-            <a:ext cx="5029200" cy="457200"/>
+            <a:ext cx="5029200" cy="215444"/>
           </a:xfrm>
           <a:prstGeom prst="rect">
             <a:avLst/>
@@ -10561,7 +10393,7 @@
                 <a:solidFill>
                   <a:srgbClr val="1A1A1A"/>
                 </a:solidFill>
-                <a:latin typeface="Calibri"/>
+                <a:latin typeface="Century Gothic" panose="020B0502020202020204" pitchFamily="34" charset="0"/>
               </a:rPr>
               <a:t>PM2.5 — that's 16× the WHO 24-hour limit (15 µg/m³).</a:t>
             </a:r>
@@ -10611,7 +10443,9 @@
           <a:lstStyle/>
           <a:p>
             <a:pPr algn="ctr"/>
-            <a:endParaRPr/>
+            <a:endParaRPr>
+              <a:latin typeface="Century Gothic" panose="020B0502020202020204" pitchFamily="34" charset="0"/>
+            </a:endParaRPr>
           </a:p>
         </p:txBody>
       </p:sp>
@@ -10624,7 +10458,7 @@
         <p:spPr>
           <a:xfrm>
             <a:off x="640080" y="5212080"/>
-            <a:ext cx="4572000" cy="320040"/>
+            <a:ext cx="4572000" cy="153888"/>
           </a:xfrm>
           <a:prstGeom prst="rect">
             <a:avLst/>
@@ -10643,7 +10477,7 @@
                 <a:solidFill>
                   <a:srgbClr val="0F52BA"/>
                 </a:solidFill>
-                <a:latin typeface="Calibri"/>
+                <a:latin typeface="Century Gothic" panose="020B0502020202020204" pitchFamily="34" charset="0"/>
               </a:rPr>
               <a:t>IMPACT</a:t>
             </a:r>
@@ -10682,7 +10516,7 @@
                 <a:solidFill>
                   <a:srgbClr val="0F52BA"/>
                 </a:solidFill>
-                <a:latin typeface="Calibri"/>
+                <a:latin typeface="Century Gothic" panose="020B0502020202020204" pitchFamily="34" charset="0"/>
               </a:rPr>
               <a:t>•  </a:t>
             </a:r>
@@ -10691,7 +10525,7 @@
                 <a:solidFill>
                   <a:srgbClr val="222E3C"/>
                 </a:solidFill>
-                <a:latin typeface="Calibri"/>
+                <a:latin typeface="Century Gothic" panose="020B0502020202020204" pitchFamily="34" charset="0"/>
               </a:rPr>
               <a:t>1.2 M residents in the Chiang Mai metro area</a:t>
             </a:r>
@@ -10707,7 +10541,7 @@
                 <a:solidFill>
                   <a:srgbClr val="0F52BA"/>
                 </a:solidFill>
-                <a:latin typeface="Calibri"/>
+                <a:latin typeface="Century Gothic" panose="020B0502020202020204" pitchFamily="34" charset="0"/>
               </a:rPr>
               <a:t>•  </a:t>
             </a:r>
@@ -10716,7 +10550,7 @@
                 <a:solidFill>
                   <a:srgbClr val="222E3C"/>
                 </a:solidFill>
-                <a:latin typeface="Calibri"/>
+                <a:latin typeface="Century Gothic" panose="020B0502020202020204" pitchFamily="34" charset="0"/>
               </a:rPr>
               <a:t>+12 % all-cause mortality on high-PM days (Thai PCD, 2023)</a:t>
             </a:r>
@@ -10732,7 +10566,7 @@
                 <a:solidFill>
                   <a:srgbClr val="0F52BA"/>
                 </a:solidFill>
-                <a:latin typeface="Calibri"/>
+                <a:latin typeface="Century Gothic" panose="020B0502020202020204" pitchFamily="34" charset="0"/>
               </a:rPr>
               <a:t>•  </a:t>
             </a:r>
@@ -10741,7 +10575,7 @@
                 <a:solidFill>
                   <a:srgbClr val="222E3C"/>
                 </a:solidFill>
-                <a:latin typeface="Calibri"/>
+                <a:latin typeface="Century Gothic" panose="020B0502020202020204" pitchFamily="34" charset="0"/>
               </a:rPr>
               <a:t>Existing air4thai.pcd.go.th publishes current levels only — no forecast</a:t>
             </a:r>
@@ -10781,7 +10615,7 @@
         <p:spPr>
           <a:xfrm>
             <a:off x="457200" y="6510528"/>
-            <a:ext cx="11247120" cy="274320"/>
+            <a:ext cx="11247120" cy="138499"/>
           </a:xfrm>
           <a:prstGeom prst="rect">
             <a:avLst/>
@@ -10800,7 +10634,7 @@
                 <a:solidFill>
                   <a:srgbClr val="6B6B6B"/>
                 </a:solidFill>
-                <a:latin typeface="Calibri"/>
+                <a:latin typeface="Century Gothic" panose="020B0502020202020204" pitchFamily="34" charset="0"/>
               </a:rPr>
               <a:t>Source: Thai Pollution Control Dept. · WHO AQ guidelines 2021</a:t>
             </a:r>
@@ -10816,7 +10650,7 @@
         <p:spPr>
           <a:xfrm>
             <a:off x="11475720" y="6510528"/>
-            <a:ext cx="640080" cy="274320"/>
+            <a:ext cx="640080" cy="138499"/>
           </a:xfrm>
           <a:prstGeom prst="rect">
             <a:avLst/>
@@ -10835,7 +10669,7 @@
                 <a:solidFill>
                   <a:srgbClr val="6B6B6B"/>
                 </a:solidFill>
-                <a:latin typeface="Calibri"/>
+                <a:latin typeface="Century Gothic" panose="020B0502020202020204" pitchFamily="34" charset="0"/>
               </a:rPr>
               <a:t>2 / 14</a:t>
             </a:r>
@@ -10908,7 +10742,9 @@
           <a:lstStyle/>
           <a:p>
             <a:pPr algn="ctr"/>
-            <a:endParaRPr/>
+            <a:endParaRPr>
+              <a:latin typeface="Century Gothic" panose="020B0502020202020204" pitchFamily="34" charset="0"/>
+            </a:endParaRPr>
           </a:p>
         </p:txBody>
       </p:sp>
@@ -10953,7 +10789,9 @@
           <a:lstStyle/>
           <a:p>
             <a:pPr algn="ctr"/>
-            <a:endParaRPr/>
+            <a:endParaRPr>
+              <a:latin typeface="Century Gothic" panose="020B0502020202020204" pitchFamily="34" charset="0"/>
+            </a:endParaRPr>
           </a:p>
         </p:txBody>
       </p:sp>
@@ -10966,7 +10804,7 @@
         <p:spPr>
           <a:xfrm>
             <a:off x="457200" y="274320"/>
-            <a:ext cx="9144000" cy="274320"/>
+            <a:ext cx="9144000" cy="153888"/>
           </a:xfrm>
           <a:prstGeom prst="rect">
             <a:avLst/>
@@ -10985,7 +10823,7 @@
                 <a:solidFill>
                   <a:srgbClr val="0F52BA"/>
                 </a:solidFill>
-                <a:latin typeface="Calibri"/>
+                <a:latin typeface="Century Gothic" panose="020B0502020202020204" pitchFamily="34" charset="0"/>
               </a:rPr>
               <a:t>OBJECTIVES</a:t>
             </a:r>
@@ -11001,7 +10839,7 @@
         <p:spPr>
           <a:xfrm>
             <a:off x="457200" y="640080"/>
-            <a:ext cx="11247120" cy="731520"/>
+            <a:ext cx="11247120" cy="400110"/>
           </a:xfrm>
           <a:prstGeom prst="rect">
             <a:avLst/>
@@ -11020,7 +10858,7 @@
                 <a:solidFill>
                   <a:srgbClr val="1A1A1A"/>
                 </a:solidFill>
-                <a:latin typeface="Calibri"/>
+                <a:latin typeface="Century Gothic" panose="020B0502020202020204" pitchFamily="34" charset="0"/>
               </a:rPr>
               <a:t>Forecast, alert, operate — end-to-end, not just a model</a:t>
             </a:r>
@@ -11070,7 +10908,9 @@
           <a:lstStyle/>
           <a:p>
             <a:pPr algn="ctr"/>
-            <a:endParaRPr/>
+            <a:endParaRPr>
+              <a:latin typeface="Century Gothic" panose="020B0502020202020204" pitchFamily="34" charset="0"/>
+            </a:endParaRPr>
           </a:p>
         </p:txBody>
       </p:sp>
@@ -11115,7 +10955,9 @@
           <a:lstStyle/>
           <a:p>
             <a:pPr algn="ctr"/>
-            <a:endParaRPr/>
+            <a:endParaRPr>
+              <a:latin typeface="Century Gothic" panose="020B0502020202020204" pitchFamily="34" charset="0"/>
+            </a:endParaRPr>
           </a:p>
         </p:txBody>
       </p:sp>
@@ -11128,7 +10970,7 @@
         <p:spPr>
           <a:xfrm>
             <a:off x="731520" y="2194560"/>
-            <a:ext cx="3027578" cy="457200"/>
+            <a:ext cx="3027578" cy="184666"/>
           </a:xfrm>
           <a:prstGeom prst="rect">
             <a:avLst/>
@@ -11147,7 +10989,7 @@
                 <a:solidFill>
                   <a:srgbClr val="E8B900"/>
                 </a:solidFill>
-                <a:latin typeface="Calibri"/>
+                <a:latin typeface="Century Gothic" panose="020B0502020202020204" pitchFamily="34" charset="0"/>
               </a:rPr>
               <a:t>01</a:t>
             </a:r>
@@ -11163,7 +11005,7 @@
         <p:spPr>
           <a:xfrm>
             <a:off x="731520" y="2514600"/>
-            <a:ext cx="3027578" cy="731520"/>
+            <a:ext cx="3027578" cy="430887"/>
           </a:xfrm>
           <a:prstGeom prst="rect">
             <a:avLst/>
@@ -11182,7 +11024,7 @@
                 <a:solidFill>
                   <a:srgbClr val="1A1A1A"/>
                 </a:solidFill>
-                <a:latin typeface="Calibri"/>
+                <a:latin typeface="Century Gothic" panose="020B0502020202020204" pitchFamily="34" charset="0"/>
               </a:rPr>
               <a:t>Forecast</a:t>
             </a:r>
@@ -11198,7 +11040,7 @@
         <p:spPr>
           <a:xfrm>
             <a:off x="731520" y="3520440"/>
-            <a:ext cx="3027578" cy="2011680"/>
+            <a:ext cx="3027578" cy="600164"/>
           </a:xfrm>
           <a:prstGeom prst="rect">
             <a:avLst/>
@@ -11217,7 +11059,7 @@
                 <a:solidFill>
                   <a:srgbClr val="222E3C"/>
                 </a:solidFill>
-                <a:latin typeface="Calibri"/>
+                <a:latin typeface="Century Gothic" panose="020B0502020202020204" pitchFamily="34" charset="0"/>
               </a:rPr>
               <a:t>Predict daily PM2.5 at t+1, t+3, t+7 days over Chiang Mai with leakage-free chronological validation.</a:t>
             </a:r>
@@ -11267,7 +11109,9 @@
           <a:lstStyle/>
           <a:p>
             <a:pPr algn="ctr"/>
-            <a:endParaRPr/>
+            <a:endParaRPr>
+              <a:latin typeface="Century Gothic" panose="020B0502020202020204" pitchFamily="34" charset="0"/>
+            </a:endParaRPr>
           </a:p>
         </p:txBody>
       </p:sp>
@@ -11312,7 +11156,9 @@
           <a:lstStyle/>
           <a:p>
             <a:pPr algn="ctr"/>
-            <a:endParaRPr/>
+            <a:endParaRPr>
+              <a:latin typeface="Century Gothic" panose="020B0502020202020204" pitchFamily="34" charset="0"/>
+            </a:endParaRPr>
           </a:p>
         </p:txBody>
       </p:sp>
@@ -11325,7 +11171,7 @@
         <p:spPr>
           <a:xfrm>
             <a:off x="4582058" y="2194560"/>
-            <a:ext cx="3027578" cy="457200"/>
+            <a:ext cx="3027578" cy="184666"/>
           </a:xfrm>
           <a:prstGeom prst="rect">
             <a:avLst/>
@@ -11344,7 +11190,7 @@
                 <a:solidFill>
                   <a:srgbClr val="E8B900"/>
                 </a:solidFill>
-                <a:latin typeface="Calibri"/>
+                <a:latin typeface="Century Gothic" panose="020B0502020202020204" pitchFamily="34" charset="0"/>
               </a:rPr>
               <a:t>02</a:t>
             </a:r>
@@ -11360,7 +11206,7 @@
         <p:spPr>
           <a:xfrm>
             <a:off x="4582058" y="2514600"/>
-            <a:ext cx="3027578" cy="731520"/>
+            <a:ext cx="3027578" cy="430887"/>
           </a:xfrm>
           <a:prstGeom prst="rect">
             <a:avLst/>
@@ -11379,7 +11225,7 @@
                 <a:solidFill>
                   <a:srgbClr val="1A1A1A"/>
                 </a:solidFill>
-                <a:latin typeface="Calibri"/>
+                <a:latin typeface="Century Gothic" panose="020B0502020202020204" pitchFamily="34" charset="0"/>
               </a:rPr>
               <a:t>Alert</a:t>
             </a:r>
@@ -11395,7 +11241,7 @@
         <p:spPr>
           <a:xfrm>
             <a:off x="4582058" y="3520440"/>
-            <a:ext cx="3027578" cy="2011680"/>
+            <a:ext cx="3027578" cy="800219"/>
           </a:xfrm>
           <a:prstGeom prst="rect">
             <a:avLst/>
@@ -11414,7 +11260,7 @@
                 <a:solidFill>
                   <a:srgbClr val="222E3C"/>
                 </a:solidFill>
-                <a:latin typeface="Calibri"/>
+                <a:latin typeface="Century Gothic" panose="020B0502020202020204" pitchFamily="34" charset="0"/>
               </a:rPr>
               <a:t>Classify whether each horizon will exceed 50 µg/m³ (Thai PCD alert band) with operationally useful precision/recall.</a:t>
             </a:r>
@@ -11464,7 +11310,9 @@
           <a:lstStyle/>
           <a:p>
             <a:pPr algn="ctr"/>
-            <a:endParaRPr/>
+            <a:endParaRPr>
+              <a:latin typeface="Century Gothic" panose="020B0502020202020204" pitchFamily="34" charset="0"/>
+            </a:endParaRPr>
           </a:p>
         </p:txBody>
       </p:sp>
@@ -11509,7 +11357,9 @@
           <a:lstStyle/>
           <a:p>
             <a:pPr algn="ctr"/>
-            <a:endParaRPr/>
+            <a:endParaRPr>
+              <a:latin typeface="Century Gothic" panose="020B0502020202020204" pitchFamily="34" charset="0"/>
+            </a:endParaRPr>
           </a:p>
         </p:txBody>
       </p:sp>
@@ -11522,7 +11372,7 @@
         <p:spPr>
           <a:xfrm>
             <a:off x="8432596" y="2194560"/>
-            <a:ext cx="3027578" cy="457200"/>
+            <a:ext cx="3027578" cy="184666"/>
           </a:xfrm>
           <a:prstGeom prst="rect">
             <a:avLst/>
@@ -11541,7 +11391,7 @@
                 <a:solidFill>
                   <a:srgbClr val="E8B900"/>
                 </a:solidFill>
-                <a:latin typeface="Calibri"/>
+                <a:latin typeface="Century Gothic" panose="020B0502020202020204" pitchFamily="34" charset="0"/>
               </a:rPr>
               <a:t>03</a:t>
             </a:r>
@@ -11557,7 +11407,7 @@
         <p:spPr>
           <a:xfrm>
             <a:off x="8432596" y="2514600"/>
-            <a:ext cx="3027578" cy="731520"/>
+            <a:ext cx="3027578" cy="430887"/>
           </a:xfrm>
           <a:prstGeom prst="rect">
             <a:avLst/>
@@ -11576,7 +11426,7 @@
                 <a:solidFill>
                   <a:srgbClr val="1A1A1A"/>
                 </a:solidFill>
-                <a:latin typeface="Calibri"/>
+                <a:latin typeface="Century Gothic" panose="020B0502020202020204" pitchFamily="34" charset="0"/>
               </a:rPr>
               <a:t>MLOps</a:t>
             </a:r>
@@ -11592,7 +11442,7 @@
         <p:spPr>
           <a:xfrm>
             <a:off x="8432596" y="3520440"/>
-            <a:ext cx="3027578" cy="2011680"/>
+            <a:ext cx="3027578" cy="800219"/>
           </a:xfrm>
           <a:prstGeom prst="rect">
             <a:avLst/>
@@ -11611,7 +11461,7 @@
                 <a:solidFill>
                   <a:srgbClr val="222E3C"/>
                 </a:solidFill>
-                <a:latin typeface="Calibri"/>
+                <a:latin typeface="Century Gothic" panose="020B0502020202020204" pitchFamily="34" charset="0"/>
               </a:rPr>
               <a:t>Deploy the whole stack — ingest, train, serve, monitor — with automated drift detection and champion/challenger promotion.</a:t>
             </a:r>
@@ -11627,7 +11477,7 @@
         <p:spPr>
           <a:xfrm>
             <a:off x="457200" y="5897880"/>
-            <a:ext cx="11247120" cy="457200"/>
+            <a:ext cx="11247120" cy="184666"/>
           </a:xfrm>
           <a:prstGeom prst="rect">
             <a:avLst/>
@@ -11646,7 +11496,7 @@
                 <a:solidFill>
                   <a:srgbClr val="6B6B6B"/>
                 </a:solidFill>
-                <a:latin typeface="Calibri"/>
+                <a:latin typeface="Century Gothic" panose="020B0502020202020204" pitchFamily="34" charset="0"/>
               </a:rPr>
               <a:t>Differentiator — multi-horizon forecast + fire-feature ablation + production MLOps on a low-budget EC2 footprint.</a:t>
             </a:r>
@@ -11662,7 +11512,7 @@
         <p:spPr>
           <a:xfrm>
             <a:off x="11475720" y="6510528"/>
-            <a:ext cx="640080" cy="274320"/>
+            <a:ext cx="640080" cy="138499"/>
           </a:xfrm>
           <a:prstGeom prst="rect">
             <a:avLst/>
@@ -11681,7 +11531,7 @@
                 <a:solidFill>
                   <a:srgbClr val="6B6B6B"/>
                 </a:solidFill>
-                <a:latin typeface="Calibri"/>
+                <a:latin typeface="Century Gothic" panose="020B0502020202020204" pitchFamily="34" charset="0"/>
               </a:rPr>
               <a:t>3 / 14</a:t>
             </a:r>
@@ -11754,7 +11604,9 @@
           <a:lstStyle/>
           <a:p>
             <a:pPr algn="ctr"/>
-            <a:endParaRPr/>
+            <a:endParaRPr>
+              <a:latin typeface="Century Gothic" panose="020B0502020202020204" pitchFamily="34" charset="0"/>
+            </a:endParaRPr>
           </a:p>
         </p:txBody>
       </p:sp>
@@ -11799,7 +11651,9 @@
           <a:lstStyle/>
           <a:p>
             <a:pPr algn="ctr"/>
-            <a:endParaRPr/>
+            <a:endParaRPr>
+              <a:latin typeface="Century Gothic" panose="020B0502020202020204" pitchFamily="34" charset="0"/>
+            </a:endParaRPr>
           </a:p>
         </p:txBody>
       </p:sp>
@@ -11812,7 +11666,7 @@
         <p:spPr>
           <a:xfrm>
             <a:off x="457200" y="274320"/>
-            <a:ext cx="9144000" cy="274320"/>
+            <a:ext cx="9144000" cy="153888"/>
           </a:xfrm>
           <a:prstGeom prst="rect">
             <a:avLst/>
@@ -11831,7 +11685,7 @@
                 <a:solidFill>
                   <a:srgbClr val="0F52BA"/>
                 </a:solidFill>
-                <a:latin typeface="Calibri"/>
+                <a:latin typeface="Century Gothic" panose="020B0502020202020204" pitchFamily="34" charset="0"/>
               </a:rPr>
               <a:t>SYSTEM ARCHITECTURE</a:t>
             </a:r>
@@ -11847,7 +11701,7 @@
         <p:spPr>
           <a:xfrm>
             <a:off x="457200" y="640080"/>
-            <a:ext cx="11247120" cy="731520"/>
+            <a:ext cx="11247120" cy="400110"/>
           </a:xfrm>
           <a:prstGeom prst="rect">
             <a:avLst/>
@@ -11866,7 +11720,7 @@
                 <a:solidFill>
                   <a:srgbClr val="1A1A1A"/>
                 </a:solidFill>
-                <a:latin typeface="Calibri"/>
+                <a:latin typeface="Century Gothic" panose="020B0502020202020204" pitchFamily="34" charset="0"/>
               </a:rPr>
               <a:t>One ingest path, one feature store, one serving plane</a:t>
             </a:r>
@@ -11906,7 +11760,7 @@
         <p:spPr>
           <a:xfrm>
             <a:off x="7863840" y="1463040"/>
-            <a:ext cx="3840480" cy="320040"/>
+            <a:ext cx="3840480" cy="153888"/>
           </a:xfrm>
           <a:prstGeom prst="rect">
             <a:avLst/>
@@ -11925,7 +11779,7 @@
                 <a:solidFill>
                   <a:srgbClr val="0F52BA"/>
                 </a:solidFill>
-                <a:latin typeface="Calibri"/>
+                <a:latin typeface="Century Gothic" panose="020B0502020202020204" pitchFamily="34" charset="0"/>
               </a:rPr>
               <a:t>LAYERS</a:t>
             </a:r>
@@ -11975,7 +11829,9 @@
           <a:lstStyle/>
           <a:p>
             <a:pPr algn="ctr"/>
-            <a:endParaRPr/>
+            <a:endParaRPr>
+              <a:latin typeface="Century Gothic" panose="020B0502020202020204" pitchFamily="34" charset="0"/>
+            </a:endParaRPr>
           </a:p>
         </p:txBody>
       </p:sp>
@@ -12020,7 +11876,9 @@
           <a:lstStyle/>
           <a:p>
             <a:pPr algn="ctr"/>
-            <a:endParaRPr/>
+            <a:endParaRPr>
+              <a:latin typeface="Century Gothic" panose="020B0502020202020204" pitchFamily="34" charset="0"/>
+            </a:endParaRPr>
           </a:p>
         </p:txBody>
       </p:sp>
@@ -12033,7 +11891,7 @@
         <p:spPr>
           <a:xfrm>
             <a:off x="8138160" y="1920240"/>
-            <a:ext cx="3474720" cy="320040"/>
+            <a:ext cx="3474720" cy="169277"/>
           </a:xfrm>
           <a:prstGeom prst="rect">
             <a:avLst/>
@@ -12052,7 +11910,7 @@
                 <a:solidFill>
                   <a:srgbClr val="0F52BA"/>
                 </a:solidFill>
-                <a:latin typeface="Calibri"/>
+                <a:latin typeface="Century Gothic" panose="020B0502020202020204" pitchFamily="34" charset="0"/>
               </a:rPr>
               <a:t>INGEST</a:t>
             </a:r>
@@ -12068,7 +11926,7 @@
         <p:spPr>
           <a:xfrm>
             <a:off x="8138160" y="2194560"/>
-            <a:ext cx="3474720" cy="502920"/>
+            <a:ext cx="3474720" cy="307777"/>
           </a:xfrm>
           <a:prstGeom prst="rect">
             <a:avLst/>
@@ -12087,7 +11945,7 @@
                 <a:solidFill>
                   <a:srgbClr val="222E3C"/>
                 </a:solidFill>
-                <a:latin typeface="Calibri"/>
+                <a:latin typeface="Century Gothic" panose="020B0502020202020204" pitchFamily="34" charset="0"/>
               </a:rPr>
               <a:t>3 sources → S3 raw/ (PCD Excel, Open-Meteo, NASA FIRMS)</a:t>
             </a:r>
@@ -12137,7 +11995,9 @@
           <a:lstStyle/>
           <a:p>
             <a:pPr algn="ctr"/>
-            <a:endParaRPr/>
+            <a:endParaRPr>
+              <a:latin typeface="Century Gothic" panose="020B0502020202020204" pitchFamily="34" charset="0"/>
+            </a:endParaRPr>
           </a:p>
         </p:txBody>
       </p:sp>
@@ -12182,7 +12042,9 @@
           <a:lstStyle/>
           <a:p>
             <a:pPr algn="ctr"/>
-            <a:endParaRPr/>
+            <a:endParaRPr>
+              <a:latin typeface="Century Gothic" panose="020B0502020202020204" pitchFamily="34" charset="0"/>
+            </a:endParaRPr>
           </a:p>
         </p:txBody>
       </p:sp>
@@ -12195,7 +12057,7 @@
         <p:spPr>
           <a:xfrm>
             <a:off x="8138160" y="2852928"/>
-            <a:ext cx="3474720" cy="320040"/>
+            <a:ext cx="3474720" cy="169277"/>
           </a:xfrm>
           <a:prstGeom prst="rect">
             <a:avLst/>
@@ -12214,7 +12076,7 @@
                 <a:solidFill>
                   <a:srgbClr val="0F52BA"/>
                 </a:solidFill>
-                <a:latin typeface="Calibri"/>
+                <a:latin typeface="Century Gothic" panose="020B0502020202020204" pitchFamily="34" charset="0"/>
               </a:rPr>
               <a:t>TRANSFORM</a:t>
             </a:r>
@@ -12230,7 +12092,7 @@
         <p:spPr>
           <a:xfrm>
             <a:off x="8138160" y="3127248"/>
-            <a:ext cx="3474720" cy="502920"/>
+            <a:ext cx="3474720" cy="153888"/>
           </a:xfrm>
           <a:prstGeom prst="rect">
             <a:avLst/>
@@ -12249,7 +12111,7 @@
                 <a:solidFill>
                   <a:srgbClr val="222E3C"/>
                 </a:solidFill>
-                <a:latin typeface="Calibri"/>
+                <a:latin typeface="Century Gothic" panose="020B0502020202020204" pitchFamily="34" charset="0"/>
               </a:rPr>
               <a:t>build_features.py → 45 chronological-safe features</a:t>
             </a:r>
@@ -12299,7 +12161,9 @@
           <a:lstStyle/>
           <a:p>
             <a:pPr algn="ctr"/>
-            <a:endParaRPr/>
+            <a:endParaRPr>
+              <a:latin typeface="Century Gothic" panose="020B0502020202020204" pitchFamily="34" charset="0"/>
+            </a:endParaRPr>
           </a:p>
         </p:txBody>
       </p:sp>
@@ -12344,7 +12208,9 @@
           <a:lstStyle/>
           <a:p>
             <a:pPr algn="ctr"/>
-            <a:endParaRPr/>
+            <a:endParaRPr>
+              <a:latin typeface="Century Gothic" panose="020B0502020202020204" pitchFamily="34" charset="0"/>
+            </a:endParaRPr>
           </a:p>
         </p:txBody>
       </p:sp>
@@ -12357,7 +12223,7 @@
         <p:spPr>
           <a:xfrm>
             <a:off x="8138160" y="3785616"/>
-            <a:ext cx="3474720" cy="320040"/>
+            <a:ext cx="3474720" cy="169277"/>
           </a:xfrm>
           <a:prstGeom prst="rect">
             <a:avLst/>
@@ -12376,7 +12242,7 @@
                 <a:solidFill>
                   <a:srgbClr val="0F52BA"/>
                 </a:solidFill>
-                <a:latin typeface="Calibri"/>
+                <a:latin typeface="Century Gothic" panose="020B0502020202020204" pitchFamily="34" charset="0"/>
               </a:rPr>
               <a:t>TRAIN</a:t>
             </a:r>
@@ -12392,7 +12258,7 @@
         <p:spPr>
           <a:xfrm>
             <a:off x="8138160" y="4059936"/>
-            <a:ext cx="3474720" cy="502920"/>
+            <a:ext cx="3474720" cy="153888"/>
           </a:xfrm>
           <a:prstGeom prst="rect">
             <a:avLst/>
@@ -12411,7 +12277,7 @@
                 <a:solidFill>
                   <a:srgbClr val="222E3C"/>
                 </a:solidFill>
-                <a:latin typeface="Calibri"/>
+                <a:latin typeface="Century Gothic" panose="020B0502020202020204" pitchFamily="34" charset="0"/>
               </a:rPr>
               <a:t>XGBoost + LightGBM + LSTM, tracked in MLflow</a:t>
             </a:r>
@@ -12461,7 +12327,9 @@
           <a:lstStyle/>
           <a:p>
             <a:pPr algn="ctr"/>
-            <a:endParaRPr/>
+            <a:endParaRPr>
+              <a:latin typeface="Century Gothic" panose="020B0502020202020204" pitchFamily="34" charset="0"/>
+            </a:endParaRPr>
           </a:p>
         </p:txBody>
       </p:sp>
@@ -12506,7 +12374,9 @@
           <a:lstStyle/>
           <a:p>
             <a:pPr algn="ctr"/>
-            <a:endParaRPr/>
+            <a:endParaRPr>
+              <a:latin typeface="Century Gothic" panose="020B0502020202020204" pitchFamily="34" charset="0"/>
+            </a:endParaRPr>
           </a:p>
         </p:txBody>
       </p:sp>
@@ -12519,7 +12389,7 @@
         <p:spPr>
           <a:xfrm>
             <a:off x="8138160" y="4718304"/>
-            <a:ext cx="3474720" cy="320040"/>
+            <a:ext cx="3474720" cy="169277"/>
           </a:xfrm>
           <a:prstGeom prst="rect">
             <a:avLst/>
@@ -12538,7 +12408,7 @@
                 <a:solidFill>
                   <a:srgbClr val="0F52BA"/>
                 </a:solidFill>
-                <a:latin typeface="Calibri"/>
+                <a:latin typeface="Century Gothic" panose="020B0502020202020204" pitchFamily="34" charset="0"/>
               </a:rPr>
               <a:t>SERVE</a:t>
             </a:r>
@@ -12554,7 +12424,7 @@
         <p:spPr>
           <a:xfrm>
             <a:off x="8138160" y="4992624"/>
-            <a:ext cx="3474720" cy="502920"/>
+            <a:ext cx="3474720" cy="153888"/>
           </a:xfrm>
           <a:prstGeom prst="rect">
             <a:avLst/>
@@ -12573,7 +12443,7 @@
                 <a:solidFill>
                   <a:srgbClr val="222E3C"/>
                 </a:solidFill>
-                <a:latin typeface="Calibri"/>
+                <a:latin typeface="Century Gothic" panose="020B0502020202020204" pitchFamily="34" charset="0"/>
               </a:rPr>
               <a:t>FastAPI /predict + Streamlit dashboard on EC2</a:t>
             </a:r>
@@ -12623,7 +12493,9 @@
           <a:lstStyle/>
           <a:p>
             <a:pPr algn="ctr"/>
-            <a:endParaRPr/>
+            <a:endParaRPr>
+              <a:latin typeface="Century Gothic" panose="020B0502020202020204" pitchFamily="34" charset="0"/>
+            </a:endParaRPr>
           </a:p>
         </p:txBody>
       </p:sp>
@@ -12668,7 +12540,9 @@
           <a:lstStyle/>
           <a:p>
             <a:pPr algn="ctr"/>
-            <a:endParaRPr/>
+            <a:endParaRPr>
+              <a:latin typeface="Century Gothic" panose="020B0502020202020204" pitchFamily="34" charset="0"/>
+            </a:endParaRPr>
           </a:p>
         </p:txBody>
       </p:sp>
@@ -12681,7 +12555,7 @@
         <p:spPr>
           <a:xfrm>
             <a:off x="8138160" y="5650992"/>
-            <a:ext cx="3474720" cy="320040"/>
+            <a:ext cx="3474720" cy="169277"/>
           </a:xfrm>
           <a:prstGeom prst="rect">
             <a:avLst/>
@@ -12700,7 +12574,7 @@
                 <a:solidFill>
                   <a:srgbClr val="0F52BA"/>
                 </a:solidFill>
-                <a:latin typeface="Calibri"/>
+                <a:latin typeface="Century Gothic" panose="020B0502020202020204" pitchFamily="34" charset="0"/>
               </a:rPr>
               <a:t>MONITOR</a:t>
             </a:r>
@@ -12716,7 +12590,7 @@
         <p:spPr>
           <a:xfrm>
             <a:off x="8138160" y="5925312"/>
-            <a:ext cx="3474720" cy="502920"/>
+            <a:ext cx="3474720" cy="153888"/>
           </a:xfrm>
           <a:prstGeom prst="rect">
             <a:avLst/>
@@ -12735,7 +12609,7 @@
                 <a:solidFill>
                   <a:srgbClr val="222E3C"/>
                 </a:solidFill>
-                <a:latin typeface="Calibri"/>
+                <a:latin typeface="Century Gothic" panose="020B0502020202020204" pitchFamily="34" charset="0"/>
               </a:rPr>
               <a:t>Evidently PSI/KS drift + auto-retrain trigger</a:t>
             </a:r>
@@ -12751,7 +12625,7 @@
         <p:spPr>
           <a:xfrm>
             <a:off x="457200" y="6510528"/>
-            <a:ext cx="11247120" cy="274320"/>
+            <a:ext cx="11247120" cy="138499"/>
           </a:xfrm>
           <a:prstGeom prst="rect">
             <a:avLst/>
@@ -12770,7 +12644,7 @@
                 <a:solidFill>
                   <a:srgbClr val="6B6B6B"/>
                 </a:solidFill>
-                <a:latin typeface="Calibri"/>
+                <a:latin typeface="Century Gothic" panose="020B0502020202020204" pitchFamily="34" charset="0"/>
               </a:rPr>
               <a:t>Infra: AWS S3 + EC2 t3.micro + Terraform IaC</a:t>
             </a:r>
@@ -12786,7 +12660,7 @@
         <p:spPr>
           <a:xfrm>
             <a:off x="11475720" y="6510528"/>
-            <a:ext cx="640080" cy="274320"/>
+            <a:ext cx="640080" cy="138499"/>
           </a:xfrm>
           <a:prstGeom prst="rect">
             <a:avLst/>
@@ -12805,7 +12679,7 @@
                 <a:solidFill>
                   <a:srgbClr val="6B6B6B"/>
                 </a:solidFill>
-                <a:latin typeface="Calibri"/>
+                <a:latin typeface="Century Gothic" panose="020B0502020202020204" pitchFamily="34" charset="0"/>
               </a:rPr>
               <a:t>4 / 14</a:t>
             </a:r>
@@ -12878,7 +12752,9 @@
           <a:lstStyle/>
           <a:p>
             <a:pPr algn="ctr"/>
-            <a:endParaRPr/>
+            <a:endParaRPr>
+              <a:latin typeface="Century Gothic" panose="020B0502020202020204" pitchFamily="34" charset="0"/>
+            </a:endParaRPr>
           </a:p>
         </p:txBody>
       </p:sp>
@@ -12923,7 +12799,9 @@
           <a:lstStyle/>
           <a:p>
             <a:pPr algn="ctr"/>
-            <a:endParaRPr/>
+            <a:endParaRPr>
+              <a:latin typeface="Century Gothic" panose="020B0502020202020204" pitchFamily="34" charset="0"/>
+            </a:endParaRPr>
           </a:p>
         </p:txBody>
       </p:sp>
@@ -12936,7 +12814,7 @@
         <p:spPr>
           <a:xfrm>
             <a:off x="457200" y="274320"/>
-            <a:ext cx="9144000" cy="274320"/>
+            <a:ext cx="9144000" cy="153888"/>
           </a:xfrm>
           <a:prstGeom prst="rect">
             <a:avLst/>
@@ -12955,7 +12833,7 @@
                 <a:solidFill>
                   <a:srgbClr val="0F52BA"/>
                 </a:solidFill>
-                <a:latin typeface="Calibri"/>
+                <a:latin typeface="Century Gothic" panose="020B0502020202020204" pitchFamily="34" charset="0"/>
               </a:rPr>
               <a:t>DATA PIPELINE</a:t>
             </a:r>
@@ -12971,7 +12849,7 @@
         <p:spPr>
           <a:xfrm>
             <a:off x="457200" y="640080"/>
-            <a:ext cx="11247120" cy="731520"/>
+            <a:ext cx="11247120" cy="400110"/>
           </a:xfrm>
           <a:prstGeom prst="rect">
             <a:avLst/>
@@ -12990,7 +12868,7 @@
                 <a:solidFill>
                   <a:srgbClr val="1A1A1A"/>
                 </a:solidFill>
-                <a:latin typeface="Calibri"/>
+                <a:latin typeface="Century Gothic" panose="020B0502020202020204" pitchFamily="34" charset="0"/>
               </a:rPr>
               <a:t>Three heterogeneous sources → one 45-feature store</a:t>
             </a:r>
@@ -13006,7 +12884,7 @@
         <p:spPr>
           <a:xfrm>
             <a:off x="457200" y="1371600"/>
-            <a:ext cx="11247120" cy="365760"/>
+            <a:ext cx="11247120" cy="184666"/>
           </a:xfrm>
           <a:prstGeom prst="rect">
             <a:avLst/>
@@ -13025,7 +12903,7 @@
                 <a:solidFill>
                   <a:srgbClr val="6B6B6B"/>
                 </a:solidFill>
-                <a:latin typeface="Calibri"/>
+                <a:latin typeface="Century Gothic" panose="020B0502020202020204" pitchFamily="34" charset="0"/>
               </a:rPr>
               <a:t>Daily cron pulls fresh data; build_features.py produces the training-identical feature vector for inference.</a:t>
             </a:r>
@@ -13075,7 +12953,9 @@
           <a:lstStyle/>
           <a:p>
             <a:pPr algn="ctr"/>
-            <a:endParaRPr/>
+            <a:endParaRPr>
+              <a:latin typeface="Century Gothic" panose="020B0502020202020204" pitchFamily="34" charset="0"/>
+            </a:endParaRPr>
           </a:p>
         </p:txBody>
       </p:sp>
@@ -13120,7 +13000,9 @@
           <a:lstStyle/>
           <a:p>
             <a:pPr algn="ctr"/>
-            <a:endParaRPr/>
+            <a:endParaRPr>
+              <a:latin typeface="Century Gothic" panose="020B0502020202020204" pitchFamily="34" charset="0"/>
+            </a:endParaRPr>
           </a:p>
         </p:txBody>
       </p:sp>
@@ -13133,7 +13015,7 @@
         <p:spPr>
           <a:xfrm>
             <a:off x="685800" y="2011680"/>
-            <a:ext cx="3119018" cy="320040"/>
+            <a:ext cx="3119018" cy="200055"/>
           </a:xfrm>
           <a:prstGeom prst="rect">
             <a:avLst/>
@@ -13152,7 +13034,7 @@
                 <a:solidFill>
                   <a:srgbClr val="FFFFFF"/>
                 </a:solidFill>
-                <a:latin typeface="Calibri"/>
+                <a:latin typeface="Century Gothic" panose="020B0502020202020204" pitchFamily="34" charset="0"/>
               </a:rPr>
               <a:t>01  INGEST</a:t>
             </a:r>
@@ -13168,7 +13050,7 @@
         <p:spPr>
           <a:xfrm>
             <a:off x="685800" y="2606040"/>
-            <a:ext cx="3119018" cy="3383280"/>
+            <a:ext cx="3119018" cy="1231106"/>
           </a:xfrm>
           <a:prstGeom prst="rect">
             <a:avLst/>
@@ -13191,7 +13073,7 @@
                 <a:solidFill>
                   <a:srgbClr val="0F52BA"/>
                 </a:solidFill>
-                <a:latin typeface="Calibri"/>
+                <a:latin typeface="Century Gothic" panose="020B0502020202020204" pitchFamily="34" charset="0"/>
               </a:rPr>
               <a:t>•  </a:t>
             </a:r>
@@ -13200,7 +13082,7 @@
                 <a:solidFill>
                   <a:srgbClr val="222E3C"/>
                 </a:solidFill>
-                <a:latin typeface="Calibri"/>
+                <a:latin typeface="Century Gothic" panose="020B0502020202020204" pitchFamily="34" charset="0"/>
               </a:rPr>
               <a:t>Thai PCD PM2.5 — Excel archives (2011 → now)</a:t>
             </a:r>
@@ -13216,7 +13098,7 @@
                 <a:solidFill>
                   <a:srgbClr val="0F52BA"/>
                 </a:solidFill>
-                <a:latin typeface="Calibri"/>
+                <a:latin typeface="Century Gothic" panose="020B0502020202020204" pitchFamily="34" charset="0"/>
               </a:rPr>
               <a:t>•  </a:t>
             </a:r>
@@ -13225,7 +13107,7 @@
                 <a:solidFill>
                   <a:srgbClr val="222E3C"/>
                 </a:solidFill>
-                <a:latin typeface="Calibri"/>
+                <a:latin typeface="Century Gothic" panose="020B0502020202020204" pitchFamily="34" charset="0"/>
               </a:rPr>
               <a:t>Open-Meteo — hourly weather JSON API</a:t>
             </a:r>
@@ -13241,7 +13123,7 @@
                 <a:solidFill>
                   <a:srgbClr val="0F52BA"/>
                 </a:solidFill>
-                <a:latin typeface="Calibri"/>
+                <a:latin typeface="Century Gothic" panose="020B0502020202020204" pitchFamily="34" charset="0"/>
               </a:rPr>
               <a:t>•  </a:t>
             </a:r>
@@ -13250,7 +13132,7 @@
                 <a:solidFill>
                   <a:srgbClr val="222E3C"/>
                 </a:solidFill>
-                <a:latin typeface="Calibri"/>
+                <a:latin typeface="Century Gothic" panose="020B0502020202020204" pitchFamily="34" charset="0"/>
               </a:rPr>
               <a:t>NASA FIRMS — daily fire hotspots (MAP_KEY)</a:t>
             </a:r>
@@ -13266,7 +13148,7 @@
                 <a:solidFill>
                   <a:srgbClr val="0F52BA"/>
                 </a:solidFill>
-                <a:latin typeface="Calibri"/>
+                <a:latin typeface="Century Gothic" panose="020B0502020202020204" pitchFamily="34" charset="0"/>
               </a:rPr>
               <a:t>•  </a:t>
             </a:r>
@@ -13275,7 +13157,7 @@
                 <a:solidFill>
                   <a:srgbClr val="222E3C"/>
                 </a:solidFill>
-                <a:latin typeface="Calibri"/>
+                <a:latin typeface="Century Gothic" panose="020B0502020202020204" pitchFamily="34" charset="0"/>
               </a:rPr>
               <a:t>S3 tiered: raw/ → processed/ → models/</a:t>
             </a:r>
@@ -13325,7 +13207,9 @@
           <a:lstStyle/>
           <a:p>
             <a:pPr algn="ctr"/>
-            <a:endParaRPr/>
+            <a:endParaRPr>
+              <a:latin typeface="Century Gothic" panose="020B0502020202020204" pitchFamily="34" charset="0"/>
+            </a:endParaRPr>
           </a:p>
         </p:txBody>
       </p:sp>
@@ -13370,7 +13254,9 @@
           <a:lstStyle/>
           <a:p>
             <a:pPr algn="ctr"/>
-            <a:endParaRPr/>
+            <a:endParaRPr>
+              <a:latin typeface="Century Gothic" panose="020B0502020202020204" pitchFamily="34" charset="0"/>
+            </a:endParaRPr>
           </a:p>
         </p:txBody>
       </p:sp>
@@ -13383,7 +13269,7 @@
         <p:spPr>
           <a:xfrm>
             <a:off x="4536338" y="2011680"/>
-            <a:ext cx="3119018" cy="320040"/>
+            <a:ext cx="3119018" cy="200055"/>
           </a:xfrm>
           <a:prstGeom prst="rect">
             <a:avLst/>
@@ -13402,7 +13288,7 @@
                 <a:solidFill>
                   <a:srgbClr val="FFFFFF"/>
                 </a:solidFill>
-                <a:latin typeface="Calibri"/>
+                <a:latin typeface="Century Gothic" panose="020B0502020202020204" pitchFamily="34" charset="0"/>
               </a:rPr>
               <a:t>02  TRANSFORM</a:t>
             </a:r>
@@ -13418,7 +13304,7 @@
         <p:spPr>
           <a:xfrm>
             <a:off x="4536338" y="2606040"/>
-            <a:ext cx="3119018" cy="3383280"/>
+            <a:ext cx="3119018" cy="1061829"/>
           </a:xfrm>
           <a:prstGeom prst="rect">
             <a:avLst/>
@@ -13441,7 +13327,7 @@
                 <a:solidFill>
                   <a:srgbClr val="0F52BA"/>
                 </a:solidFill>
-                <a:latin typeface="Calibri"/>
+                <a:latin typeface="Century Gothic" panose="020B0502020202020204" pitchFamily="34" charset="0"/>
               </a:rPr>
               <a:t>•  </a:t>
             </a:r>
@@ -13450,7 +13336,7 @@
                 <a:solidFill>
                   <a:srgbClr val="222E3C"/>
                 </a:solidFill>
-                <a:latin typeface="Calibri"/>
+                <a:latin typeface="Century Gothic" panose="020B0502020202020204" pitchFamily="34" charset="0"/>
               </a:rPr>
               <a:t>build_features.py — single source of truth</a:t>
             </a:r>
@@ -13466,7 +13352,7 @@
                 <a:solidFill>
                   <a:srgbClr val="0F52BA"/>
                 </a:solidFill>
-                <a:latin typeface="Calibri"/>
+                <a:latin typeface="Century Gothic" panose="020B0502020202020204" pitchFamily="34" charset="0"/>
               </a:rPr>
               <a:t>•  </a:t>
             </a:r>
@@ -13475,7 +13361,7 @@
                 <a:solidFill>
                   <a:srgbClr val="222E3C"/>
                 </a:solidFill>
-                <a:latin typeface="Calibri"/>
+                <a:latin typeface="Century Gothic" panose="020B0502020202020204" pitchFamily="34" charset="0"/>
               </a:rPr>
               <a:t>Lag features: pm25_lag{1,3,7}</a:t>
             </a:r>
@@ -13491,7 +13377,7 @@
                 <a:solidFill>
                   <a:srgbClr val="0F52BA"/>
                 </a:solidFill>
-                <a:latin typeface="Calibri"/>
+                <a:latin typeface="Century Gothic" panose="020B0502020202020204" pitchFamily="34" charset="0"/>
               </a:rPr>
               <a:t>•  </a:t>
             </a:r>
@@ -13500,7 +13386,7 @@
                 <a:solidFill>
                   <a:srgbClr val="222E3C"/>
                 </a:solidFill>
-                <a:latin typeface="Calibri"/>
+                <a:latin typeface="Century Gothic" panose="020B0502020202020204" pitchFamily="34" charset="0"/>
               </a:rPr>
               <a:t>Rolling windows: 3d / 7d / 14d aggregates</a:t>
             </a:r>
@@ -13516,7 +13402,7 @@
                 <a:solidFill>
                   <a:srgbClr val="0F52BA"/>
                 </a:solidFill>
-                <a:latin typeface="Calibri"/>
+                <a:latin typeface="Century Gothic" panose="020B0502020202020204" pitchFamily="34" charset="0"/>
               </a:rPr>
               <a:t>•  </a:t>
             </a:r>
@@ -13525,7 +13411,7 @@
                 <a:solidFill>
                   <a:srgbClr val="222E3C"/>
                 </a:solidFill>
-                <a:latin typeface="Calibri"/>
+                <a:latin typeface="Century Gothic" panose="020B0502020202020204" pitchFamily="34" charset="0"/>
               </a:rPr>
               <a:t>Burn-load: firms_24h_count, brightness_max</a:t>
             </a:r>
@@ -13575,7 +13461,9 @@
           <a:lstStyle/>
           <a:p>
             <a:pPr algn="ctr"/>
-            <a:endParaRPr/>
+            <a:endParaRPr>
+              <a:latin typeface="Century Gothic" panose="020B0502020202020204" pitchFamily="34" charset="0"/>
+            </a:endParaRPr>
           </a:p>
         </p:txBody>
       </p:sp>
@@ -13620,7 +13508,9 @@
           <a:lstStyle/>
           <a:p>
             <a:pPr algn="ctr"/>
-            <a:endParaRPr/>
+            <a:endParaRPr>
+              <a:latin typeface="Century Gothic" panose="020B0502020202020204" pitchFamily="34" charset="0"/>
+            </a:endParaRPr>
           </a:p>
         </p:txBody>
       </p:sp>
@@ -13633,7 +13523,7 @@
         <p:spPr>
           <a:xfrm>
             <a:off x="8386876" y="2011680"/>
-            <a:ext cx="3119018" cy="320040"/>
+            <a:ext cx="3119018" cy="200055"/>
           </a:xfrm>
           <a:prstGeom prst="rect">
             <a:avLst/>
@@ -13652,7 +13542,7 @@
                 <a:solidFill>
                   <a:srgbClr val="FFFFFF"/>
                 </a:solidFill>
-                <a:latin typeface="Calibri"/>
+                <a:latin typeface="Century Gothic" panose="020B0502020202020204" pitchFamily="34" charset="0"/>
               </a:rPr>
               <a:t>03  SERVE</a:t>
             </a:r>
@@ -13668,7 +13558,7 @@
         <p:spPr>
           <a:xfrm>
             <a:off x="8386876" y="2606040"/>
-            <a:ext cx="3119018" cy="3383280"/>
+            <a:ext cx="3119018" cy="1400383"/>
           </a:xfrm>
           <a:prstGeom prst="rect">
             <a:avLst/>
@@ -13691,7 +13581,7 @@
                 <a:solidFill>
                   <a:srgbClr val="0F52BA"/>
                 </a:solidFill>
-                <a:latin typeface="Calibri"/>
+                <a:latin typeface="Century Gothic" panose="020B0502020202020204" pitchFamily="34" charset="0"/>
               </a:rPr>
               <a:t>•  </a:t>
             </a:r>
@@ -13700,7 +13590,7 @@
                 <a:solidFill>
                   <a:srgbClr val="222E3C"/>
                 </a:solidFill>
-                <a:latin typeface="Calibri"/>
+                <a:latin typeface="Century Gothic" panose="020B0502020202020204" pitchFamily="34" charset="0"/>
               </a:rPr>
               <a:t>features.csv (45 cols) → XGBoost / LightGBM / LSTM</a:t>
             </a:r>
@@ -13716,7 +13606,7 @@
                 <a:solidFill>
                   <a:srgbClr val="0F52BA"/>
                 </a:solidFill>
-                <a:latin typeface="Calibri"/>
+                <a:latin typeface="Century Gothic" panose="020B0502020202020204" pitchFamily="34" charset="0"/>
               </a:rPr>
               <a:t>•  </a:t>
             </a:r>
@@ -13725,7 +13615,7 @@
                 <a:solidFill>
                   <a:srgbClr val="222E3C"/>
                 </a:solidFill>
-                <a:latin typeface="Calibri"/>
+                <a:latin typeface="Century Gothic" panose="020B0502020202020204" pitchFamily="34" charset="0"/>
               </a:rPr>
               <a:t>FastAPI /predict returns t+1/3/7 in one call</a:t>
             </a:r>
@@ -13741,7 +13631,7 @@
                 <a:solidFill>
                   <a:srgbClr val="0F52BA"/>
                 </a:solidFill>
-                <a:latin typeface="Calibri"/>
+                <a:latin typeface="Century Gothic" panose="020B0502020202020204" pitchFamily="34" charset="0"/>
               </a:rPr>
               <a:t>•  </a:t>
             </a:r>
@@ -13750,7 +13640,7 @@
                 <a:solidFill>
                   <a:srgbClr val="222E3C"/>
                 </a:solidFill>
-                <a:latin typeface="Calibri"/>
+                <a:latin typeface="Century Gothic" panose="020B0502020202020204" pitchFamily="34" charset="0"/>
               </a:rPr>
               <a:t>Alert decision via Scenario C PR thresholds</a:t>
             </a:r>
@@ -13766,7 +13656,7 @@
                 <a:solidFill>
                   <a:srgbClr val="0F52BA"/>
                 </a:solidFill>
-                <a:latin typeface="Calibri"/>
+                <a:latin typeface="Century Gothic" panose="020B0502020202020204" pitchFamily="34" charset="0"/>
               </a:rPr>
               <a:t>•  </a:t>
             </a:r>
@@ -13775,7 +13665,7 @@
                 <a:solidFill>
                   <a:srgbClr val="222E3C"/>
                 </a:solidFill>
-                <a:latin typeface="Calibri"/>
+                <a:latin typeface="Century Gothic" panose="020B0502020202020204" pitchFamily="34" charset="0"/>
               </a:rPr>
               <a:t>Champion auto-promoted on ≥5 % MAE improvement</a:t>
             </a:r>
@@ -13791,7 +13681,7 @@
         <p:spPr>
           <a:xfrm>
             <a:off x="457200" y="6510528"/>
-            <a:ext cx="11247120" cy="274320"/>
+            <a:ext cx="11247120" cy="138499"/>
           </a:xfrm>
           <a:prstGeom prst="rect">
             <a:avLst/>
@@ -13810,7 +13700,7 @@
                 <a:solidFill>
                   <a:srgbClr val="6B6B6B"/>
                 </a:solidFill>
-                <a:latin typeface="Calibri"/>
+                <a:latin typeface="Century Gothic" panose="020B0502020202020204" pitchFamily="34" charset="0"/>
               </a:rPr>
               <a:t>Features: 03_Data/processed/features.csv  ·  build script: 04_Scripts/build_features.py</a:t>
             </a:r>
@@ -13826,7 +13716,7 @@
         <p:spPr>
           <a:xfrm>
             <a:off x="11475720" y="6510528"/>
-            <a:ext cx="640080" cy="274320"/>
+            <a:ext cx="640080" cy="138499"/>
           </a:xfrm>
           <a:prstGeom prst="rect">
             <a:avLst/>
@@ -13845,7 +13735,7 @@
                 <a:solidFill>
                   <a:srgbClr val="6B6B6B"/>
                 </a:solidFill>
-                <a:latin typeface="Calibri"/>
+                <a:latin typeface="Century Gothic" panose="020B0502020202020204" pitchFamily="34" charset="0"/>
               </a:rPr>
               <a:t>5 / 14</a:t>
             </a:r>
@@ -13918,7 +13808,9 @@
           <a:lstStyle/>
           <a:p>
             <a:pPr algn="ctr"/>
-            <a:endParaRPr/>
+            <a:endParaRPr>
+              <a:latin typeface="Century Gothic" panose="020B0502020202020204" pitchFamily="34" charset="0"/>
+            </a:endParaRPr>
           </a:p>
         </p:txBody>
       </p:sp>
@@ -13963,7 +13855,9 @@
           <a:lstStyle/>
           <a:p>
             <a:pPr algn="ctr"/>
-            <a:endParaRPr/>
+            <a:endParaRPr>
+              <a:latin typeface="Century Gothic" panose="020B0502020202020204" pitchFamily="34" charset="0"/>
+            </a:endParaRPr>
           </a:p>
         </p:txBody>
       </p:sp>
@@ -13976,7 +13870,7 @@
         <p:spPr>
           <a:xfrm>
             <a:off x="457200" y="274320"/>
-            <a:ext cx="9144000" cy="274320"/>
+            <a:ext cx="9144000" cy="153888"/>
           </a:xfrm>
           <a:prstGeom prst="rect">
             <a:avLst/>
@@ -13995,7 +13889,7 @@
                 <a:solidFill>
                   <a:srgbClr val="0F52BA"/>
                 </a:solidFill>
-                <a:latin typeface="Calibri"/>
+                <a:latin typeface="Century Gothic" panose="020B0502020202020204" pitchFamily="34" charset="0"/>
               </a:rPr>
               <a:t>FEATURE ENGINEERING</a:t>
             </a:r>
@@ -14011,7 +13905,7 @@
         <p:spPr>
           <a:xfrm>
             <a:off x="457200" y="640080"/>
-            <a:ext cx="11247120" cy="731520"/>
+            <a:ext cx="11247120" cy="400110"/>
           </a:xfrm>
           <a:prstGeom prst="rect">
             <a:avLst/>
@@ -14030,7 +13924,7 @@
                 <a:solidFill>
                   <a:srgbClr val="1A1A1A"/>
                 </a:solidFill>
-                <a:latin typeface="Calibri"/>
+                <a:latin typeface="Century Gothic" panose="020B0502020202020204" pitchFamily="34" charset="0"/>
               </a:rPr>
               <a:t>Signal shifts from autocorrelation to weather as horizon grows</a:t>
             </a:r>
@@ -14070,7 +13964,7 @@
         <p:spPr>
           <a:xfrm>
             <a:off x="7315200" y="1463040"/>
-            <a:ext cx="4389120" cy="320040"/>
+            <a:ext cx="4389120" cy="153888"/>
           </a:xfrm>
           <a:prstGeom prst="rect">
             <a:avLst/>
@@ -14089,7 +13983,7 @@
                 <a:solidFill>
                   <a:srgbClr val="0F52BA"/>
                 </a:solidFill>
-                <a:latin typeface="Calibri"/>
+                <a:latin typeface="Century Gothic" panose="020B0502020202020204" pitchFamily="34" charset="0"/>
               </a:rPr>
               <a:t>DOMINANT DRIVERS BY HORIZON</a:t>
             </a:r>
@@ -14139,7 +14033,9 @@
           <a:lstStyle/>
           <a:p>
             <a:pPr algn="ctr"/>
-            <a:endParaRPr/>
+            <a:endParaRPr>
+              <a:latin typeface="Century Gothic" panose="020B0502020202020204" pitchFamily="34" charset="0"/>
+            </a:endParaRPr>
           </a:p>
         </p:txBody>
       </p:sp>
@@ -14152,7 +14048,7 @@
         <p:spPr>
           <a:xfrm>
             <a:off x="7543800" y="1938528"/>
-            <a:ext cx="4389120" cy="365760"/>
+            <a:ext cx="4389120" cy="169277"/>
           </a:xfrm>
           <a:prstGeom prst="rect">
             <a:avLst/>
@@ -14171,7 +14067,7 @@
                 <a:solidFill>
                   <a:srgbClr val="0F52BA"/>
                 </a:solidFill>
-                <a:latin typeface="Calibri"/>
+                <a:latin typeface="Century Gothic" panose="020B0502020202020204" pitchFamily="34" charset="0"/>
               </a:rPr>
               <a:t>T+1 DAY</a:t>
             </a:r>
@@ -14187,7 +14083,7 @@
         <p:spPr>
           <a:xfrm>
             <a:off x="7543800" y="2267712"/>
-            <a:ext cx="4023360" cy="548640"/>
+            <a:ext cx="4023360" cy="338554"/>
           </a:xfrm>
           <a:prstGeom prst="rect">
             <a:avLst/>
@@ -14206,7 +14102,7 @@
                 <a:solidFill>
                   <a:srgbClr val="222E3C"/>
                 </a:solidFill>
-                <a:latin typeface="Calibri"/>
+                <a:latin typeface="Century Gothic" panose="020B0502020202020204" pitchFamily="34" charset="0"/>
               </a:rPr>
               <a:t>pm25_lag1, pm25_roll3_mean — same-day autocorrelation.</a:t>
             </a:r>
@@ -14256,7 +14152,9 @@
           <a:lstStyle/>
           <a:p>
             <a:pPr algn="ctr"/>
-            <a:endParaRPr/>
+            <a:endParaRPr>
+              <a:latin typeface="Century Gothic" panose="020B0502020202020204" pitchFamily="34" charset="0"/>
+            </a:endParaRPr>
           </a:p>
         </p:txBody>
       </p:sp>
@@ -14269,7 +14167,7 @@
         <p:spPr>
           <a:xfrm>
             <a:off x="7543800" y="3035808"/>
-            <a:ext cx="4389120" cy="365760"/>
+            <a:ext cx="4389120" cy="169277"/>
           </a:xfrm>
           <a:prstGeom prst="rect">
             <a:avLst/>
@@ -14288,7 +14186,7 @@
                 <a:solidFill>
                   <a:srgbClr val="0F52BA"/>
                 </a:solidFill>
-                <a:latin typeface="Calibri"/>
+                <a:latin typeface="Century Gothic" panose="020B0502020202020204" pitchFamily="34" charset="0"/>
               </a:rPr>
               <a:t>T+3 DAYS</a:t>
             </a:r>
@@ -14304,7 +14202,7 @@
         <p:spPr>
           <a:xfrm>
             <a:off x="7543800" y="3364992"/>
-            <a:ext cx="4023360" cy="548640"/>
+            <a:ext cx="4023360" cy="338554"/>
           </a:xfrm>
           <a:prstGeom prst="rect">
             <a:avLst/>
@@ -14323,7 +14221,7 @@
                 <a:solidFill>
                   <a:srgbClr val="222E3C"/>
                 </a:solidFill>
-                <a:latin typeface="Calibri"/>
+                <a:latin typeface="Century Gothic" panose="020B0502020202020204" pitchFamily="34" charset="0"/>
               </a:rPr>
               <a:t>firms_24h_count, brightness_max — burn-load climbs into top 5.</a:t>
             </a:r>
@@ -14373,7 +14271,9 @@
           <a:lstStyle/>
           <a:p>
             <a:pPr algn="ctr"/>
-            <a:endParaRPr/>
+            <a:endParaRPr>
+              <a:latin typeface="Century Gothic" panose="020B0502020202020204" pitchFamily="34" charset="0"/>
+            </a:endParaRPr>
           </a:p>
         </p:txBody>
       </p:sp>
@@ -14386,7 +14286,7 @@
         <p:spPr>
           <a:xfrm>
             <a:off x="7543800" y="4133088"/>
-            <a:ext cx="4389120" cy="365760"/>
+            <a:ext cx="4389120" cy="169277"/>
           </a:xfrm>
           <a:prstGeom prst="rect">
             <a:avLst/>
@@ -14405,7 +14305,7 @@
                 <a:solidFill>
                   <a:srgbClr val="0F52BA"/>
                 </a:solidFill>
-                <a:latin typeface="Calibri"/>
+                <a:latin typeface="Century Gothic" panose="020B0502020202020204" pitchFamily="34" charset="0"/>
               </a:rPr>
               <a:t>T+7 DAYS</a:t>
             </a:r>
@@ -14421,7 +14321,7 @@
         <p:spPr>
           <a:xfrm>
             <a:off x="7543800" y="4462272"/>
-            <a:ext cx="4023360" cy="548640"/>
+            <a:ext cx="4023360" cy="338554"/>
           </a:xfrm>
           <a:prstGeom prst="rect">
             <a:avLst/>
@@ -14440,7 +14340,7 @@
                 <a:solidFill>
                   <a:srgbClr val="222E3C"/>
                 </a:solidFill>
-                <a:latin typeface="Calibri"/>
+                <a:latin typeface="Century Gothic" panose="020B0502020202020204" pitchFamily="34" charset="0"/>
               </a:rPr>
               <a:t>wind_speed_7d, temperature_7d — atmospheric regime dominates.</a:t>
             </a:r>
@@ -14456,7 +14356,7 @@
         <p:spPr>
           <a:xfrm>
             <a:off x="7315200" y="5577840"/>
-            <a:ext cx="4389120" cy="640080"/>
+            <a:ext cx="4389120" cy="338554"/>
           </a:xfrm>
           <a:prstGeom prst="rect">
             <a:avLst/>
@@ -14475,7 +14375,7 @@
                 <a:solidFill>
                   <a:srgbClr val="6B6B6B"/>
                 </a:solidFill>
-                <a:latin typeface="Calibri"/>
+                <a:latin typeface="Century Gothic" panose="020B0502020202020204" pitchFamily="34" charset="0"/>
               </a:rPr>
               <a:t>Mirrors atmospheric physics — PM2.5 transport and boundary-layer evolution.</a:t>
             </a:r>
@@ -14491,7 +14391,7 @@
         <p:spPr>
           <a:xfrm>
             <a:off x="457200" y="6510528"/>
-            <a:ext cx="11247120" cy="274320"/>
+            <a:ext cx="11247120" cy="138499"/>
           </a:xfrm>
           <a:prstGeom prst="rect">
             <a:avLst/>
@@ -14510,7 +14410,7 @@
                 <a:solidFill>
                   <a:srgbClr val="6B6B6B"/>
                 </a:solidFill>
-                <a:latin typeface="Calibri"/>
+                <a:latin typeface="Century Gothic" panose="020B0502020202020204" pitchFamily="34" charset="0"/>
               </a:rPr>
               <a:t>SHAP values: 03_Data/results/shap_summary.json</a:t>
             </a:r>
@@ -14526,7 +14426,7 @@
         <p:spPr>
           <a:xfrm>
             <a:off x="11475720" y="6510528"/>
-            <a:ext cx="640080" cy="274320"/>
+            <a:ext cx="640080" cy="138499"/>
           </a:xfrm>
           <a:prstGeom prst="rect">
             <a:avLst/>
@@ -14545,7 +14445,7 @@
                 <a:solidFill>
                   <a:srgbClr val="6B6B6B"/>
                 </a:solidFill>
-                <a:latin typeface="Calibri"/>
+                <a:latin typeface="Century Gothic" panose="020B0502020202020204" pitchFamily="34" charset="0"/>
               </a:rPr>
               <a:t>6 / 14</a:t>
             </a:r>
@@ -14618,7 +14518,9 @@
           <a:lstStyle/>
           <a:p>
             <a:pPr algn="ctr"/>
-            <a:endParaRPr/>
+            <a:endParaRPr>
+              <a:latin typeface=""/>
+            </a:endParaRPr>
           </a:p>
         </p:txBody>
       </p:sp>
@@ -14663,7 +14565,9 @@
           <a:lstStyle/>
           <a:p>
             <a:pPr algn="ctr"/>
-            <a:endParaRPr/>
+            <a:endParaRPr>
+              <a:latin typeface=""/>
+            </a:endParaRPr>
           </a:p>
         </p:txBody>
       </p:sp>
@@ -14676,7 +14580,7 @@
         <p:spPr>
           <a:xfrm>
             <a:off x="457200" y="274320"/>
-            <a:ext cx="9144000" cy="274320"/>
+            <a:ext cx="9144000" cy="153888"/>
           </a:xfrm>
           <a:prstGeom prst="rect">
             <a:avLst/>
@@ -14695,7 +14599,7 @@
                 <a:solidFill>
                   <a:srgbClr val="0F52BA"/>
                 </a:solidFill>
-                <a:latin typeface="Calibri"/>
+                <a:latin typeface=""/>
               </a:rPr>
               <a:t>MODELS COMPARED</a:t>
             </a:r>
@@ -14730,7 +14634,7 @@
                 <a:solidFill>
                   <a:srgbClr val="1A1A1A"/>
                 </a:solidFill>
-                <a:latin typeface="Calibri"/>
+                <a:latin typeface=""/>
               </a:rPr>
               <a:t>LightGBM is champion — lower MAE than XGBoost and LSTM at every horizon</a:t>
             </a:r>
@@ -14778,7 +14682,9 @@
           <a:lstStyle/>
           <a:p>
             <a:pPr algn="ctr"/>
-            <a:endParaRPr/>
+            <a:endParaRPr>
+              <a:latin typeface=""/>
+            </a:endParaRPr>
           </a:p>
         </p:txBody>
       </p:sp>
@@ -14791,7 +14697,7 @@
         <p:spPr>
           <a:xfrm>
             <a:off x="640080" y="1673352"/>
-            <a:ext cx="5303520" cy="274320"/>
+            <a:ext cx="5303520" cy="184666"/>
           </a:xfrm>
           <a:prstGeom prst="rect">
             <a:avLst/>
@@ -14810,7 +14716,7 @@
                 <a:solidFill>
                   <a:srgbClr val="FFFFFF"/>
                 </a:solidFill>
-                <a:latin typeface="Calibri"/>
+                <a:latin typeface=""/>
               </a:rPr>
               <a:t>CHAMPION · LIGHTGBM (45 features)</a:t>
             </a:r>
@@ -14860,7 +14766,9 @@
           <a:lstStyle/>
           <a:p>
             <a:pPr algn="ctr"/>
-            <a:endParaRPr/>
+            <a:endParaRPr>
+              <a:latin typeface=""/>
+            </a:endParaRPr>
           </a:p>
         </p:txBody>
       </p:sp>
@@ -14873,7 +14781,7 @@
         <p:spPr>
           <a:xfrm>
             <a:off x="685800" y="2212848"/>
-            <a:ext cx="1645920" cy="274320"/>
+            <a:ext cx="1645920" cy="169277"/>
           </a:xfrm>
           <a:prstGeom prst="rect">
             <a:avLst/>
@@ -14892,7 +14800,7 @@
                 <a:solidFill>
                   <a:srgbClr val="6B6B6B"/>
                 </a:solidFill>
-                <a:latin typeface="Calibri"/>
+                <a:latin typeface=""/>
               </a:rPr>
               <a:t>MAE t+1</a:t>
             </a:r>
@@ -14908,7 +14816,7 @@
         <p:spPr>
           <a:xfrm>
             <a:off x="685800" y="2459736"/>
-            <a:ext cx="1371600" cy="868680"/>
+            <a:ext cx="1371600" cy="615553"/>
           </a:xfrm>
           <a:prstGeom prst="rect">
             <a:avLst/>
@@ -14927,7 +14835,7 @@
                 <a:solidFill>
                   <a:srgbClr val="0F52BA"/>
                 </a:solidFill>
-                <a:latin typeface="Calibri"/>
+                <a:latin typeface=""/>
               </a:rPr>
               <a:t>5.12</a:t>
             </a:r>
@@ -14943,7 +14851,7 @@
         <p:spPr>
           <a:xfrm>
             <a:off x="685800" y="3218688"/>
-            <a:ext cx="1371600" cy="274320"/>
+            <a:ext cx="1371600" cy="153888"/>
           </a:xfrm>
           <a:prstGeom prst="rect">
             <a:avLst/>
@@ -14962,7 +14870,7 @@
                 <a:solidFill>
                   <a:srgbClr val="6B6B6B"/>
                 </a:solidFill>
-                <a:latin typeface="Calibri"/>
+                <a:latin typeface=""/>
               </a:rPr>
               <a:t>Alert F1 0.852</a:t>
             </a:r>
@@ -15012,7 +14920,9 @@
           <a:lstStyle/>
           <a:p>
             <a:pPr algn="ctr"/>
-            <a:endParaRPr/>
+            <a:endParaRPr>
+              <a:latin typeface=""/>
+            </a:endParaRPr>
           </a:p>
         </p:txBody>
       </p:sp>
@@ -15025,7 +14935,7 @@
         <p:spPr>
           <a:xfrm>
             <a:off x="2423160" y="2212848"/>
-            <a:ext cx="1645920" cy="274320"/>
+            <a:ext cx="1645920" cy="169277"/>
           </a:xfrm>
           <a:prstGeom prst="rect">
             <a:avLst/>
@@ -15044,7 +14954,7 @@
                 <a:solidFill>
                   <a:srgbClr val="6B6B6B"/>
                 </a:solidFill>
-                <a:latin typeface="Calibri"/>
+                <a:latin typeface=""/>
               </a:rPr>
               <a:t>MAE t+3</a:t>
             </a:r>
@@ -15060,7 +14970,7 @@
         <p:spPr>
           <a:xfrm>
             <a:off x="2423160" y="2459736"/>
-            <a:ext cx="1371600" cy="868680"/>
+            <a:ext cx="1371600" cy="615553"/>
           </a:xfrm>
           <a:prstGeom prst="rect">
             <a:avLst/>
@@ -15079,7 +14989,7 @@
                 <a:solidFill>
                   <a:srgbClr val="0F52BA"/>
                 </a:solidFill>
-                <a:latin typeface="Calibri"/>
+                <a:latin typeface=""/>
               </a:rPr>
               <a:t>6.77</a:t>
             </a:r>
@@ -15095,7 +15005,7 @@
         <p:spPr>
           <a:xfrm>
             <a:off x="2423160" y="3218688"/>
-            <a:ext cx="1371600" cy="274320"/>
+            <a:ext cx="1371600" cy="153888"/>
           </a:xfrm>
           <a:prstGeom prst="rect">
             <a:avLst/>
@@ -15114,7 +15024,7 @@
                 <a:solidFill>
                   <a:srgbClr val="6B6B6B"/>
                 </a:solidFill>
-                <a:latin typeface="Calibri"/>
+                <a:latin typeface=""/>
               </a:rPr>
               <a:t>Alert F1 0.747</a:t>
             </a:r>
@@ -15164,7 +15074,9 @@
           <a:lstStyle/>
           <a:p>
             <a:pPr algn="ctr"/>
-            <a:endParaRPr/>
+            <a:endParaRPr>
+              <a:latin typeface=""/>
+            </a:endParaRPr>
           </a:p>
         </p:txBody>
       </p:sp>
@@ -15177,7 +15089,7 @@
         <p:spPr>
           <a:xfrm>
             <a:off x="4160520" y="2212848"/>
-            <a:ext cx="1645920" cy="274320"/>
+            <a:ext cx="1645920" cy="169277"/>
           </a:xfrm>
           <a:prstGeom prst="rect">
             <a:avLst/>
@@ -15196,7 +15108,7 @@
                 <a:solidFill>
                   <a:srgbClr val="6B6B6B"/>
                 </a:solidFill>
-                <a:latin typeface="Calibri"/>
+                <a:latin typeface=""/>
               </a:rPr>
               <a:t>MAE t+7</a:t>
             </a:r>
@@ -15212,7 +15124,7 @@
         <p:spPr>
           <a:xfrm>
             <a:off x="4160520" y="2459736"/>
-            <a:ext cx="1371600" cy="868680"/>
+            <a:ext cx="1371600" cy="615553"/>
           </a:xfrm>
           <a:prstGeom prst="rect">
             <a:avLst/>
@@ -15231,7 +15143,7 @@
                 <a:solidFill>
                   <a:srgbClr val="0F52BA"/>
                 </a:solidFill>
-                <a:latin typeface="Calibri"/>
+                <a:latin typeface=""/>
               </a:rPr>
               <a:t>8.25</a:t>
             </a:r>
@@ -15247,7 +15159,7 @@
         <p:spPr>
           <a:xfrm>
             <a:off x="4160520" y="3218688"/>
-            <a:ext cx="1371600" cy="274320"/>
+            <a:ext cx="1371600" cy="153888"/>
           </a:xfrm>
           <a:prstGeom prst="rect">
             <a:avLst/>
@@ -15266,7 +15178,7 @@
                 <a:solidFill>
                   <a:srgbClr val="6B6B6B"/>
                 </a:solidFill>
-                <a:latin typeface="Calibri"/>
+                <a:latin typeface=""/>
               </a:rPr>
               <a:t>Alert F1 0.713</a:t>
             </a:r>
@@ -15282,7 +15194,7 @@
         <p:spPr>
           <a:xfrm>
             <a:off x="457200" y="3721608"/>
-            <a:ext cx="5303520" cy="274320"/>
+            <a:ext cx="5303520" cy="169277"/>
           </a:xfrm>
           <a:prstGeom prst="rect">
             <a:avLst/>
@@ -15301,7 +15213,7 @@
                 <a:solidFill>
                   <a:srgbClr val="0F52BA"/>
                 </a:solidFill>
-                <a:latin typeface="Calibri"/>
+                <a:latin typeface=""/>
               </a:rPr>
               <a:t>WHY LIGHTGBM WON</a:t>
             </a:r>
@@ -15317,7 +15229,7 @@
         <p:spPr>
           <a:xfrm>
             <a:off x="548640" y="4041648"/>
-            <a:ext cx="5303520" cy="1645920"/>
+            <a:ext cx="5303520" cy="1046440"/>
           </a:xfrm>
           <a:prstGeom prst="rect">
             <a:avLst/>
@@ -15340,7 +15252,7 @@
                 <a:solidFill>
                   <a:srgbClr val="0F52BA"/>
                 </a:solidFill>
-                <a:latin typeface="Calibri"/>
+                <a:latin typeface=""/>
               </a:rPr>
               <a:t>•  </a:t>
             </a:r>
@@ -15349,7 +15261,7 @@
                 <a:solidFill>
                   <a:srgbClr val="222E3C"/>
                 </a:solidFill>
-                <a:latin typeface="Calibri"/>
+                <a:latin typeface=""/>
               </a:rPr>
               <a:t>Lower MAE at every horizon (5.12 vs XGBoost 5.31 at t+1)</a:t>
             </a:r>
@@ -15365,7 +15277,7 @@
                 <a:solidFill>
                   <a:srgbClr val="0F52BA"/>
                 </a:solidFill>
-                <a:latin typeface="Calibri"/>
+                <a:latin typeface=""/>
               </a:rPr>
               <a:t>•  </a:t>
             </a:r>
@@ -15374,7 +15286,7 @@
                 <a:solidFill>
                   <a:srgbClr val="222E3C"/>
                 </a:solidFill>
-                <a:latin typeface="Calibri"/>
+                <a:latin typeface=""/>
               </a:rPr>
               <a:t>Best alert F1 at t+1 (0.852) — operationally usable</a:t>
             </a:r>
@@ -15390,7 +15302,7 @@
                 <a:solidFill>
                   <a:srgbClr val="0F52BA"/>
                 </a:solidFill>
-                <a:latin typeface="Calibri"/>
+                <a:latin typeface=""/>
               </a:rPr>
               <a:t>•  </a:t>
             </a:r>
@@ -15399,7 +15311,7 @@
                 <a:solidFill>
                   <a:srgbClr val="222E3C"/>
                 </a:solidFill>
-                <a:latin typeface="Calibri"/>
+                <a:latin typeface=""/>
               </a:rPr>
               <a:t>Same 45-feature input — fair head-to-head</a:t>
             </a:r>
@@ -15415,7 +15327,7 @@
                 <a:solidFill>
                   <a:srgbClr val="0F52BA"/>
                 </a:solidFill>
-                <a:latin typeface="Calibri"/>
+                <a:latin typeface=""/>
               </a:rPr>
               <a:t>•  </a:t>
             </a:r>
@@ -15424,7 +15336,7 @@
                 <a:solidFill>
                   <a:srgbClr val="222E3C"/>
                 </a:solidFill>
-                <a:latin typeface="Calibri"/>
+                <a:latin typeface=""/>
               </a:rPr>
               <a:t>Promoted via ≥5 % MAE gate on 2026-04-18</a:t>
             </a:r>
@@ -15464,7 +15376,7 @@
         <p:spPr>
           <a:xfrm>
             <a:off x="6309360" y="5074920"/>
-            <a:ext cx="5486400" cy="320040"/>
+            <a:ext cx="5486400" cy="153888"/>
           </a:xfrm>
           <a:prstGeom prst="rect">
             <a:avLst/>
@@ -15483,7 +15395,7 @@
                 <a:solidFill>
                   <a:srgbClr val="6B6B6B"/>
                 </a:solidFill>
-                <a:latin typeface="Calibri"/>
+                <a:latin typeface=""/>
               </a:rPr>
               <a:t>Test MAE per horizon — LightGBM (champion), XGBoost, LSTM</a:t>
             </a:r>
@@ -15499,7 +15411,7 @@
         <p:spPr>
           <a:xfrm>
             <a:off x="457200" y="6510528"/>
-            <a:ext cx="11247120" cy="274320"/>
+            <a:ext cx="11247120" cy="138499"/>
           </a:xfrm>
           <a:prstGeom prst="rect">
             <a:avLst/>
@@ -15518,7 +15430,7 @@
                 <a:solidFill>
                   <a:srgbClr val="6B6B6B"/>
                 </a:solidFill>
-                <a:latin typeface="Calibri"/>
+                <a:latin typeface=""/>
               </a:rPr>
               <a:t>Source: 03_Data/results/{lightgbm,xgboost,lstm}_summary.json</a:t>
             </a:r>
@@ -15534,7 +15446,7 @@
         <p:spPr>
           <a:xfrm>
             <a:off x="11475720" y="6510528"/>
-            <a:ext cx="640080" cy="274320"/>
+            <a:ext cx="640080" cy="138499"/>
           </a:xfrm>
           <a:prstGeom prst="rect">
             <a:avLst/>
@@ -15553,7 +15465,7 @@
                 <a:solidFill>
                   <a:srgbClr val="6B6B6B"/>
                 </a:solidFill>
-                <a:latin typeface="Calibri"/>
+                <a:latin typeface=""/>
               </a:rPr>
               <a:t>7 / 14</a:t>
             </a:r>
@@ -15626,7 +15538,9 @@
           <a:lstStyle/>
           <a:p>
             <a:pPr algn="ctr"/>
-            <a:endParaRPr/>
+            <a:endParaRPr>
+              <a:latin typeface="Century Gothic" panose="020B0502020202020204" pitchFamily="34" charset="0"/>
+            </a:endParaRPr>
           </a:p>
         </p:txBody>
       </p:sp>
@@ -15671,7 +15585,9 @@
           <a:lstStyle/>
           <a:p>
             <a:pPr algn="ctr"/>
-            <a:endParaRPr/>
+            <a:endParaRPr>
+              <a:latin typeface="Century Gothic" panose="020B0502020202020204" pitchFamily="34" charset="0"/>
+            </a:endParaRPr>
           </a:p>
         </p:txBody>
       </p:sp>
@@ -15684,7 +15600,7 @@
         <p:spPr>
           <a:xfrm>
             <a:off x="457200" y="274320"/>
-            <a:ext cx="9144000" cy="274320"/>
+            <a:ext cx="9144000" cy="153888"/>
           </a:xfrm>
           <a:prstGeom prst="rect">
             <a:avLst/>
@@ -15703,7 +15619,7 @@
                 <a:solidFill>
                   <a:srgbClr val="0F52BA"/>
                 </a:solidFill>
-                <a:latin typeface="Calibri"/>
+                <a:latin typeface="Century Gothic" panose="020B0502020202020204" pitchFamily="34" charset="0"/>
               </a:rPr>
               <a:t>FORECAST QUALITY</a:t>
             </a:r>
@@ -15719,7 +15635,7 @@
         <p:spPr>
           <a:xfrm>
             <a:off x="457200" y="640080"/>
-            <a:ext cx="11247120" cy="731520"/>
+            <a:ext cx="11247120" cy="800219"/>
           </a:xfrm>
           <a:prstGeom prst="rect">
             <a:avLst/>
@@ -15738,7 +15654,7 @@
                 <a:solidFill>
                   <a:srgbClr val="1A1A1A"/>
                 </a:solidFill>
-                <a:latin typeface="Calibri"/>
+                <a:latin typeface="Century Gothic" panose="020B0502020202020204" pitchFamily="34" charset="0"/>
               </a:rPr>
               <a:t>LightGBM tracks observed PM2.5 — including the 2024 dry-season peaks</a:t>
             </a:r>
@@ -15778,7 +15694,7 @@
         <p:spPr>
           <a:xfrm>
             <a:off x="9144000" y="1463040"/>
-            <a:ext cx="2560320" cy="320040"/>
+            <a:ext cx="2560320" cy="153888"/>
           </a:xfrm>
           <a:prstGeom prst="rect">
             <a:avLst/>
@@ -15797,7 +15713,7 @@
                 <a:solidFill>
                   <a:srgbClr val="0F52BA"/>
                 </a:solidFill>
-                <a:latin typeface="Calibri"/>
+                <a:latin typeface="Century Gothic" panose="020B0502020202020204" pitchFamily="34" charset="0"/>
               </a:rPr>
               <a:t>TEST-SET METRICS</a:t>
             </a:r>
@@ -15847,7 +15763,9 @@
           <a:lstStyle/>
           <a:p>
             <a:pPr algn="ctr"/>
-            <a:endParaRPr/>
+            <a:endParaRPr>
+              <a:latin typeface="Century Gothic" panose="020B0502020202020204" pitchFamily="34" charset="0"/>
+            </a:endParaRPr>
           </a:p>
         </p:txBody>
       </p:sp>
@@ -15860,7 +15778,7 @@
         <p:spPr>
           <a:xfrm>
             <a:off x="9326880" y="1920240"/>
-            <a:ext cx="2560320" cy="320040"/>
+            <a:ext cx="2560320" cy="169277"/>
           </a:xfrm>
           <a:prstGeom prst="rect">
             <a:avLst/>
@@ -15879,7 +15797,7 @@
                 <a:solidFill>
                   <a:srgbClr val="6B6B6B"/>
                 </a:solidFill>
-                <a:latin typeface="Calibri"/>
+                <a:latin typeface="Century Gothic" panose="020B0502020202020204" pitchFamily="34" charset="0"/>
               </a:rPr>
               <a:t>R²</a:t>
             </a:r>
@@ -15895,7 +15813,7 @@
         <p:spPr>
           <a:xfrm>
             <a:off x="9326880" y="2194560"/>
-            <a:ext cx="2194560" cy="548640"/>
+            <a:ext cx="2194560" cy="430887"/>
           </a:xfrm>
           <a:prstGeom prst="rect">
             <a:avLst/>
@@ -15914,7 +15832,7 @@
                 <a:solidFill>
                   <a:srgbClr val="0F52BA"/>
                 </a:solidFill>
-                <a:latin typeface="Calibri"/>
+                <a:latin typeface="Century Gothic" panose="020B0502020202020204" pitchFamily="34" charset="0"/>
               </a:rPr>
               <a:t>0.841</a:t>
             </a:r>
@@ -15930,7 +15848,7 @@
         <p:spPr>
           <a:xfrm>
             <a:off x="9326880" y="2697480"/>
-            <a:ext cx="2194560" cy="274320"/>
+            <a:ext cx="2194560" cy="153888"/>
           </a:xfrm>
           <a:prstGeom prst="rect">
             <a:avLst/>
@@ -15949,7 +15867,7 @@
                 <a:solidFill>
                   <a:srgbClr val="6B6B6B"/>
                 </a:solidFill>
-                <a:latin typeface="Calibri"/>
+                <a:latin typeface="Century Gothic" panose="020B0502020202020204" pitchFamily="34" charset="0"/>
               </a:rPr>
               <a:t>at t+1</a:t>
             </a:r>
@@ -15999,7 +15917,9 @@
           <a:lstStyle/>
           <a:p>
             <a:pPr algn="ctr"/>
-            <a:endParaRPr/>
+            <a:endParaRPr>
+              <a:latin typeface="Century Gothic" panose="020B0502020202020204" pitchFamily="34" charset="0"/>
+            </a:endParaRPr>
           </a:p>
         </p:txBody>
       </p:sp>
@@ -16012,7 +15932,7 @@
         <p:spPr>
           <a:xfrm>
             <a:off x="9326880" y="3200400"/>
-            <a:ext cx="2560320" cy="320040"/>
+            <a:ext cx="2560320" cy="169277"/>
           </a:xfrm>
           <a:prstGeom prst="rect">
             <a:avLst/>
@@ -16031,7 +15951,7 @@
                 <a:solidFill>
                   <a:srgbClr val="6B6B6B"/>
                 </a:solidFill>
-                <a:latin typeface="Calibri"/>
+                <a:latin typeface="Century Gothic" panose="020B0502020202020204" pitchFamily="34" charset="0"/>
               </a:rPr>
               <a:t>RMSE</a:t>
             </a:r>
@@ -16047,7 +15967,7 @@
         <p:spPr>
           <a:xfrm>
             <a:off x="9326880" y="3474720"/>
-            <a:ext cx="2194560" cy="548640"/>
+            <a:ext cx="2194560" cy="430887"/>
           </a:xfrm>
           <a:prstGeom prst="rect">
             <a:avLst/>
@@ -16066,7 +15986,7 @@
                 <a:solidFill>
                   <a:srgbClr val="0F52BA"/>
                 </a:solidFill>
-                <a:latin typeface="Calibri"/>
+                <a:latin typeface="Century Gothic" panose="020B0502020202020204" pitchFamily="34" charset="0"/>
               </a:rPr>
               <a:t>9.00</a:t>
             </a:r>
@@ -16082,7 +16002,7 @@
         <p:spPr>
           <a:xfrm>
             <a:off x="9326880" y="3977640"/>
-            <a:ext cx="2194560" cy="274320"/>
+            <a:ext cx="2194560" cy="153888"/>
           </a:xfrm>
           <a:prstGeom prst="rect">
             <a:avLst/>
@@ -16101,7 +16021,7 @@
                 <a:solidFill>
                   <a:srgbClr val="6B6B6B"/>
                 </a:solidFill>
-                <a:latin typeface="Calibri"/>
+                <a:latin typeface="Century Gothic" panose="020B0502020202020204" pitchFamily="34" charset="0"/>
               </a:rPr>
               <a:t>at t+1 (µg/m³)</a:t>
             </a:r>
@@ -16151,7 +16071,9 @@
           <a:lstStyle/>
           <a:p>
             <a:pPr algn="ctr"/>
-            <a:endParaRPr/>
+            <a:endParaRPr>
+              <a:latin typeface="Century Gothic" panose="020B0502020202020204" pitchFamily="34" charset="0"/>
+            </a:endParaRPr>
           </a:p>
         </p:txBody>
       </p:sp>
@@ -16164,7 +16086,7 @@
         <p:spPr>
           <a:xfrm>
             <a:off x="9326880" y="4480560"/>
-            <a:ext cx="2560320" cy="320040"/>
+            <a:ext cx="2560320" cy="169277"/>
           </a:xfrm>
           <a:prstGeom prst="rect">
             <a:avLst/>
@@ -16183,7 +16105,7 @@
                 <a:solidFill>
                   <a:srgbClr val="6B6B6B"/>
                 </a:solidFill>
-                <a:latin typeface="Calibri"/>
+                <a:latin typeface="Century Gothic" panose="020B0502020202020204" pitchFamily="34" charset="0"/>
               </a:rPr>
               <a:t>AUROC</a:t>
             </a:r>
@@ -16199,7 +16121,7 @@
         <p:spPr>
           <a:xfrm>
             <a:off x="9326880" y="4754880"/>
-            <a:ext cx="2194560" cy="548640"/>
+            <a:ext cx="2194560" cy="430887"/>
           </a:xfrm>
           <a:prstGeom prst="rect">
             <a:avLst/>
@@ -16218,7 +16140,7 @@
                 <a:solidFill>
                   <a:srgbClr val="0F52BA"/>
                 </a:solidFill>
-                <a:latin typeface="Calibri"/>
+                <a:latin typeface="Century Gothic" panose="020B0502020202020204" pitchFamily="34" charset="0"/>
               </a:rPr>
               <a:t>0.992</a:t>
             </a:r>
@@ -16234,7 +16156,7 @@
         <p:spPr>
           <a:xfrm>
             <a:off x="9326880" y="5257800"/>
-            <a:ext cx="2194560" cy="274320"/>
+            <a:ext cx="2194560" cy="153888"/>
           </a:xfrm>
           <a:prstGeom prst="rect">
             <a:avLst/>
@@ -16253,7 +16175,7 @@
                 <a:solidFill>
                   <a:srgbClr val="6B6B6B"/>
                 </a:solidFill>
-                <a:latin typeface="Calibri"/>
+                <a:latin typeface="Century Gothic" panose="020B0502020202020204" pitchFamily="34" charset="0"/>
               </a:rPr>
               <a:t>alert · t+1</a:t>
             </a:r>
@@ -16269,7 +16191,7 @@
         <p:spPr>
           <a:xfrm>
             <a:off x="457200" y="6510528"/>
-            <a:ext cx="11247120" cy="274320"/>
+            <a:ext cx="11247120" cy="138499"/>
           </a:xfrm>
           <a:prstGeom prst="rect">
             <a:avLst/>
@@ -16288,7 +16210,7 @@
                 <a:solidFill>
                   <a:srgbClr val="6B6B6B"/>
                 </a:solidFill>
-                <a:latin typeface="Calibri"/>
+                <a:latin typeface="Century Gothic" panose="020B0502020202020204" pitchFamily="34" charset="0"/>
               </a:rPr>
               <a:t>Source: 03_Data/results/lightgbm_summary.json + predictions CSV</a:t>
             </a:r>
@@ -16304,7 +16226,7 @@
         <p:spPr>
           <a:xfrm>
             <a:off x="11475720" y="6510528"/>
-            <a:ext cx="640080" cy="274320"/>
+            <a:ext cx="640080" cy="138499"/>
           </a:xfrm>
           <a:prstGeom prst="rect">
             <a:avLst/>
@@ -16323,7 +16245,7 @@
                 <a:solidFill>
                   <a:srgbClr val="6B6B6B"/>
                 </a:solidFill>
-                <a:latin typeface="Calibri"/>
+                <a:latin typeface="Century Gothic" panose="020B0502020202020204" pitchFamily="34" charset="0"/>
               </a:rPr>
               <a:t>8 / 14</a:t>
             </a:r>
@@ -16396,7 +16318,9 @@
           <a:lstStyle/>
           <a:p>
             <a:pPr algn="ctr"/>
-            <a:endParaRPr/>
+            <a:endParaRPr>
+              <a:latin typeface="Century Gothic" panose="020B0502020202020204" pitchFamily="34" charset="0"/>
+            </a:endParaRPr>
           </a:p>
         </p:txBody>
       </p:sp>
@@ -16441,7 +16365,9 @@
           <a:lstStyle/>
           <a:p>
             <a:pPr algn="ctr"/>
-            <a:endParaRPr/>
+            <a:endParaRPr>
+              <a:latin typeface="Century Gothic" panose="020B0502020202020204" pitchFamily="34" charset="0"/>
+            </a:endParaRPr>
           </a:p>
         </p:txBody>
       </p:sp>
@@ -16454,7 +16380,7 @@
         <p:spPr>
           <a:xfrm>
             <a:off x="457200" y="274320"/>
-            <a:ext cx="9144000" cy="274320"/>
+            <a:ext cx="9144000" cy="153888"/>
           </a:xfrm>
           <a:prstGeom prst="rect">
             <a:avLst/>
@@ -16473,7 +16399,7 @@
                 <a:solidFill>
                   <a:srgbClr val="0F52BA"/>
                 </a:solidFill>
-                <a:latin typeface="Calibri"/>
+                <a:latin typeface="Century Gothic" panose="020B0502020202020204" pitchFamily="34" charset="0"/>
               </a:rPr>
               <a:t>ABLATION &amp; ALERT THRESHOLDS</a:t>
             </a:r>
@@ -16489,7 +16415,7 @@
         <p:spPr>
           <a:xfrm>
             <a:off x="457200" y="640080"/>
-            <a:ext cx="11247120" cy="731520"/>
+            <a:ext cx="11247120" cy="369332"/>
           </a:xfrm>
           <a:prstGeom prst="rect">
             <a:avLst/>
@@ -16508,7 +16434,7 @@
                 <a:solidFill>
                   <a:srgbClr val="1A1A1A"/>
                 </a:solidFill>
-                <a:latin typeface="Calibri"/>
+                <a:latin typeface="Century Gothic" panose="020B0502020202020204" pitchFamily="34" charset="0"/>
               </a:rPr>
               <a:t>Fire features matter — and PR-tuned thresholds sharpen the alert</a:t>
             </a:r>
@@ -16582,7 +16508,9 @@
           <a:lstStyle/>
           <a:p>
             <a:pPr algn="ctr"/>
-            <a:endParaRPr/>
+            <a:endParaRPr>
+              <a:latin typeface="Century Gothic" panose="020B0502020202020204" pitchFamily="34" charset="0"/>
+            </a:endParaRPr>
           </a:p>
         </p:txBody>
       </p:sp>
@@ -16595,7 +16523,7 @@
         <p:spPr>
           <a:xfrm>
             <a:off x="594360" y="5212080"/>
-            <a:ext cx="1920240" cy="320040"/>
+            <a:ext cx="1920240" cy="153888"/>
           </a:xfrm>
           <a:prstGeom prst="rect">
             <a:avLst/>
@@ -16614,7 +16542,7 @@
                 <a:solidFill>
                   <a:srgbClr val="0F52BA"/>
                 </a:solidFill>
-                <a:latin typeface="Calibri"/>
+                <a:latin typeface="Century Gothic" panose="020B0502020202020204" pitchFamily="34" charset="0"/>
               </a:rPr>
               <a:t>T+1 DAY</a:t>
             </a:r>
@@ -16630,7 +16558,7 @@
         <p:spPr>
           <a:xfrm>
             <a:off x="594360" y="5440680"/>
-            <a:ext cx="1645920" cy="640080"/>
+            <a:ext cx="1645920" cy="400110"/>
           </a:xfrm>
           <a:prstGeom prst="rect">
             <a:avLst/>
@@ -16649,7 +16577,7 @@
                 <a:solidFill>
                   <a:srgbClr val="0F52BA"/>
                 </a:solidFill>
-                <a:latin typeface="Calibri"/>
+                <a:latin typeface="Century Gothic" panose="020B0502020202020204" pitchFamily="34" charset="0"/>
               </a:rPr>
               <a:t>+6.8%</a:t>
             </a:r>
@@ -16665,7 +16593,7 @@
         <p:spPr>
           <a:xfrm>
             <a:off x="594360" y="5989320"/>
-            <a:ext cx="1645920" cy="274320"/>
+            <a:ext cx="1645920" cy="138499"/>
           </a:xfrm>
           <a:prstGeom prst="rect">
             <a:avLst/>
@@ -16684,7 +16612,7 @@
                 <a:solidFill>
                   <a:srgbClr val="6B6B6B"/>
                 </a:solidFill>
-                <a:latin typeface="Calibri"/>
+                <a:latin typeface="Century Gothic" panose="020B0502020202020204" pitchFamily="34" charset="0"/>
               </a:rPr>
               <a:t>MAE worse w/o FIRMS</a:t>
             </a:r>
@@ -16734,7 +16662,9 @@
           <a:lstStyle/>
           <a:p>
             <a:pPr algn="ctr"/>
-            <a:endParaRPr/>
+            <a:endParaRPr>
+              <a:latin typeface="Century Gothic" panose="020B0502020202020204" pitchFamily="34" charset="0"/>
+            </a:endParaRPr>
           </a:p>
         </p:txBody>
       </p:sp>
@@ -16747,7 +16677,7 @@
         <p:spPr>
           <a:xfrm>
             <a:off x="2606040" y="5212080"/>
-            <a:ext cx="1920240" cy="320040"/>
+            <a:ext cx="1920240" cy="153888"/>
           </a:xfrm>
           <a:prstGeom prst="rect">
             <a:avLst/>
@@ -16766,7 +16696,7 @@
                 <a:solidFill>
                   <a:srgbClr val="0F52BA"/>
                 </a:solidFill>
-                <a:latin typeface="Calibri"/>
+                <a:latin typeface="Century Gothic" panose="020B0502020202020204" pitchFamily="34" charset="0"/>
               </a:rPr>
               <a:t>T+3 DAYS</a:t>
             </a:r>
@@ -16782,7 +16712,7 @@
         <p:spPr>
           <a:xfrm>
             <a:off x="2606040" y="5440680"/>
-            <a:ext cx="1645920" cy="640080"/>
+            <a:ext cx="1645920" cy="400110"/>
           </a:xfrm>
           <a:prstGeom prst="rect">
             <a:avLst/>
@@ -16801,7 +16731,7 @@
                 <a:solidFill>
                   <a:srgbClr val="0F52BA"/>
                 </a:solidFill>
-                <a:latin typeface="Calibri"/>
+                <a:latin typeface="Century Gothic" panose="020B0502020202020204" pitchFamily="34" charset="0"/>
               </a:rPr>
               <a:t>+5.1%</a:t>
             </a:r>
@@ -16817,7 +16747,7 @@
         <p:spPr>
           <a:xfrm>
             <a:off x="2606040" y="5989320"/>
-            <a:ext cx="1645920" cy="274320"/>
+            <a:ext cx="1645920" cy="138499"/>
           </a:xfrm>
           <a:prstGeom prst="rect">
             <a:avLst/>
@@ -16836,7 +16766,7 @@
                 <a:solidFill>
                   <a:srgbClr val="6B6B6B"/>
                 </a:solidFill>
-                <a:latin typeface="Calibri"/>
+                <a:latin typeface="Century Gothic" panose="020B0502020202020204" pitchFamily="34" charset="0"/>
               </a:rPr>
               <a:t>MAE worse w/o FIRMS</a:t>
             </a:r>
@@ -16886,7 +16816,9 @@
           <a:lstStyle/>
           <a:p>
             <a:pPr algn="ctr"/>
-            <a:endParaRPr/>
+            <a:endParaRPr>
+              <a:latin typeface="Century Gothic" panose="020B0502020202020204" pitchFamily="34" charset="0"/>
+            </a:endParaRPr>
           </a:p>
         </p:txBody>
       </p:sp>
@@ -16899,7 +16831,7 @@
         <p:spPr>
           <a:xfrm>
             <a:off x="4617720" y="5212080"/>
-            <a:ext cx="1920240" cy="320040"/>
+            <a:ext cx="1920240" cy="153888"/>
           </a:xfrm>
           <a:prstGeom prst="rect">
             <a:avLst/>
@@ -16918,7 +16850,7 @@
                 <a:solidFill>
                   <a:srgbClr val="0F52BA"/>
                 </a:solidFill>
-                <a:latin typeface="Calibri"/>
+                <a:latin typeface="Century Gothic" panose="020B0502020202020204" pitchFamily="34" charset="0"/>
               </a:rPr>
               <a:t>T+7 DAYS</a:t>
             </a:r>
@@ -16934,7 +16866,7 @@
         <p:spPr>
           <a:xfrm>
             <a:off x="4617720" y="5440680"/>
-            <a:ext cx="1645920" cy="640080"/>
+            <a:ext cx="1645920" cy="400110"/>
           </a:xfrm>
           <a:prstGeom prst="rect">
             <a:avLst/>
@@ -16953,7 +16885,7 @@
                 <a:solidFill>
                   <a:srgbClr val="0F52BA"/>
                 </a:solidFill>
-                <a:latin typeface="Calibri"/>
+                <a:latin typeface="Century Gothic" panose="020B0502020202020204" pitchFamily="34" charset="0"/>
               </a:rPr>
               <a:t>+4.3%</a:t>
             </a:r>
@@ -16969,7 +16901,7 @@
         <p:spPr>
           <a:xfrm>
             <a:off x="4617720" y="5989320"/>
-            <a:ext cx="1645920" cy="274320"/>
+            <a:ext cx="1645920" cy="138499"/>
           </a:xfrm>
           <a:prstGeom prst="rect">
             <a:avLst/>
@@ -16988,7 +16920,7 @@
                 <a:solidFill>
                   <a:srgbClr val="6B6B6B"/>
                 </a:solidFill>
-                <a:latin typeface="Calibri"/>
+                <a:latin typeface="Century Gothic" panose="020B0502020202020204" pitchFamily="34" charset="0"/>
               </a:rPr>
               <a:t>MAE worse w/o FIRMS</a:t>
             </a:r>
@@ -17004,7 +16936,7 @@
         <p:spPr>
           <a:xfrm>
             <a:off x="6858000" y="1463040"/>
-            <a:ext cx="4846320" cy="320040"/>
+            <a:ext cx="4846320" cy="153888"/>
           </a:xfrm>
           <a:prstGeom prst="rect">
             <a:avLst/>
@@ -17023,7 +16955,7 @@
                 <a:solidFill>
                   <a:srgbClr val="0F52BA"/>
                 </a:solidFill>
-                <a:latin typeface="Calibri"/>
+                <a:latin typeface="Century Gothic" panose="020B0502020202020204" pitchFamily="34" charset="0"/>
               </a:rPr>
               <a:t>SCENARIO C  ·  PR-TUNED ALERT THRESHOLDS</a:t>
             </a:r>
@@ -17058,7 +16990,7 @@
                 <a:solidFill>
                   <a:srgbClr val="6B6B6B"/>
                 </a:solidFill>
-                <a:latin typeface="Calibri"/>
+                <a:latin typeface="Century Gothic" panose="020B0502020202020204" pitchFamily="34" charset="0"/>
               </a:rPr>
               <a:t>Default 50 µg/m³ band tuned per horizon for F1-optimal precision/recall.</a:t>
             </a:r>
@@ -17108,7 +17040,9 @@
           <a:lstStyle/>
           <a:p>
             <a:pPr algn="ctr"/>
-            <a:endParaRPr/>
+            <a:endParaRPr>
+              <a:latin typeface="Century Gothic" panose="020B0502020202020204" pitchFamily="34" charset="0"/>
+            </a:endParaRPr>
           </a:p>
         </p:txBody>
       </p:sp>
@@ -17121,7 +17055,7 @@
         <p:spPr>
           <a:xfrm>
             <a:off x="6995160" y="2423160"/>
-            <a:ext cx="1554480" cy="320040"/>
+            <a:ext cx="1554480" cy="169277"/>
           </a:xfrm>
           <a:prstGeom prst="rect">
             <a:avLst/>
@@ -17140,7 +17074,7 @@
                 <a:solidFill>
                   <a:srgbClr val="6B6B6B"/>
                 </a:solidFill>
-                <a:latin typeface="Calibri"/>
+                <a:latin typeface="Century Gothic" panose="020B0502020202020204" pitchFamily="34" charset="0"/>
               </a:rPr>
               <a:t>t+1</a:t>
             </a:r>
@@ -17156,7 +17090,7 @@
         <p:spPr>
           <a:xfrm>
             <a:off x="6995160" y="2697480"/>
-            <a:ext cx="1280160" cy="731520"/>
+            <a:ext cx="1280160" cy="492443"/>
           </a:xfrm>
           <a:prstGeom prst="rect">
             <a:avLst/>
@@ -17175,7 +17109,7 @@
                 <a:solidFill>
                   <a:srgbClr val="0F52BA"/>
                 </a:solidFill>
-                <a:latin typeface="Calibri"/>
+                <a:latin typeface="Century Gothic" panose="020B0502020202020204" pitchFamily="34" charset="0"/>
               </a:rPr>
               <a:t>53.7</a:t>
             </a:r>
@@ -17191,7 +17125,7 @@
         <p:spPr>
           <a:xfrm>
             <a:off x="6995160" y="3429000"/>
-            <a:ext cx="1280160" cy="274320"/>
+            <a:ext cx="1280160" cy="138499"/>
           </a:xfrm>
           <a:prstGeom prst="rect">
             <a:avLst/>
@@ -17210,7 +17144,7 @@
                 <a:solidFill>
                   <a:srgbClr val="6B6B6B"/>
                 </a:solidFill>
-                <a:latin typeface="Calibri"/>
+                <a:latin typeface="Century Gothic" panose="020B0502020202020204" pitchFamily="34" charset="0"/>
               </a:rPr>
               <a:t>µg/m³ threshold</a:t>
             </a:r>
@@ -17226,7 +17160,7 @@
         <p:spPr>
           <a:xfrm>
             <a:off x="6995160" y="3703320"/>
-            <a:ext cx="1280160" cy="274320"/>
+            <a:ext cx="1280160" cy="169277"/>
           </a:xfrm>
           <a:prstGeom prst="rect">
             <a:avLst/>
@@ -17245,7 +17179,7 @@
                 <a:solidFill>
                   <a:srgbClr val="2E8B57"/>
                 </a:solidFill>
-                <a:latin typeface="Calibri"/>
+                <a:latin typeface="Century Gothic" panose="020B0502020202020204" pitchFamily="34" charset="0"/>
               </a:rPr>
               <a:t>+4.0 % F1 gain</a:t>
             </a:r>
@@ -17295,7 +17229,9 @@
           <a:lstStyle/>
           <a:p>
             <a:pPr algn="ctr"/>
-            <a:endParaRPr/>
+            <a:endParaRPr>
+              <a:latin typeface="Century Gothic" panose="020B0502020202020204" pitchFamily="34" charset="0"/>
+            </a:endParaRPr>
           </a:p>
         </p:txBody>
       </p:sp>
@@ -17308,7 +17244,7 @@
         <p:spPr>
           <a:xfrm>
             <a:off x="8641080" y="2423160"/>
-            <a:ext cx="1554480" cy="320040"/>
+            <a:ext cx="1554480" cy="169277"/>
           </a:xfrm>
           <a:prstGeom prst="rect">
             <a:avLst/>
@@ -17327,7 +17263,7 @@
                 <a:solidFill>
                   <a:srgbClr val="6B6B6B"/>
                 </a:solidFill>
-                <a:latin typeface="Calibri"/>
+                <a:latin typeface="Century Gothic" panose="020B0502020202020204" pitchFamily="34" charset="0"/>
               </a:rPr>
               <a:t>t+3</a:t>
             </a:r>
@@ -17343,7 +17279,7 @@
         <p:spPr>
           <a:xfrm>
             <a:off x="8641080" y="2697480"/>
-            <a:ext cx="1280160" cy="731520"/>
+            <a:ext cx="1280160" cy="492443"/>
           </a:xfrm>
           <a:prstGeom prst="rect">
             <a:avLst/>
@@ -17362,7 +17298,7 @@
                 <a:solidFill>
                   <a:srgbClr val="0F52BA"/>
                 </a:solidFill>
-                <a:latin typeface="Calibri"/>
+                <a:latin typeface="Century Gothic" panose="020B0502020202020204" pitchFamily="34" charset="0"/>
               </a:rPr>
               <a:t>51.0</a:t>
             </a:r>
@@ -17378,7 +17314,7 @@
         <p:spPr>
           <a:xfrm>
             <a:off x="8641080" y="3429000"/>
-            <a:ext cx="1280160" cy="274320"/>
+            <a:ext cx="1280160" cy="138499"/>
           </a:xfrm>
           <a:prstGeom prst="rect">
             <a:avLst/>
@@ -17397,7 +17333,7 @@
                 <a:solidFill>
                   <a:srgbClr val="6B6B6B"/>
                 </a:solidFill>
-                <a:latin typeface="Calibri"/>
+                <a:latin typeface="Century Gothic" panose="020B0502020202020204" pitchFamily="34" charset="0"/>
               </a:rPr>
               <a:t>µg/m³ threshold</a:t>
             </a:r>
@@ -17413,7 +17349,7 @@
         <p:spPr>
           <a:xfrm>
             <a:off x="8641080" y="3703320"/>
-            <a:ext cx="1280160" cy="274320"/>
+            <a:ext cx="1280160" cy="169277"/>
           </a:xfrm>
           <a:prstGeom prst="rect">
             <a:avLst/>
@@ -17432,7 +17368,7 @@
                 <a:solidFill>
                   <a:srgbClr val="2E8B57"/>
                 </a:solidFill>
-                <a:latin typeface="Calibri"/>
+                <a:latin typeface="Century Gothic" panose="020B0502020202020204" pitchFamily="34" charset="0"/>
               </a:rPr>
               <a:t>+0.2 % F1 gain</a:t>
             </a:r>
@@ -17482,7 +17418,9 @@
           <a:lstStyle/>
           <a:p>
             <a:pPr algn="ctr"/>
-            <a:endParaRPr/>
+            <a:endParaRPr>
+              <a:latin typeface="Century Gothic" panose="020B0502020202020204" pitchFamily="34" charset="0"/>
+            </a:endParaRPr>
           </a:p>
         </p:txBody>
       </p:sp>
@@ -17495,7 +17433,7 @@
         <p:spPr>
           <a:xfrm>
             <a:off x="10287000" y="2423160"/>
-            <a:ext cx="1554480" cy="320040"/>
+            <a:ext cx="1554480" cy="169277"/>
           </a:xfrm>
           <a:prstGeom prst="rect">
             <a:avLst/>
@@ -17514,7 +17452,7 @@
                 <a:solidFill>
                   <a:srgbClr val="6B6B6B"/>
                 </a:solidFill>
-                <a:latin typeface="Calibri"/>
+                <a:latin typeface="Century Gothic" panose="020B0502020202020204" pitchFamily="34" charset="0"/>
               </a:rPr>
               <a:t>t+7</a:t>
             </a:r>
@@ -17530,7 +17468,7 @@
         <p:spPr>
           <a:xfrm>
             <a:off x="10287000" y="2697480"/>
-            <a:ext cx="1280160" cy="731520"/>
+            <a:ext cx="1280160" cy="492443"/>
           </a:xfrm>
           <a:prstGeom prst="rect">
             <a:avLst/>
@@ -17549,7 +17487,7 @@
                 <a:solidFill>
                   <a:srgbClr val="0F52BA"/>
                 </a:solidFill>
-                <a:latin typeface="Calibri"/>
+                <a:latin typeface="Century Gothic" panose="020B0502020202020204" pitchFamily="34" charset="0"/>
               </a:rPr>
               <a:t>45.8</a:t>
             </a:r>
@@ -17565,7 +17503,7 @@
         <p:spPr>
           <a:xfrm>
             <a:off x="10287000" y="3429000"/>
-            <a:ext cx="1280160" cy="274320"/>
+            <a:ext cx="1280160" cy="138499"/>
           </a:xfrm>
           <a:prstGeom prst="rect">
             <a:avLst/>
@@ -17584,7 +17522,7 @@
                 <a:solidFill>
                   <a:srgbClr val="6B6B6B"/>
                 </a:solidFill>
-                <a:latin typeface="Calibri"/>
+                <a:latin typeface="Century Gothic" panose="020B0502020202020204" pitchFamily="34" charset="0"/>
               </a:rPr>
               <a:t>µg/m³ threshold</a:t>
             </a:r>
@@ -17600,7 +17538,7 @@
         <p:spPr>
           <a:xfrm>
             <a:off x="10287000" y="3703320"/>
-            <a:ext cx="1280160" cy="274320"/>
+            <a:ext cx="1280160" cy="169277"/>
           </a:xfrm>
           <a:prstGeom prst="rect">
             <a:avLst/>
@@ -17619,7 +17557,7 @@
                 <a:solidFill>
                   <a:srgbClr val="2E8B57"/>
                 </a:solidFill>
-                <a:latin typeface="Calibri"/>
+                <a:latin typeface="Century Gothic" panose="020B0502020202020204" pitchFamily="34" charset="0"/>
               </a:rPr>
               <a:t>+1.1 % F1 gain</a:t>
             </a:r>
@@ -17669,7 +17607,9 @@
           <a:lstStyle/>
           <a:p>
             <a:pPr algn="ctr"/>
-            <a:endParaRPr/>
+            <a:endParaRPr>
+              <a:latin typeface="Century Gothic" panose="020B0502020202020204" pitchFamily="34" charset="0"/>
+            </a:endParaRPr>
           </a:p>
         </p:txBody>
       </p:sp>
@@ -17682,7 +17622,7 @@
         <p:spPr>
           <a:xfrm>
             <a:off x="7040880" y="4709160"/>
-            <a:ext cx="4846320" cy="274320"/>
+            <a:ext cx="4846320" cy="153888"/>
           </a:xfrm>
           <a:prstGeom prst="rect">
             <a:avLst/>
@@ -17701,7 +17641,7 @@
                 <a:solidFill>
                   <a:srgbClr val="0F52BA"/>
                 </a:solidFill>
-                <a:latin typeface="Calibri"/>
+                <a:latin typeface="Century Gothic" panose="020B0502020202020204" pitchFamily="34" charset="0"/>
               </a:rPr>
               <a:t>TAKEAWAYS</a:t>
             </a:r>
@@ -17717,7 +17657,7 @@
         <p:spPr>
           <a:xfrm>
             <a:off x="7040880" y="5029200"/>
-            <a:ext cx="4480560" cy="1371600"/>
+            <a:ext cx="4480560" cy="769441"/>
           </a:xfrm>
           <a:prstGeom prst="rect">
             <a:avLst/>
@@ -17740,7 +17680,7 @@
                 <a:solidFill>
                   <a:srgbClr val="0F52BA"/>
                 </a:solidFill>
-                <a:latin typeface="Calibri"/>
+                <a:latin typeface="Century Gothic" panose="020B0502020202020204" pitchFamily="34" charset="0"/>
               </a:rPr>
               <a:t>•  </a:t>
             </a:r>
@@ -17749,7 +17689,7 @@
                 <a:solidFill>
                   <a:srgbClr val="222E3C"/>
                 </a:solidFill>
-                <a:latin typeface="Calibri"/>
+                <a:latin typeface="Century Gothic" panose="020B0502020202020204" pitchFamily="34" charset="0"/>
               </a:rPr>
               <a:t>Removing FIRMS degrades MAE by 4.3 – 6.8 % — fires are signal, not noise</a:t>
             </a:r>
@@ -17765,7 +17705,7 @@
                 <a:solidFill>
                   <a:srgbClr val="0F52BA"/>
                 </a:solidFill>
-                <a:latin typeface="Calibri"/>
+                <a:latin typeface="Century Gothic" panose="020B0502020202020204" pitchFamily="34" charset="0"/>
               </a:rPr>
               <a:t>•  </a:t>
             </a:r>
@@ -17774,7 +17714,7 @@
                 <a:solidFill>
                   <a:srgbClr val="222E3C"/>
                 </a:solidFill>
-                <a:latin typeface="Calibri"/>
+                <a:latin typeface="Century Gothic" panose="020B0502020202020204" pitchFamily="34" charset="0"/>
               </a:rPr>
               <a:t>PR-tuned thresholds lift F1 up to 4.0 points at t+1</a:t>
             </a:r>
@@ -17790,7 +17730,7 @@
                 <a:solidFill>
                   <a:srgbClr val="0F52BA"/>
                 </a:solidFill>
-                <a:latin typeface="Calibri"/>
+                <a:latin typeface="Century Gothic" panose="020B0502020202020204" pitchFamily="34" charset="0"/>
               </a:rPr>
               <a:t>•  </a:t>
             </a:r>
@@ -17799,7 +17739,7 @@
                 <a:solidFill>
                   <a:srgbClr val="222E3C"/>
                 </a:solidFill>
-                <a:latin typeface="Calibri"/>
+                <a:latin typeface="Century Gothic" panose="020B0502020202020204" pitchFamily="34" charset="0"/>
               </a:rPr>
               <a:t>Lower threshold at t+7 (45.8) captures early-warning regime</a:t>
             </a:r>
@@ -17815,7 +17755,7 @@
         <p:spPr>
           <a:xfrm>
             <a:off x="457200" y="6510528"/>
-            <a:ext cx="11247120" cy="274320"/>
+            <a:ext cx="11247120" cy="138499"/>
           </a:xfrm>
           <a:prstGeom prst="rect">
             <a:avLst/>
@@ -17834,7 +17774,7 @@
                 <a:solidFill>
                   <a:srgbClr val="6B6B6B"/>
                 </a:solidFill>
-                <a:latin typeface="Calibri"/>
+                <a:latin typeface="Century Gothic" panose="020B0502020202020204" pitchFamily="34" charset="0"/>
               </a:rPr>
               <a:t>Source: ablation_summary.json · scenario_c_summary.json</a:t>
             </a:r>
@@ -17850,7 +17790,7 @@
         <p:spPr>
           <a:xfrm>
             <a:off x="11475720" y="6510528"/>
-            <a:ext cx="640080" cy="274320"/>
+            <a:ext cx="640080" cy="138499"/>
           </a:xfrm>
           <a:prstGeom prst="rect">
             <a:avLst/>
@@ -17869,7 +17809,7 @@
                 <a:solidFill>
                   <a:srgbClr val="6B6B6B"/>
                 </a:solidFill>
-                <a:latin typeface="Calibri"/>
+                <a:latin typeface="Century Gothic" panose="020B0502020202020204" pitchFamily="34" charset="0"/>
               </a:rPr>
               <a:t>9 / 14</a:t>
             </a:r>
